--- a/examples/pptx/immersion-1-1-problem-statement.pptx
+++ b/examples/pptx/immersion-1-1-problem-statement.pptx
@@ -4564,8 +4564,8 @@
         </p:nvSpPr>
         <p:spPr>
           <a:xfrm>
-            <a:off x="10363200" y="6035040"/>
-            <a:ext cx="1371600" cy="365760"/>
+            <a:off x="11186160" y="6035040"/>
+            <a:ext cx="548640" cy="365760"/>
           </a:xfrm>
         </p:spPr>
         <p:txBody>
@@ -4608,7 +4608,7 @@
             <a:r>
               <a:rPr sz="6000" b="1" i="0">
                 <a:solidFill>
-                  <a:srgbClr val="123A6B"/>
+                  <a:srgbClr val="0072CE"/>
                 </a:solidFill>
                 <a:latin typeface="Arial"/>
               </a:rPr>
@@ -4667,8 +4667,8 @@
         </p:nvSpPr>
         <p:spPr>
           <a:xfrm>
-            <a:off x="10363200" y="6035040"/>
-            <a:ext cx="1371600" cy="365760"/>
+            <a:off x="11186160" y="6035040"/>
+            <a:ext cx="548640" cy="365760"/>
           </a:xfrm>
         </p:spPr>
         <p:txBody>
@@ -4711,7 +4711,7 @@
             <a:r>
               <a:rPr sz="4200" b="1" i="0">
                 <a:solidFill>
-                  <a:srgbClr val="123A6B"/>
+                  <a:srgbClr val="0072CE"/>
                 </a:solidFill>
                 <a:latin typeface="Arial"/>
               </a:rPr>
@@ -4992,8 +4992,8 @@
         </p:nvSpPr>
         <p:spPr>
           <a:xfrm>
-            <a:off x="10363200" y="6035040"/>
-            <a:ext cx="1371600" cy="365760"/>
+            <a:off x="11186160" y="6035040"/>
+            <a:ext cx="548640" cy="365760"/>
           </a:xfrm>
         </p:spPr>
         <p:txBody>
@@ -5036,7 +5036,7 @@
             <a:r>
               <a:rPr sz="4200" b="1" i="0">
                 <a:solidFill>
-                  <a:srgbClr val="123A6B"/>
+                  <a:srgbClr val="0072CE"/>
                 </a:solidFill>
                 <a:latin typeface="Arial"/>
               </a:rPr>
@@ -5317,8 +5317,8 @@
         </p:nvSpPr>
         <p:spPr>
           <a:xfrm>
-            <a:off x="10363200" y="6035040"/>
-            <a:ext cx="1371600" cy="365760"/>
+            <a:off x="11186160" y="6035040"/>
+            <a:ext cx="548640" cy="365760"/>
           </a:xfrm>
         </p:spPr>
         <p:txBody>
@@ -5361,7 +5361,7 @@
             <a:r>
               <a:rPr sz="4200" b="1" i="0">
                 <a:solidFill>
-                  <a:srgbClr val="123A6B"/>
+                  <a:srgbClr val="0072CE"/>
                 </a:solidFill>
                 <a:latin typeface="Arial"/>
               </a:rPr>
@@ -5716,8 +5716,8 @@
         </p:nvSpPr>
         <p:spPr>
           <a:xfrm>
-            <a:off x="10363200" y="6035040"/>
-            <a:ext cx="1371600" cy="365760"/>
+            <a:off x="11186160" y="6035040"/>
+            <a:ext cx="548640" cy="365760"/>
           </a:xfrm>
         </p:spPr>
         <p:txBody>
@@ -5760,7 +5760,7 @@
             <a:r>
               <a:rPr sz="4200" b="1" i="0">
                 <a:solidFill>
-                  <a:srgbClr val="123A6B"/>
+                  <a:srgbClr val="0072CE"/>
                 </a:solidFill>
                 <a:latin typeface="Arial"/>
               </a:rPr>
@@ -6263,8 +6263,8 @@
         </p:nvSpPr>
         <p:spPr>
           <a:xfrm>
-            <a:off x="10363200" y="6035040"/>
-            <a:ext cx="1371600" cy="365760"/>
+            <a:off x="11186160" y="6035040"/>
+            <a:ext cx="548640" cy="365760"/>
           </a:xfrm>
         </p:spPr>
         <p:txBody>
@@ -6307,7 +6307,7 @@
             <a:r>
               <a:rPr sz="4200" b="1" i="0">
                 <a:solidFill>
-                  <a:srgbClr val="123A6B"/>
+                  <a:srgbClr val="0072CE"/>
                 </a:solidFill>
                 <a:latin typeface="Arial"/>
               </a:rPr>
@@ -6440,8 +6440,8 @@
         </p:nvSpPr>
         <p:spPr>
           <a:xfrm>
-            <a:off x="10363200" y="6035040"/>
-            <a:ext cx="1371600" cy="365760"/>
+            <a:off x="11186160" y="6035040"/>
+            <a:ext cx="548640" cy="365760"/>
           </a:xfrm>
         </p:spPr>
         <p:txBody>
@@ -6484,7 +6484,7 @@
             <a:r>
               <a:rPr sz="4200" b="1" i="0">
                 <a:solidFill>
-                  <a:srgbClr val="123A6B"/>
+                  <a:srgbClr val="0072CE"/>
                 </a:solidFill>
                 <a:latin typeface="Arial"/>
               </a:rPr>
@@ -6839,8 +6839,8 @@
         </p:nvSpPr>
         <p:spPr>
           <a:xfrm>
-            <a:off x="10363200" y="6035040"/>
-            <a:ext cx="1371600" cy="365760"/>
+            <a:off x="11186160" y="6035040"/>
+            <a:ext cx="548640" cy="365760"/>
           </a:xfrm>
         </p:spPr>
         <p:txBody>
@@ -6952,7 +6952,7 @@
             <a:r>
               <a:rPr sz="4200" b="1" i="0">
                 <a:solidFill>
-                  <a:srgbClr val="0A2240"/>
+                  <a:srgbClr val="0072CE"/>
                 </a:solidFill>
                 <a:latin typeface="Arial"/>
               </a:rPr>
@@ -7181,8 +7181,8 @@
         </p:nvSpPr>
         <p:spPr>
           <a:xfrm>
-            <a:off x="10363200" y="6035040"/>
-            <a:ext cx="1371600" cy="365760"/>
+            <a:off x="11186160" y="6035040"/>
+            <a:ext cx="548640" cy="365760"/>
           </a:xfrm>
         </p:spPr>
         <p:txBody>
@@ -7225,7 +7225,7 @@
             <a:r>
               <a:rPr sz="4200" b="1" i="0">
                 <a:solidFill>
-                  <a:srgbClr val="0A2240"/>
+                  <a:srgbClr val="0072CE"/>
                 </a:solidFill>
                 <a:latin typeface="Arial"/>
               </a:rPr>
@@ -7686,8 +7686,8 @@
         </p:nvSpPr>
         <p:spPr>
           <a:xfrm>
-            <a:off x="10363200" y="6035040"/>
-            <a:ext cx="1371600" cy="365760"/>
+            <a:off x="11186160" y="6035040"/>
+            <a:ext cx="548640" cy="365760"/>
           </a:xfrm>
         </p:spPr>
         <p:txBody>
@@ -7858,8 +7858,8 @@
         </p:nvSpPr>
         <p:spPr>
           <a:xfrm>
-            <a:off x="10363200" y="6035040"/>
-            <a:ext cx="1371600" cy="365760"/>
+            <a:off x="11186160" y="6035040"/>
+            <a:ext cx="548640" cy="365760"/>
           </a:xfrm>
         </p:spPr>
         <p:txBody>
@@ -8030,8 +8030,8 @@
         </p:nvSpPr>
         <p:spPr>
           <a:xfrm>
-            <a:off x="10363200" y="6035040"/>
-            <a:ext cx="1371600" cy="365760"/>
+            <a:off x="11186160" y="6035040"/>
+            <a:ext cx="548640" cy="365760"/>
           </a:xfrm>
         </p:spPr>
         <p:txBody>
@@ -8202,8 +8202,8 @@
         </p:nvSpPr>
         <p:spPr>
           <a:xfrm>
-            <a:off x="10363200" y="6035040"/>
-            <a:ext cx="1371600" cy="365760"/>
+            <a:off x="11186160" y="6035040"/>
+            <a:ext cx="548640" cy="365760"/>
           </a:xfrm>
         </p:spPr>
         <p:txBody>
@@ -8337,8 +8337,8 @@
         </p:nvSpPr>
         <p:spPr>
           <a:xfrm>
-            <a:off x="10363200" y="6035040"/>
-            <a:ext cx="1371600" cy="365760"/>
+            <a:off x="11186160" y="6035040"/>
+            <a:ext cx="548640" cy="365760"/>
           </a:xfrm>
         </p:spPr>
         <p:txBody>
@@ -8381,7 +8381,7 @@
             <a:r>
               <a:rPr sz="4200" b="1" i="0">
                 <a:solidFill>
-                  <a:srgbClr val="0A2240"/>
+                  <a:srgbClr val="0072CE"/>
                 </a:solidFill>
                 <a:latin typeface="Arial"/>
               </a:rPr>
@@ -8551,8 +8551,8 @@
         </p:nvSpPr>
         <p:spPr>
           <a:xfrm>
-            <a:off x="10363200" y="6035040"/>
-            <a:ext cx="1371600" cy="365760"/>
+            <a:off x="11186160" y="6035040"/>
+            <a:ext cx="548640" cy="365760"/>
           </a:xfrm>
         </p:spPr>
         <p:txBody>
@@ -9305,8 +9305,8 @@
         </p:nvSpPr>
         <p:spPr>
           <a:xfrm>
-            <a:off x="10363200" y="6035040"/>
-            <a:ext cx="1371600" cy="365760"/>
+            <a:off x="11186160" y="6035040"/>
+            <a:ext cx="548640" cy="365760"/>
           </a:xfrm>
         </p:spPr>
         <p:txBody>
@@ -9349,7 +9349,7 @@
             <a:r>
               <a:rPr sz="4200" b="1" i="0">
                 <a:solidFill>
-                  <a:srgbClr val="123A6B"/>
+                  <a:srgbClr val="0072CE"/>
                 </a:solidFill>
                 <a:latin typeface="Arial"/>
               </a:rPr>
@@ -9997,8 +9997,8 @@
         </p:nvSpPr>
         <p:spPr>
           <a:xfrm>
-            <a:off x="10363200" y="6035040"/>
-            <a:ext cx="1371600" cy="365760"/>
+            <a:off x="11186160" y="6035040"/>
+            <a:ext cx="548640" cy="365760"/>
           </a:xfrm>
         </p:spPr>
         <p:txBody>
@@ -10041,7 +10041,7 @@
             <a:r>
               <a:rPr sz="4200" b="1" i="0">
                 <a:solidFill>
-                  <a:srgbClr val="0A2240"/>
+                  <a:srgbClr val="0072CE"/>
                 </a:solidFill>
                 <a:latin typeface="Arial"/>
               </a:rPr>
@@ -10433,8 +10433,8 @@
         </p:nvSpPr>
         <p:spPr>
           <a:xfrm>
-            <a:off x="10363200" y="6035040"/>
-            <a:ext cx="1371600" cy="365760"/>
+            <a:off x="11186160" y="6035040"/>
+            <a:ext cx="548640" cy="365760"/>
           </a:xfrm>
         </p:spPr>
         <p:txBody>
@@ -10477,7 +10477,7 @@
             <a:r>
               <a:rPr sz="4200" b="1" i="0">
                 <a:solidFill>
-                  <a:srgbClr val="123A6B"/>
+                  <a:srgbClr val="0072CE"/>
                 </a:solidFill>
                 <a:latin typeface="Arial"/>
               </a:rPr>
@@ -11142,8 +11142,8 @@
         </p:nvSpPr>
         <p:spPr>
           <a:xfrm>
-            <a:off x="10363200" y="6035040"/>
-            <a:ext cx="1371600" cy="365760"/>
+            <a:off x="11186160" y="6035040"/>
+            <a:ext cx="548640" cy="365760"/>
           </a:xfrm>
         </p:spPr>
         <p:txBody>
@@ -11186,7 +11186,7 @@
             <a:r>
               <a:rPr sz="4200" b="1" i="0">
                 <a:solidFill>
-                  <a:srgbClr val="123A6B"/>
+                  <a:srgbClr val="0072CE"/>
                 </a:solidFill>
                 <a:latin typeface="Arial"/>
               </a:rPr>
@@ -11430,8 +11430,8 @@
         </p:nvSpPr>
         <p:spPr>
           <a:xfrm>
-            <a:off x="10363200" y="6035040"/>
-            <a:ext cx="1371600" cy="365760"/>
+            <a:off x="11186160" y="6035040"/>
+            <a:ext cx="548640" cy="365760"/>
           </a:xfrm>
         </p:spPr>
         <p:txBody>
@@ -11474,7 +11474,7 @@
             <a:r>
               <a:rPr sz="4200" b="1" i="0">
                 <a:solidFill>
-                  <a:srgbClr val="123A6B"/>
+                  <a:srgbClr val="0072CE"/>
                 </a:solidFill>
                 <a:latin typeface="Arial"/>
               </a:rPr>
@@ -12169,8 +12169,8 @@
         </p:nvSpPr>
         <p:spPr>
           <a:xfrm>
-            <a:off x="10363200" y="6035040"/>
-            <a:ext cx="1371600" cy="365760"/>
+            <a:off x="11186160" y="6035040"/>
+            <a:ext cx="548640" cy="365760"/>
           </a:xfrm>
         </p:spPr>
         <p:txBody>
@@ -12213,7 +12213,7 @@
             <a:r>
               <a:rPr sz="4200" b="1" i="0">
                 <a:solidFill>
-                  <a:srgbClr val="123A6B"/>
+                  <a:srgbClr val="0072CE"/>
                 </a:solidFill>
                 <a:latin typeface="Arial"/>
               </a:rPr>
@@ -12765,8 +12765,8 @@
         </p:nvSpPr>
         <p:spPr>
           <a:xfrm>
-            <a:off x="10363200" y="6035040"/>
-            <a:ext cx="1371600" cy="365760"/>
+            <a:off x="11186160" y="6035040"/>
+            <a:ext cx="548640" cy="365760"/>
           </a:xfrm>
         </p:spPr>
         <p:txBody>
@@ -12809,7 +12809,7 @@
             <a:r>
               <a:rPr sz="4200" b="1" i="0">
                 <a:solidFill>
-                  <a:srgbClr val="123A6B"/>
+                  <a:srgbClr val="0072CE"/>
                 </a:solidFill>
                 <a:latin typeface="Arial"/>
               </a:rPr>
@@ -13455,8 +13455,8 @@
         </p:nvSpPr>
         <p:spPr>
           <a:xfrm>
-            <a:off x="10363200" y="6035040"/>
-            <a:ext cx="1371600" cy="365760"/>
+            <a:off x="11186160" y="6035040"/>
+            <a:ext cx="548640" cy="365760"/>
           </a:xfrm>
         </p:spPr>
         <p:txBody>
@@ -13499,7 +13499,7 @@
             <a:r>
               <a:rPr sz="4200" b="1" i="0">
                 <a:solidFill>
-                  <a:srgbClr val="123A6B"/>
+                  <a:srgbClr val="0072CE"/>
                 </a:solidFill>
                 <a:latin typeface="Arial"/>
               </a:rPr>
@@ -13987,8 +13987,8 @@
         </p:nvSpPr>
         <p:spPr>
           <a:xfrm>
-            <a:off x="10363200" y="6035040"/>
-            <a:ext cx="1371600" cy="365760"/>
+            <a:off x="11186160" y="6035040"/>
+            <a:ext cx="548640" cy="365760"/>
           </a:xfrm>
         </p:spPr>
         <p:txBody>
@@ -14031,7 +14031,7 @@
             <a:r>
               <a:rPr sz="4200" b="1" i="0">
                 <a:solidFill>
-                  <a:srgbClr val="123A6B"/>
+                  <a:srgbClr val="0072CE"/>
                 </a:solidFill>
                 <a:latin typeface="Arial"/>
               </a:rPr>
@@ -14662,8 +14662,8 @@
         </p:nvSpPr>
         <p:spPr>
           <a:xfrm>
-            <a:off x="10363200" y="6035040"/>
-            <a:ext cx="1371600" cy="365760"/>
+            <a:off x="11186160" y="6035040"/>
+            <a:ext cx="548640" cy="365760"/>
           </a:xfrm>
         </p:spPr>
         <p:txBody>
@@ -14706,7 +14706,7 @@
             <a:r>
               <a:rPr sz="4200" b="1" i="0">
                 <a:solidFill>
-                  <a:srgbClr val="123A6B"/>
+                  <a:srgbClr val="0072CE"/>
                 </a:solidFill>
                 <a:latin typeface="Arial"/>
               </a:rPr>
@@ -15194,8 +15194,8 @@
         </p:nvSpPr>
         <p:spPr>
           <a:xfrm>
-            <a:off x="10363200" y="6035040"/>
-            <a:ext cx="1371600" cy="365760"/>
+            <a:off x="11186160" y="6035040"/>
+            <a:ext cx="548640" cy="365760"/>
           </a:xfrm>
         </p:spPr>
         <p:txBody>
@@ -15238,7 +15238,7 @@
             <a:r>
               <a:rPr sz="4200" b="1" i="0">
                 <a:solidFill>
-                  <a:srgbClr val="123A6B"/>
+                  <a:srgbClr val="0072CE"/>
                 </a:solidFill>
                 <a:latin typeface="Arial"/>
               </a:rPr>
@@ -15573,8 +15573,8 @@
         </p:nvSpPr>
         <p:spPr>
           <a:xfrm>
-            <a:off x="10363200" y="6035040"/>
-            <a:ext cx="1371600" cy="365760"/>
+            <a:off x="11186160" y="6035040"/>
+            <a:ext cx="548640" cy="365760"/>
           </a:xfrm>
         </p:spPr>
         <p:txBody>
@@ -15617,7 +15617,7 @@
             <a:r>
               <a:rPr sz="4200" b="1" i="0">
                 <a:solidFill>
-                  <a:srgbClr val="123A6B"/>
+                  <a:srgbClr val="0072CE"/>
                 </a:solidFill>
                 <a:latin typeface="Arial"/>
               </a:rPr>
@@ -15994,8 +15994,8 @@
         </p:nvSpPr>
         <p:spPr>
           <a:xfrm>
-            <a:off x="10363200" y="6035040"/>
-            <a:ext cx="1371600" cy="365760"/>
+            <a:off x="11186160" y="6035040"/>
+            <a:ext cx="548640" cy="365760"/>
           </a:xfrm>
         </p:spPr>
         <p:txBody>
@@ -16038,7 +16038,7 @@
             <a:r>
               <a:rPr sz="4200" b="1" i="0">
                 <a:solidFill>
-                  <a:srgbClr val="123A6B"/>
+                  <a:srgbClr val="0072CE"/>
                 </a:solidFill>
                 <a:latin typeface="Arial"/>
               </a:rPr>
@@ -16661,8 +16661,8 @@
         </p:nvSpPr>
         <p:spPr>
           <a:xfrm>
-            <a:off x="10363200" y="6035040"/>
-            <a:ext cx="1371600" cy="365760"/>
+            <a:off x="11186160" y="6035040"/>
+            <a:ext cx="548640" cy="365760"/>
           </a:xfrm>
         </p:spPr>
         <p:txBody>
@@ -16705,7 +16705,7 @@
             <a:r>
               <a:rPr sz="4200" b="1" i="0">
                 <a:solidFill>
-                  <a:srgbClr val="123A6B"/>
+                  <a:srgbClr val="0072CE"/>
                 </a:solidFill>
                 <a:latin typeface="Arial"/>
               </a:rPr>
@@ -17188,8 +17188,8 @@
         </p:nvSpPr>
         <p:spPr>
           <a:xfrm>
-            <a:off x="10363200" y="6035040"/>
-            <a:ext cx="1371600" cy="365760"/>
+            <a:off x="11186160" y="6035040"/>
+            <a:ext cx="548640" cy="365760"/>
           </a:xfrm>
         </p:spPr>
         <p:txBody>
@@ -17232,7 +17232,7 @@
             <a:r>
               <a:rPr sz="4200" b="1" i="0">
                 <a:solidFill>
-                  <a:srgbClr val="123A6B"/>
+                  <a:srgbClr val="0072CE"/>
                 </a:solidFill>
                 <a:latin typeface="Arial"/>
               </a:rPr>
@@ -19654,7 +19654,7 @@
             <a:r>
               <a:rPr sz="6000" b="1" i="0">
                 <a:solidFill>
-                  <a:srgbClr val="123A6B"/>
+                  <a:srgbClr val="0072CE"/>
                 </a:solidFill>
                 <a:latin typeface="Arial"/>
               </a:rPr>
@@ -19750,7 +19750,7 @@
             <a:r>
               <a:rPr sz="4200" b="1" i="0">
                 <a:solidFill>
-                  <a:srgbClr val="123A6B"/>
+                  <a:srgbClr val="0072CE"/>
                 </a:solidFill>
                 <a:latin typeface="Arial"/>
               </a:rPr>
@@ -20137,21 +20137,21 @@
         </p:nvSpPr>
         <p:spPr>
           <a:xfrm>
-            <a:off x="10363200" y="6035040"/>
-            <a:ext cx="1371600" cy="365760"/>
-          </a:xfrm>
-          <a:prstGeom prst="rect">
-            <a:avLst/>
-          </a:prstGeom>
-          <a:noFill/>
-        </p:spPr>
-        <p:txBody>
-          <a:bodyPr wrap="none" lIns="0" rIns="0">
-            <a:noAutofit/>
-          </a:bodyPr>
-          <a:lstStyle/>
-          <a:p>
-            <a:pPr algn="l"/>
+            <a:off x="11186160" y="6035040"/>
+            <a:ext cx="548640" cy="365760"/>
+          </a:xfrm>
+          <a:prstGeom prst="rect">
+            <a:avLst/>
+          </a:prstGeom>
+          <a:noFill/>
+        </p:spPr>
+        <p:txBody>
+          <a:bodyPr wrap="none" lIns="0" rIns="0">
+            <a:noAutofit/>
+          </a:bodyPr>
+          <a:lstStyle/>
+          <a:p>
+            <a:pPr algn="r"/>
             <a:fld id="{4B0E1F8A-6C1D-4E2A-9F3B-7A5C8D2E1F60}" type="slidenum">
               <a:rPr sz="1600" b="0" i="0">
                 <a:solidFill>
@@ -20216,7 +20216,7 @@
             <a:r>
               <a:rPr sz="4200" b="1" i="0">
                 <a:solidFill>
-                  <a:srgbClr val="123A6B"/>
+                  <a:srgbClr val="0072CE"/>
                 </a:solidFill>
                 <a:latin typeface="Arial"/>
               </a:rPr>
@@ -20629,21 +20629,21 @@
         </p:nvSpPr>
         <p:spPr>
           <a:xfrm>
-            <a:off x="10363200" y="6035040"/>
-            <a:ext cx="1371600" cy="365760"/>
-          </a:xfrm>
-          <a:prstGeom prst="rect">
-            <a:avLst/>
-          </a:prstGeom>
-          <a:noFill/>
-        </p:spPr>
-        <p:txBody>
-          <a:bodyPr wrap="none" lIns="0" rIns="0">
-            <a:noAutofit/>
-          </a:bodyPr>
-          <a:lstStyle/>
-          <a:p>
-            <a:pPr algn="l"/>
+            <a:off x="11186160" y="6035040"/>
+            <a:ext cx="548640" cy="365760"/>
+          </a:xfrm>
+          <a:prstGeom prst="rect">
+            <a:avLst/>
+          </a:prstGeom>
+          <a:noFill/>
+        </p:spPr>
+        <p:txBody>
+          <a:bodyPr wrap="none" lIns="0" rIns="0">
+            <a:noAutofit/>
+          </a:bodyPr>
+          <a:lstStyle/>
+          <a:p>
+            <a:pPr algn="r"/>
             <a:fld id="{4B0E1F8A-6C1D-4E2A-9F3B-7A5C8D2E1F60}" type="slidenum">
               <a:rPr sz="1600" b="0" i="0">
                 <a:solidFill>
@@ -20708,7 +20708,7 @@
             <a:r>
               <a:rPr sz="4200" b="1" i="0">
                 <a:solidFill>
-                  <a:srgbClr val="0A2240"/>
+                  <a:srgbClr val="0072CE"/>
                 </a:solidFill>
                 <a:latin typeface="Arial"/>
               </a:rPr>
@@ -20867,21 +20867,21 @@
         </p:nvSpPr>
         <p:spPr>
           <a:xfrm>
-            <a:off x="10363200" y="6035040"/>
-            <a:ext cx="1371600" cy="365760"/>
-          </a:xfrm>
-          <a:prstGeom prst="rect">
-            <a:avLst/>
-          </a:prstGeom>
-          <a:noFill/>
-        </p:spPr>
-        <p:txBody>
-          <a:bodyPr wrap="none" lIns="0" rIns="0">
-            <a:noAutofit/>
-          </a:bodyPr>
-          <a:lstStyle/>
-          <a:p>
-            <a:pPr algn="l"/>
+            <a:off x="11186160" y="6035040"/>
+            <a:ext cx="548640" cy="365760"/>
+          </a:xfrm>
+          <a:prstGeom prst="rect">
+            <a:avLst/>
+          </a:prstGeom>
+          <a:noFill/>
+        </p:spPr>
+        <p:txBody>
+          <a:bodyPr wrap="none" lIns="0" rIns="0">
+            <a:noAutofit/>
+          </a:bodyPr>
+          <a:lstStyle/>
+          <a:p>
+            <a:pPr algn="r"/>
             <a:fld id="{4B0E1F8A-6C1D-4E2A-9F3B-7A5C8D2E1F60}" type="slidenum">
               <a:rPr sz="1600" b="0" i="0">
                 <a:solidFill>
@@ -20946,7 +20946,7 @@
             <a:r>
               <a:rPr sz="4200" b="1" i="0">
                 <a:solidFill>
-                  <a:srgbClr val="123A6B"/>
+                  <a:srgbClr val="0072CE"/>
                 </a:solidFill>
                 <a:latin typeface="Arial"/>
               </a:rPr>
@@ -21175,21 +21175,21 @@
         </p:nvSpPr>
         <p:spPr>
           <a:xfrm>
-            <a:off x="10363200" y="6035040"/>
-            <a:ext cx="1371600" cy="365760"/>
-          </a:xfrm>
-          <a:prstGeom prst="rect">
-            <a:avLst/>
-          </a:prstGeom>
-          <a:noFill/>
-        </p:spPr>
-        <p:txBody>
-          <a:bodyPr wrap="none" lIns="0" rIns="0">
-            <a:noAutofit/>
-          </a:bodyPr>
-          <a:lstStyle/>
-          <a:p>
-            <a:pPr algn="l"/>
+            <a:off x="11186160" y="6035040"/>
+            <a:ext cx="548640" cy="365760"/>
+          </a:xfrm>
+          <a:prstGeom prst="rect">
+            <a:avLst/>
+          </a:prstGeom>
+          <a:noFill/>
+        </p:spPr>
+        <p:txBody>
+          <a:bodyPr wrap="none" lIns="0" rIns="0">
+            <a:noAutofit/>
+          </a:bodyPr>
+          <a:lstStyle/>
+          <a:p>
+            <a:pPr algn="r"/>
             <a:fld id="{4B0E1F8A-6C1D-4E2A-9F3B-7A5C8D2E1F60}" type="slidenum">
               <a:rPr sz="1600" b="0" i="0">
                 <a:solidFill>
@@ -21352,21 +21352,21 @@
         </p:nvSpPr>
         <p:spPr>
           <a:xfrm>
-            <a:off x="10363200" y="6035040"/>
-            <a:ext cx="1371600" cy="365760"/>
-          </a:xfrm>
-          <a:prstGeom prst="rect">
-            <a:avLst/>
-          </a:prstGeom>
-          <a:noFill/>
-        </p:spPr>
-        <p:txBody>
-          <a:bodyPr wrap="none" lIns="0" rIns="0">
-            <a:noAutofit/>
-          </a:bodyPr>
-          <a:lstStyle/>
-          <a:p>
-            <a:pPr algn="l"/>
+            <a:off x="11186160" y="6035040"/>
+            <a:ext cx="548640" cy="365760"/>
+          </a:xfrm>
+          <a:prstGeom prst="rect">
+            <a:avLst/>
+          </a:prstGeom>
+          <a:noFill/>
+        </p:spPr>
+        <p:txBody>
+          <a:bodyPr wrap="none" lIns="0" rIns="0">
+            <a:noAutofit/>
+          </a:bodyPr>
+          <a:lstStyle/>
+          <a:p>
+            <a:pPr algn="r"/>
             <a:fld id="{4B0E1F8A-6C1D-4E2A-9F3B-7A5C8D2E1F60}" type="slidenum">
               <a:rPr sz="1600" b="0" i="0">
                 <a:solidFill>
@@ -21529,21 +21529,21 @@
         </p:nvSpPr>
         <p:spPr>
           <a:xfrm>
-            <a:off x="10363200" y="6035040"/>
-            <a:ext cx="1371600" cy="365760"/>
-          </a:xfrm>
-          <a:prstGeom prst="rect">
-            <a:avLst/>
-          </a:prstGeom>
-          <a:noFill/>
-        </p:spPr>
-        <p:txBody>
-          <a:bodyPr wrap="none" lIns="0" rIns="0">
-            <a:noAutofit/>
-          </a:bodyPr>
-          <a:lstStyle/>
-          <a:p>
-            <a:pPr algn="l"/>
+            <a:off x="11186160" y="6035040"/>
+            <a:ext cx="548640" cy="365760"/>
+          </a:xfrm>
+          <a:prstGeom prst="rect">
+            <a:avLst/>
+          </a:prstGeom>
+          <a:noFill/>
+        </p:spPr>
+        <p:txBody>
+          <a:bodyPr wrap="none" lIns="0" rIns="0">
+            <a:noAutofit/>
+          </a:bodyPr>
+          <a:lstStyle/>
+          <a:p>
+            <a:pPr algn="r"/>
             <a:fld id="{4B0E1F8A-6C1D-4E2A-9F3B-7A5C8D2E1F60}" type="slidenum">
               <a:rPr sz="1600" b="0" i="0">
                 <a:solidFill>
@@ -21608,7 +21608,7 @@
             <a:r>
               <a:rPr sz="4200" b="1" i="0">
                 <a:solidFill>
-                  <a:srgbClr val="0A2240"/>
+                  <a:srgbClr val="0072CE"/>
                 </a:solidFill>
                 <a:latin typeface="Arial"/>
               </a:rPr>
@@ -21767,21 +21767,21 @@
         </p:nvSpPr>
         <p:spPr>
           <a:xfrm>
-            <a:off x="10363200" y="6035040"/>
-            <a:ext cx="1371600" cy="365760"/>
-          </a:xfrm>
-          <a:prstGeom prst="rect">
-            <a:avLst/>
-          </a:prstGeom>
-          <a:noFill/>
-        </p:spPr>
-        <p:txBody>
-          <a:bodyPr wrap="none" lIns="0" rIns="0">
-            <a:noAutofit/>
-          </a:bodyPr>
-          <a:lstStyle/>
-          <a:p>
-            <a:pPr algn="l"/>
+            <a:off x="11186160" y="6035040"/>
+            <a:ext cx="548640" cy="365760"/>
+          </a:xfrm>
+          <a:prstGeom prst="rect">
+            <a:avLst/>
+          </a:prstGeom>
+          <a:noFill/>
+        </p:spPr>
+        <p:txBody>
+          <a:bodyPr wrap="none" lIns="0" rIns="0">
+            <a:noAutofit/>
+          </a:bodyPr>
+          <a:lstStyle/>
+          <a:p>
+            <a:pPr algn="r"/>
             <a:fld id="{4B0E1F8A-6C1D-4E2A-9F3B-7A5C8D2E1F60}" type="slidenum">
               <a:rPr sz="1600" b="0" i="0">
                 <a:solidFill>
@@ -22347,21 +22347,21 @@
         </p:nvSpPr>
         <p:spPr>
           <a:xfrm>
-            <a:off x="10363200" y="6035040"/>
-            <a:ext cx="1371600" cy="365760"/>
-          </a:xfrm>
-          <a:prstGeom prst="rect">
-            <a:avLst/>
-          </a:prstGeom>
-          <a:noFill/>
-        </p:spPr>
-        <p:txBody>
-          <a:bodyPr wrap="none" lIns="0" rIns="0">
-            <a:noAutofit/>
-          </a:bodyPr>
-          <a:lstStyle/>
-          <a:p>
-            <a:pPr algn="l"/>
+            <a:off x="11186160" y="6035040"/>
+            <a:ext cx="548640" cy="365760"/>
+          </a:xfrm>
+          <a:prstGeom prst="rect">
+            <a:avLst/>
+          </a:prstGeom>
+          <a:noFill/>
+        </p:spPr>
+        <p:txBody>
+          <a:bodyPr wrap="none" lIns="0" rIns="0">
+            <a:noAutofit/>
+          </a:bodyPr>
+          <a:lstStyle/>
+          <a:p>
+            <a:pPr algn="r"/>
             <a:fld id="{4B0E1F8A-6C1D-4E2A-9F3B-7A5C8D2E1F60}" type="slidenum">
               <a:rPr sz="1600" b="0" i="0">
                 <a:solidFill>
@@ -22426,7 +22426,7 @@
             <a:r>
               <a:rPr sz="4200" b="1" i="0">
                 <a:solidFill>
-                  <a:srgbClr val="0A2240"/>
+                  <a:srgbClr val="0072CE"/>
                 </a:solidFill>
                 <a:latin typeface="Arial"/>
               </a:rPr>
@@ -22760,21 +22760,21 @@
         </p:nvSpPr>
         <p:spPr>
           <a:xfrm>
-            <a:off x="10363200" y="6035040"/>
-            <a:ext cx="1371600" cy="365760"/>
-          </a:xfrm>
-          <a:prstGeom prst="rect">
-            <a:avLst/>
-          </a:prstGeom>
-          <a:noFill/>
-        </p:spPr>
-        <p:txBody>
-          <a:bodyPr wrap="none" lIns="0" rIns="0">
-            <a:noAutofit/>
-          </a:bodyPr>
-          <a:lstStyle/>
-          <a:p>
-            <a:pPr algn="l"/>
+            <a:off x="11186160" y="6035040"/>
+            <a:ext cx="548640" cy="365760"/>
+          </a:xfrm>
+          <a:prstGeom prst="rect">
+            <a:avLst/>
+          </a:prstGeom>
+          <a:noFill/>
+        </p:spPr>
+        <p:txBody>
+          <a:bodyPr wrap="none" lIns="0" rIns="0">
+            <a:noAutofit/>
+          </a:bodyPr>
+          <a:lstStyle/>
+          <a:p>
+            <a:pPr algn="r"/>
             <a:fld id="{4B0E1F8A-6C1D-4E2A-9F3B-7A5C8D2E1F60}" type="slidenum">
               <a:rPr sz="1600" b="0" i="0">
                 <a:solidFill>
@@ -22839,7 +22839,7 @@
             <a:r>
               <a:rPr sz="4200" b="1" i="0">
                 <a:solidFill>
-                  <a:srgbClr val="123A6B"/>
+                  <a:srgbClr val="0072CE"/>
                 </a:solidFill>
                 <a:latin typeface="Arial"/>
               </a:rPr>
@@ -23138,21 +23138,21 @@
         </p:nvSpPr>
         <p:spPr>
           <a:xfrm>
-            <a:off x="10363200" y="6035040"/>
-            <a:ext cx="1371600" cy="365760"/>
-          </a:xfrm>
-          <a:prstGeom prst="rect">
-            <a:avLst/>
-          </a:prstGeom>
-          <a:noFill/>
-        </p:spPr>
-        <p:txBody>
-          <a:bodyPr wrap="none" lIns="0" rIns="0">
-            <a:noAutofit/>
-          </a:bodyPr>
-          <a:lstStyle/>
-          <a:p>
-            <a:pPr algn="l"/>
+            <a:off x="11186160" y="6035040"/>
+            <a:ext cx="548640" cy="365760"/>
+          </a:xfrm>
+          <a:prstGeom prst="rect">
+            <a:avLst/>
+          </a:prstGeom>
+          <a:noFill/>
+        </p:spPr>
+        <p:txBody>
+          <a:bodyPr wrap="none" lIns="0" rIns="0">
+            <a:noAutofit/>
+          </a:bodyPr>
+          <a:lstStyle/>
+          <a:p>
+            <a:pPr algn="r"/>
             <a:fld id="{4B0E1F8A-6C1D-4E2A-9F3B-7A5C8D2E1F60}" type="slidenum">
               <a:rPr sz="1600" b="0" i="0">
                 <a:solidFill>
@@ -23350,21 +23350,21 @@
         </p:nvSpPr>
         <p:spPr>
           <a:xfrm>
-            <a:off x="10363200" y="6035040"/>
-            <a:ext cx="1371600" cy="365760"/>
-          </a:xfrm>
-          <a:prstGeom prst="rect">
-            <a:avLst/>
-          </a:prstGeom>
-          <a:noFill/>
-        </p:spPr>
-        <p:txBody>
-          <a:bodyPr wrap="none" lIns="0" rIns="0">
-            <a:noAutofit/>
-          </a:bodyPr>
-          <a:lstStyle/>
-          <a:p>
-            <a:pPr algn="l"/>
+            <a:off x="11186160" y="6035040"/>
+            <a:ext cx="548640" cy="365760"/>
+          </a:xfrm>
+          <a:prstGeom prst="rect">
+            <a:avLst/>
+          </a:prstGeom>
+          <a:noFill/>
+        </p:spPr>
+        <p:txBody>
+          <a:bodyPr wrap="none" lIns="0" rIns="0">
+            <a:noAutofit/>
+          </a:bodyPr>
+          <a:lstStyle/>
+          <a:p>
+            <a:pPr algn="r"/>
             <a:fld id="{4B0E1F8A-6C1D-4E2A-9F3B-7A5C8D2E1F60}" type="slidenum">
               <a:rPr sz="1600" b="0" i="0">
                 <a:solidFill>
@@ -23429,7 +23429,7 @@
             <a:r>
               <a:rPr sz="4200" b="1" i="0">
                 <a:solidFill>
-                  <a:srgbClr val="0A2240"/>
+                  <a:srgbClr val="0072CE"/>
                 </a:solidFill>
                 <a:latin typeface="Arial"/>
               </a:rPr>
@@ -23588,21 +23588,21 @@
         </p:nvSpPr>
         <p:spPr>
           <a:xfrm>
-            <a:off x="10363200" y="6035040"/>
-            <a:ext cx="1371600" cy="365760"/>
-          </a:xfrm>
-          <a:prstGeom prst="rect">
-            <a:avLst/>
-          </a:prstGeom>
-          <a:noFill/>
-        </p:spPr>
-        <p:txBody>
-          <a:bodyPr wrap="none" lIns="0" rIns="0">
-            <a:noAutofit/>
-          </a:bodyPr>
-          <a:lstStyle/>
-          <a:p>
-            <a:pPr algn="l"/>
+            <a:off x="11186160" y="6035040"/>
+            <a:ext cx="548640" cy="365760"/>
+          </a:xfrm>
+          <a:prstGeom prst="rect">
+            <a:avLst/>
+          </a:prstGeom>
+          <a:noFill/>
+        </p:spPr>
+        <p:txBody>
+          <a:bodyPr wrap="none" lIns="0" rIns="0">
+            <a:noAutofit/>
+          </a:bodyPr>
+          <a:lstStyle/>
+          <a:p>
+            <a:pPr algn="r"/>
             <a:fld id="{4B0E1F8A-6C1D-4E2A-9F3B-7A5C8D2E1F60}" type="slidenum">
               <a:rPr sz="1600" b="0" i="0">
                 <a:solidFill>
@@ -23746,7 +23746,7 @@
             <a:r>
               <a:rPr sz="4200" b="1" i="0">
                 <a:solidFill>
-                  <a:srgbClr val="0A2240"/>
+                  <a:srgbClr val="0072CE"/>
                 </a:solidFill>
                 <a:latin typeface="Arial"/>
               </a:rPr>
@@ -23765,21 +23765,21 @@
         </p:nvSpPr>
         <p:spPr>
           <a:xfrm>
-            <a:off x="10363200" y="6035040"/>
-            <a:ext cx="1371600" cy="365760"/>
-          </a:xfrm>
-          <a:prstGeom prst="rect">
-            <a:avLst/>
-          </a:prstGeom>
-          <a:noFill/>
-        </p:spPr>
-        <p:txBody>
-          <a:bodyPr wrap="none" lIns="0" rIns="0">
-            <a:noAutofit/>
-          </a:bodyPr>
-          <a:lstStyle/>
-          <a:p>
-            <a:pPr algn="l"/>
+            <a:off x="11186160" y="6035040"/>
+            <a:ext cx="548640" cy="365760"/>
+          </a:xfrm>
+          <a:prstGeom prst="rect">
+            <a:avLst/>
+          </a:prstGeom>
+          <a:noFill/>
+        </p:spPr>
+        <p:txBody>
+          <a:bodyPr wrap="none" lIns="0" rIns="0">
+            <a:noAutofit/>
+          </a:bodyPr>
+          <a:lstStyle/>
+          <a:p>
+            <a:pPr algn="r"/>
             <a:fld id="{4B0E1F8A-6C1D-4E2A-9F3B-7A5C8D2E1F60}" type="slidenum">
               <a:rPr sz="1600" b="0" i="0">
                 <a:solidFill>
@@ -23942,21 +23942,21 @@
         </p:nvSpPr>
         <p:spPr>
           <a:xfrm>
-            <a:off x="10363200" y="6035040"/>
-            <a:ext cx="1371600" cy="365760"/>
-          </a:xfrm>
-          <a:prstGeom prst="rect">
-            <a:avLst/>
-          </a:prstGeom>
-          <a:noFill/>
-        </p:spPr>
-        <p:txBody>
-          <a:bodyPr wrap="none" lIns="0" rIns="0">
-            <a:noAutofit/>
-          </a:bodyPr>
-          <a:lstStyle/>
-          <a:p>
-            <a:pPr algn="l"/>
+            <a:off x="11186160" y="6035040"/>
+            <a:ext cx="548640" cy="365760"/>
+          </a:xfrm>
+          <a:prstGeom prst="rect">
+            <a:avLst/>
+          </a:prstGeom>
+          <a:noFill/>
+        </p:spPr>
+        <p:txBody>
+          <a:bodyPr wrap="none" lIns="0" rIns="0">
+            <a:noAutofit/>
+          </a:bodyPr>
+          <a:lstStyle/>
+          <a:p>
+            <a:pPr algn="r"/>
             <a:fld id="{4B0E1F8A-6C1D-4E2A-9F3B-7A5C8D2E1F60}" type="slidenum">
               <a:rPr sz="1600" b="0" i="0">
                 <a:solidFill>
@@ -24021,7 +24021,7 @@
             <a:r>
               <a:rPr sz="4200" b="1" i="0">
                 <a:solidFill>
-                  <a:srgbClr val="123A6B"/>
+                  <a:srgbClr val="0072CE"/>
                 </a:solidFill>
                 <a:latin typeface="Arial"/>
               </a:rPr>
@@ -24250,21 +24250,21 @@
         </p:nvSpPr>
         <p:spPr>
           <a:xfrm>
-            <a:off x="10363200" y="6035040"/>
-            <a:ext cx="1371600" cy="365760"/>
-          </a:xfrm>
-          <a:prstGeom prst="rect">
-            <a:avLst/>
-          </a:prstGeom>
-          <a:noFill/>
-        </p:spPr>
-        <p:txBody>
-          <a:bodyPr wrap="none" lIns="0" rIns="0">
-            <a:noAutofit/>
-          </a:bodyPr>
-          <a:lstStyle/>
-          <a:p>
-            <a:pPr algn="l"/>
+            <a:off x="11186160" y="6035040"/>
+            <a:ext cx="548640" cy="365760"/>
+          </a:xfrm>
+          <a:prstGeom prst="rect">
+            <a:avLst/>
+          </a:prstGeom>
+          <a:noFill/>
+        </p:spPr>
+        <p:txBody>
+          <a:bodyPr wrap="none" lIns="0" rIns="0">
+            <a:noAutofit/>
+          </a:bodyPr>
+          <a:lstStyle/>
+          <a:p>
+            <a:pPr algn="r"/>
             <a:fld id="{4B0E1F8A-6C1D-4E2A-9F3B-7A5C8D2E1F60}" type="slidenum">
               <a:rPr sz="1600" b="0" i="0">
                 <a:solidFill>
@@ -24427,21 +24427,21 @@
         </p:nvSpPr>
         <p:spPr>
           <a:xfrm>
-            <a:off x="10363200" y="6035040"/>
-            <a:ext cx="1371600" cy="365760"/>
-          </a:xfrm>
-          <a:prstGeom prst="rect">
-            <a:avLst/>
-          </a:prstGeom>
-          <a:noFill/>
-        </p:spPr>
-        <p:txBody>
-          <a:bodyPr wrap="none" lIns="0" rIns="0">
-            <a:noAutofit/>
-          </a:bodyPr>
-          <a:lstStyle/>
-          <a:p>
-            <a:pPr algn="l"/>
+            <a:off x="11186160" y="6035040"/>
+            <a:ext cx="548640" cy="365760"/>
+          </a:xfrm>
+          <a:prstGeom prst="rect">
+            <a:avLst/>
+          </a:prstGeom>
+          <a:noFill/>
+        </p:spPr>
+        <p:txBody>
+          <a:bodyPr wrap="none" lIns="0" rIns="0">
+            <a:noAutofit/>
+          </a:bodyPr>
+          <a:lstStyle/>
+          <a:p>
+            <a:pPr algn="r"/>
             <a:fld id="{4B0E1F8A-6C1D-4E2A-9F3B-7A5C8D2E1F60}" type="slidenum">
               <a:rPr sz="1600" b="0" i="0">
                 <a:solidFill>
@@ -24506,7 +24506,7 @@
             <a:r>
               <a:rPr sz="4200" b="1" i="0">
                 <a:solidFill>
-                  <a:srgbClr val="123A6B"/>
+                  <a:srgbClr val="0072CE"/>
                 </a:solidFill>
                 <a:latin typeface="Arial"/>
               </a:rPr>
@@ -24919,21 +24919,21 @@
         </p:nvSpPr>
         <p:spPr>
           <a:xfrm>
-            <a:off x="10363200" y="6035040"/>
-            <a:ext cx="1371600" cy="365760"/>
-          </a:xfrm>
-          <a:prstGeom prst="rect">
-            <a:avLst/>
-          </a:prstGeom>
-          <a:noFill/>
-        </p:spPr>
-        <p:txBody>
-          <a:bodyPr wrap="none" lIns="0" rIns="0">
-            <a:noAutofit/>
-          </a:bodyPr>
-          <a:lstStyle/>
-          <a:p>
-            <a:pPr algn="l"/>
+            <a:off x="11186160" y="6035040"/>
+            <a:ext cx="548640" cy="365760"/>
+          </a:xfrm>
+          <a:prstGeom prst="rect">
+            <a:avLst/>
+          </a:prstGeom>
+          <a:noFill/>
+        </p:spPr>
+        <p:txBody>
+          <a:bodyPr wrap="none" lIns="0" rIns="0">
+            <a:noAutofit/>
+          </a:bodyPr>
+          <a:lstStyle/>
+          <a:p>
+            <a:pPr algn="r"/>
             <a:fld id="{4B0E1F8A-6C1D-4E2A-9F3B-7A5C8D2E1F60}" type="slidenum">
               <a:rPr sz="1600" b="0" i="0">
                 <a:solidFill>
@@ -25096,21 +25096,21 @@
         </p:nvSpPr>
         <p:spPr>
           <a:xfrm>
-            <a:off x="10363200" y="6035040"/>
-            <a:ext cx="1371600" cy="365760"/>
-          </a:xfrm>
-          <a:prstGeom prst="rect">
-            <a:avLst/>
-          </a:prstGeom>
-          <a:noFill/>
-        </p:spPr>
-        <p:txBody>
-          <a:bodyPr wrap="none" lIns="0" rIns="0">
-            <a:noAutofit/>
-          </a:bodyPr>
-          <a:lstStyle/>
-          <a:p>
-            <a:pPr algn="l"/>
+            <a:off x="11186160" y="6035040"/>
+            <a:ext cx="548640" cy="365760"/>
+          </a:xfrm>
+          <a:prstGeom prst="rect">
+            <a:avLst/>
+          </a:prstGeom>
+          <a:noFill/>
+        </p:spPr>
+        <p:txBody>
+          <a:bodyPr wrap="none" lIns="0" rIns="0">
+            <a:noAutofit/>
+          </a:bodyPr>
+          <a:lstStyle/>
+          <a:p>
+            <a:pPr algn="r"/>
             <a:fld id="{4B0E1F8A-6C1D-4E2A-9F3B-7A5C8D2E1F60}" type="slidenum">
               <a:rPr sz="1600" b="0" i="0">
                 <a:solidFill>
@@ -25175,7 +25175,7 @@
             <a:r>
               <a:rPr sz="4200" b="1" i="0">
                 <a:solidFill>
-                  <a:srgbClr val="123A6B"/>
+                  <a:srgbClr val="0072CE"/>
                 </a:solidFill>
                 <a:latin typeface="Arial"/>
               </a:rPr>
@@ -25404,21 +25404,21 @@
         </p:nvSpPr>
         <p:spPr>
           <a:xfrm>
-            <a:off x="10363200" y="6035040"/>
-            <a:ext cx="1371600" cy="365760"/>
-          </a:xfrm>
-          <a:prstGeom prst="rect">
-            <a:avLst/>
-          </a:prstGeom>
-          <a:noFill/>
-        </p:spPr>
-        <p:txBody>
-          <a:bodyPr wrap="none" lIns="0" rIns="0">
-            <a:noAutofit/>
-          </a:bodyPr>
-          <a:lstStyle/>
-          <a:p>
-            <a:pPr algn="l"/>
+            <a:off x="11186160" y="6035040"/>
+            <a:ext cx="548640" cy="365760"/>
+          </a:xfrm>
+          <a:prstGeom prst="rect">
+            <a:avLst/>
+          </a:prstGeom>
+          <a:noFill/>
+        </p:spPr>
+        <p:txBody>
+          <a:bodyPr wrap="none" lIns="0" rIns="0">
+            <a:noAutofit/>
+          </a:bodyPr>
+          <a:lstStyle/>
+          <a:p>
+            <a:pPr algn="r"/>
             <a:fld id="{4B0E1F8A-6C1D-4E2A-9F3B-7A5C8D2E1F60}" type="slidenum">
               <a:rPr sz="1600" b="0" i="0">
                 <a:solidFill>
@@ -25581,21 +25581,21 @@
         </p:nvSpPr>
         <p:spPr>
           <a:xfrm>
-            <a:off x="10363200" y="6035040"/>
-            <a:ext cx="1371600" cy="365760"/>
-          </a:xfrm>
-          <a:prstGeom prst="rect">
-            <a:avLst/>
-          </a:prstGeom>
-          <a:noFill/>
-        </p:spPr>
-        <p:txBody>
-          <a:bodyPr wrap="none" lIns="0" rIns="0">
-            <a:noAutofit/>
-          </a:bodyPr>
-          <a:lstStyle/>
-          <a:p>
-            <a:pPr algn="l"/>
+            <a:off x="11186160" y="6035040"/>
+            <a:ext cx="548640" cy="365760"/>
+          </a:xfrm>
+          <a:prstGeom prst="rect">
+            <a:avLst/>
+          </a:prstGeom>
+          <a:noFill/>
+        </p:spPr>
+        <p:txBody>
+          <a:bodyPr wrap="none" lIns="0" rIns="0">
+            <a:noAutofit/>
+          </a:bodyPr>
+          <a:lstStyle/>
+          <a:p>
+            <a:pPr algn="r"/>
             <a:fld id="{4B0E1F8A-6C1D-4E2A-9F3B-7A5C8D2E1F60}" type="slidenum">
               <a:rPr sz="1600" b="0" i="0">
                 <a:solidFill>
@@ -25660,7 +25660,7 @@
             <a:r>
               <a:rPr sz="4200" b="1" i="0">
                 <a:solidFill>
-                  <a:srgbClr val="123A6B"/>
+                  <a:srgbClr val="0072CE"/>
                 </a:solidFill>
                 <a:latin typeface="Arial"/>
               </a:rPr>
@@ -25854,21 +25854,21 @@
         </p:nvSpPr>
         <p:spPr>
           <a:xfrm>
-            <a:off x="10363200" y="6035040"/>
-            <a:ext cx="1371600" cy="365760"/>
-          </a:xfrm>
-          <a:prstGeom prst="rect">
-            <a:avLst/>
-          </a:prstGeom>
-          <a:noFill/>
-        </p:spPr>
-        <p:txBody>
-          <a:bodyPr wrap="none" lIns="0" rIns="0">
-            <a:noAutofit/>
-          </a:bodyPr>
-          <a:lstStyle/>
-          <a:p>
-            <a:pPr algn="l"/>
+            <a:off x="11186160" y="6035040"/>
+            <a:ext cx="548640" cy="365760"/>
+          </a:xfrm>
+          <a:prstGeom prst="rect">
+            <a:avLst/>
+          </a:prstGeom>
+          <a:noFill/>
+        </p:spPr>
+        <p:txBody>
+          <a:bodyPr wrap="none" lIns="0" rIns="0">
+            <a:noAutofit/>
+          </a:bodyPr>
+          <a:lstStyle/>
+          <a:p>
+            <a:pPr algn="r"/>
             <a:fld id="{4B0E1F8A-6C1D-4E2A-9F3B-7A5C8D2E1F60}" type="slidenum">
               <a:rPr sz="1600" b="0" i="0">
                 <a:solidFill>
@@ -25933,7 +25933,7 @@
             <a:r>
               <a:rPr sz="4200" b="1" i="0">
                 <a:solidFill>
-                  <a:srgbClr val="0A2240"/>
+                  <a:srgbClr val="0072CE"/>
                 </a:solidFill>
                 <a:latin typeface="Arial"/>
               </a:rPr>
@@ -26276,21 +26276,21 @@
         </p:nvSpPr>
         <p:spPr>
           <a:xfrm>
-            <a:off x="10363200" y="6035040"/>
-            <a:ext cx="1371600" cy="365760"/>
-          </a:xfrm>
-          <a:prstGeom prst="rect">
-            <a:avLst/>
-          </a:prstGeom>
-          <a:noFill/>
-        </p:spPr>
-        <p:txBody>
-          <a:bodyPr wrap="none" lIns="0" rIns="0">
-            <a:noAutofit/>
-          </a:bodyPr>
-          <a:lstStyle/>
-          <a:p>
-            <a:pPr algn="l"/>
+            <a:off x="11186160" y="6035040"/>
+            <a:ext cx="548640" cy="365760"/>
+          </a:xfrm>
+          <a:prstGeom prst="rect">
+            <a:avLst/>
+          </a:prstGeom>
+          <a:noFill/>
+        </p:spPr>
+        <p:txBody>
+          <a:bodyPr wrap="none" lIns="0" rIns="0">
+            <a:noAutofit/>
+          </a:bodyPr>
+          <a:lstStyle/>
+          <a:p>
+            <a:pPr algn="r"/>
             <a:fld id="{4B0E1F8A-6C1D-4E2A-9F3B-7A5C8D2E1F60}" type="slidenum">
               <a:rPr sz="1600" b="0" i="0">
                 <a:solidFill>
@@ -26355,7 +26355,7 @@
             <a:r>
               <a:rPr sz="4200" b="1" i="0">
                 <a:solidFill>
-                  <a:srgbClr val="123A6B"/>
+                  <a:srgbClr val="0072CE"/>
                 </a:solidFill>
                 <a:latin typeface="Arial"/>
               </a:rPr>
@@ -26987,21 +26987,21 @@
         </p:nvSpPr>
         <p:spPr>
           <a:xfrm>
-            <a:off x="10363200" y="6035040"/>
-            <a:ext cx="1371600" cy="365760"/>
-          </a:xfrm>
-          <a:prstGeom prst="rect">
-            <a:avLst/>
-          </a:prstGeom>
-          <a:noFill/>
-        </p:spPr>
-        <p:txBody>
-          <a:bodyPr wrap="none" lIns="0" rIns="0">
-            <a:noAutofit/>
-          </a:bodyPr>
-          <a:lstStyle/>
-          <a:p>
-            <a:pPr algn="l"/>
+            <a:off x="11186160" y="6035040"/>
+            <a:ext cx="548640" cy="365760"/>
+          </a:xfrm>
+          <a:prstGeom prst="rect">
+            <a:avLst/>
+          </a:prstGeom>
+          <a:noFill/>
+        </p:spPr>
+        <p:txBody>
+          <a:bodyPr wrap="none" lIns="0" rIns="0">
+            <a:noAutofit/>
+          </a:bodyPr>
+          <a:lstStyle/>
+          <a:p>
+            <a:pPr algn="r"/>
             <a:fld id="{4B0E1F8A-6C1D-4E2A-9F3B-7A5C8D2E1F60}" type="slidenum">
               <a:rPr sz="1600" b="0" i="0">
                 <a:solidFill>
@@ -27164,21 +27164,21 @@
         </p:nvSpPr>
         <p:spPr>
           <a:xfrm>
-            <a:off x="10363200" y="6035040"/>
-            <a:ext cx="1371600" cy="365760"/>
-          </a:xfrm>
-          <a:prstGeom prst="rect">
-            <a:avLst/>
-          </a:prstGeom>
-          <a:noFill/>
-        </p:spPr>
-        <p:txBody>
-          <a:bodyPr wrap="none" lIns="0" rIns="0">
-            <a:noAutofit/>
-          </a:bodyPr>
-          <a:lstStyle/>
-          <a:p>
-            <a:pPr algn="l"/>
+            <a:off x="11186160" y="6035040"/>
+            <a:ext cx="548640" cy="365760"/>
+          </a:xfrm>
+          <a:prstGeom prst="rect">
+            <a:avLst/>
+          </a:prstGeom>
+          <a:noFill/>
+        </p:spPr>
+        <p:txBody>
+          <a:bodyPr wrap="none" lIns="0" rIns="0">
+            <a:noAutofit/>
+          </a:bodyPr>
+          <a:lstStyle/>
+          <a:p>
+            <a:pPr algn="r"/>
             <a:fld id="{4B0E1F8A-6C1D-4E2A-9F3B-7A5C8D2E1F60}" type="slidenum">
               <a:rPr sz="1600" b="0" i="0">
                 <a:solidFill>
@@ -27709,21 +27709,21 @@
         </p:nvSpPr>
         <p:spPr>
           <a:xfrm>
-            <a:off x="10363200" y="6035040"/>
-            <a:ext cx="1371600" cy="365760"/>
-          </a:xfrm>
-          <a:prstGeom prst="rect">
-            <a:avLst/>
-          </a:prstGeom>
-          <a:noFill/>
-        </p:spPr>
-        <p:txBody>
-          <a:bodyPr wrap="none" lIns="0" rIns="0">
-            <a:noAutofit/>
-          </a:bodyPr>
-          <a:lstStyle/>
-          <a:p>
-            <a:pPr algn="l"/>
+            <a:off x="11186160" y="6035040"/>
+            <a:ext cx="548640" cy="365760"/>
+          </a:xfrm>
+          <a:prstGeom prst="rect">
+            <a:avLst/>
+          </a:prstGeom>
+          <a:noFill/>
+        </p:spPr>
+        <p:txBody>
+          <a:bodyPr wrap="none" lIns="0" rIns="0">
+            <a:noAutofit/>
+          </a:bodyPr>
+          <a:lstStyle/>
+          <a:p>
+            <a:pPr algn="r"/>
             <a:fld id="{4B0E1F8A-6C1D-4E2A-9F3B-7A5C8D2E1F60}" type="slidenum">
               <a:rPr sz="1600" b="0" i="0">
                 <a:solidFill>
@@ -27788,7 +27788,7 @@
             <a:r>
               <a:rPr sz="4200" b="1" i="0">
                 <a:solidFill>
-                  <a:srgbClr val="0A2240"/>
+                  <a:srgbClr val="0072CE"/>
                 </a:solidFill>
                 <a:latin typeface="Arial"/>
               </a:rPr>
@@ -28122,21 +28122,21 @@
         </p:nvSpPr>
         <p:spPr>
           <a:xfrm>
-            <a:off x="10363200" y="6035040"/>
-            <a:ext cx="1371600" cy="365760"/>
-          </a:xfrm>
-          <a:prstGeom prst="rect">
-            <a:avLst/>
-          </a:prstGeom>
-          <a:noFill/>
-        </p:spPr>
-        <p:txBody>
-          <a:bodyPr wrap="none" lIns="0" rIns="0">
-            <a:noAutofit/>
-          </a:bodyPr>
-          <a:lstStyle/>
-          <a:p>
-            <a:pPr algn="l"/>
+            <a:off x="11186160" y="6035040"/>
+            <a:ext cx="548640" cy="365760"/>
+          </a:xfrm>
+          <a:prstGeom prst="rect">
+            <a:avLst/>
+          </a:prstGeom>
+          <a:noFill/>
+        </p:spPr>
+        <p:txBody>
+          <a:bodyPr wrap="none" lIns="0" rIns="0">
+            <a:noAutofit/>
+          </a:bodyPr>
+          <a:lstStyle/>
+          <a:p>
+            <a:pPr algn="r"/>
             <a:fld id="{4B0E1F8A-6C1D-4E2A-9F3B-7A5C8D2E1F60}" type="slidenum">
               <a:rPr sz="1600" b="0" i="0">
                 <a:solidFill>
@@ -28201,7 +28201,7 @@
             <a:r>
               <a:rPr sz="4200" b="1" i="0">
                 <a:solidFill>
-                  <a:srgbClr val="0A2240"/>
+                  <a:srgbClr val="0072CE"/>
                 </a:solidFill>
                 <a:latin typeface="Arial"/>
               </a:rPr>
@@ -28360,21 +28360,21 @@
         </p:nvSpPr>
         <p:spPr>
           <a:xfrm>
-            <a:off x="10363200" y="6035040"/>
-            <a:ext cx="1371600" cy="365760"/>
-          </a:xfrm>
-          <a:prstGeom prst="rect">
-            <a:avLst/>
-          </a:prstGeom>
-          <a:noFill/>
-        </p:spPr>
-        <p:txBody>
-          <a:bodyPr wrap="none" lIns="0" rIns="0">
-            <a:noAutofit/>
-          </a:bodyPr>
-          <a:lstStyle/>
-          <a:p>
-            <a:pPr algn="l"/>
+            <a:off x="11186160" y="6035040"/>
+            <a:ext cx="548640" cy="365760"/>
+          </a:xfrm>
+          <a:prstGeom prst="rect">
+            <a:avLst/>
+          </a:prstGeom>
+          <a:noFill/>
+        </p:spPr>
+        <p:txBody>
+          <a:bodyPr wrap="none" lIns="0" rIns="0">
+            <a:noAutofit/>
+          </a:bodyPr>
+          <a:lstStyle/>
+          <a:p>
+            <a:pPr algn="r"/>
             <a:fld id="{4B0E1F8A-6C1D-4E2A-9F3B-7A5C8D2E1F60}" type="slidenum">
               <a:rPr sz="1600" b="0" i="0">
                 <a:solidFill>
@@ -28439,7 +28439,7 @@
             <a:r>
               <a:rPr sz="4200" b="1" i="0">
                 <a:solidFill>
-                  <a:srgbClr val="0A2240"/>
+                  <a:srgbClr val="0072CE"/>
                 </a:solidFill>
                 <a:latin typeface="Arial"/>
               </a:rPr>
@@ -28563,21 +28563,21 @@
         </p:nvSpPr>
         <p:spPr>
           <a:xfrm>
-            <a:off x="10363200" y="6035040"/>
-            <a:ext cx="1371600" cy="365760"/>
-          </a:xfrm>
-          <a:prstGeom prst="rect">
-            <a:avLst/>
-          </a:prstGeom>
-          <a:noFill/>
-        </p:spPr>
-        <p:txBody>
-          <a:bodyPr wrap="none" lIns="0" rIns="0">
-            <a:noAutofit/>
-          </a:bodyPr>
-          <a:lstStyle/>
-          <a:p>
-            <a:pPr algn="l"/>
+            <a:off x="11186160" y="6035040"/>
+            <a:ext cx="548640" cy="365760"/>
+          </a:xfrm>
+          <a:prstGeom prst="rect">
+            <a:avLst/>
+          </a:prstGeom>
+          <a:noFill/>
+        </p:spPr>
+        <p:txBody>
+          <a:bodyPr wrap="none" lIns="0" rIns="0">
+            <a:noAutofit/>
+          </a:bodyPr>
+          <a:lstStyle/>
+          <a:p>
+            <a:pPr algn="r"/>
             <a:fld id="{4B0E1F8A-6C1D-4E2A-9F3B-7A5C8D2E1F60}" type="slidenum">
               <a:rPr sz="1600" b="0" i="0">
                 <a:solidFill>
@@ -28721,7 +28721,7 @@
             <a:r>
               <a:rPr sz="4200" b="1" i="0">
                 <a:solidFill>
-                  <a:srgbClr val="0A2240"/>
+                  <a:srgbClr val="0072CE"/>
                 </a:solidFill>
                 <a:latin typeface="Arial"/>
               </a:rPr>
@@ -28740,21 +28740,21 @@
         </p:nvSpPr>
         <p:spPr>
           <a:xfrm>
-            <a:off x="10363200" y="6035040"/>
-            <a:ext cx="1371600" cy="365760"/>
-          </a:xfrm>
-          <a:prstGeom prst="rect">
-            <a:avLst/>
-          </a:prstGeom>
-          <a:noFill/>
-        </p:spPr>
-        <p:txBody>
-          <a:bodyPr wrap="none" lIns="0" rIns="0">
-            <a:noAutofit/>
-          </a:bodyPr>
-          <a:lstStyle/>
-          <a:p>
-            <a:pPr algn="l"/>
+            <a:off x="11186160" y="6035040"/>
+            <a:ext cx="548640" cy="365760"/>
+          </a:xfrm>
+          <a:prstGeom prst="rect">
+            <a:avLst/>
+          </a:prstGeom>
+          <a:noFill/>
+        </p:spPr>
+        <p:txBody>
+          <a:bodyPr wrap="none" lIns="0" rIns="0">
+            <a:noAutofit/>
+          </a:bodyPr>
+          <a:lstStyle/>
+          <a:p>
+            <a:pPr algn="r"/>
             <a:fld id="{4B0E1F8A-6C1D-4E2A-9F3B-7A5C8D2E1F60}" type="slidenum">
               <a:rPr sz="1600" b="0" i="0">
                 <a:solidFill>
@@ -28917,21 +28917,21 @@
         </p:nvSpPr>
         <p:spPr>
           <a:xfrm>
-            <a:off x="10363200" y="6035040"/>
-            <a:ext cx="1371600" cy="365760"/>
-          </a:xfrm>
-          <a:prstGeom prst="rect">
-            <a:avLst/>
-          </a:prstGeom>
-          <a:noFill/>
-        </p:spPr>
-        <p:txBody>
-          <a:bodyPr wrap="none" lIns="0" rIns="0">
-            <a:noAutofit/>
-          </a:bodyPr>
-          <a:lstStyle/>
-          <a:p>
-            <a:pPr algn="l"/>
+            <a:off x="11186160" y="6035040"/>
+            <a:ext cx="548640" cy="365760"/>
+          </a:xfrm>
+          <a:prstGeom prst="rect">
+            <a:avLst/>
+          </a:prstGeom>
+          <a:noFill/>
+        </p:spPr>
+        <p:txBody>
+          <a:bodyPr wrap="none" lIns="0" rIns="0">
+            <a:noAutofit/>
+          </a:bodyPr>
+          <a:lstStyle/>
+          <a:p>
+            <a:pPr algn="r"/>
             <a:fld id="{4B0E1F8A-6C1D-4E2A-9F3B-7A5C8D2E1F60}" type="slidenum">
               <a:rPr sz="1600" b="0" i="0">
                 <a:solidFill>
@@ -28996,7 +28996,7 @@
             <a:r>
               <a:rPr sz="4200" b="1" i="0">
                 <a:solidFill>
-                  <a:srgbClr val="123A6B"/>
+                  <a:srgbClr val="0072CE"/>
                 </a:solidFill>
                 <a:latin typeface="Arial"/>
               </a:rPr>
@@ -29383,21 +29383,21 @@
         </p:nvSpPr>
         <p:spPr>
           <a:xfrm>
-            <a:off x="10363200" y="6035040"/>
-            <a:ext cx="1371600" cy="365760"/>
-          </a:xfrm>
-          <a:prstGeom prst="rect">
-            <a:avLst/>
-          </a:prstGeom>
-          <a:noFill/>
-        </p:spPr>
-        <p:txBody>
-          <a:bodyPr wrap="none" lIns="0" rIns="0">
-            <a:noAutofit/>
-          </a:bodyPr>
-          <a:lstStyle/>
-          <a:p>
-            <a:pPr algn="l"/>
+            <a:off x="11186160" y="6035040"/>
+            <a:ext cx="548640" cy="365760"/>
+          </a:xfrm>
+          <a:prstGeom prst="rect">
+            <a:avLst/>
+          </a:prstGeom>
+          <a:noFill/>
+        </p:spPr>
+        <p:txBody>
+          <a:bodyPr wrap="none" lIns="0" rIns="0">
+            <a:noAutofit/>
+          </a:bodyPr>
+          <a:lstStyle/>
+          <a:p>
+            <a:pPr algn="r"/>
             <a:fld id="{4B0E1F8A-6C1D-4E2A-9F3B-7A5C8D2E1F60}" type="slidenum">
               <a:rPr sz="1600" b="0" i="0">
                 <a:solidFill>
@@ -29462,7 +29462,7 @@
             <a:r>
               <a:rPr sz="4200" b="1" i="0">
                 <a:solidFill>
-                  <a:srgbClr val="123A6B"/>
+                  <a:srgbClr val="0072CE"/>
                 </a:solidFill>
                 <a:latin typeface="Arial"/>
               </a:rPr>
@@ -29691,21 +29691,21 @@
         </p:nvSpPr>
         <p:spPr>
           <a:xfrm>
-            <a:off x="10363200" y="6035040"/>
-            <a:ext cx="1371600" cy="365760"/>
-          </a:xfrm>
-          <a:prstGeom prst="rect">
-            <a:avLst/>
-          </a:prstGeom>
-          <a:noFill/>
-        </p:spPr>
-        <p:txBody>
-          <a:bodyPr wrap="none" lIns="0" rIns="0">
-            <a:noAutofit/>
-          </a:bodyPr>
-          <a:lstStyle/>
-          <a:p>
-            <a:pPr algn="l"/>
+            <a:off x="11186160" y="6035040"/>
+            <a:ext cx="548640" cy="365760"/>
+          </a:xfrm>
+          <a:prstGeom prst="rect">
+            <a:avLst/>
+          </a:prstGeom>
+          <a:noFill/>
+        </p:spPr>
+        <p:txBody>
+          <a:bodyPr wrap="none" lIns="0" rIns="0">
+            <a:noAutofit/>
+          </a:bodyPr>
+          <a:lstStyle/>
+          <a:p>
+            <a:pPr algn="r"/>
             <a:fld id="{4B0E1F8A-6C1D-4E2A-9F3B-7A5C8D2E1F60}" type="slidenum">
               <a:rPr sz="1600" b="0" i="0">
                 <a:solidFill>
@@ -29833,21 +29833,21 @@
         </p:nvSpPr>
         <p:spPr>
           <a:xfrm>
-            <a:off x="10363200" y="6035040"/>
-            <a:ext cx="1371600" cy="365760"/>
-          </a:xfrm>
-          <a:prstGeom prst="rect">
-            <a:avLst/>
-          </a:prstGeom>
-          <a:noFill/>
-        </p:spPr>
-        <p:txBody>
-          <a:bodyPr wrap="none" lIns="0" rIns="0">
-            <a:noAutofit/>
-          </a:bodyPr>
-          <a:lstStyle/>
-          <a:p>
-            <a:pPr algn="l"/>
+            <a:off x="11186160" y="6035040"/>
+            <a:ext cx="548640" cy="365760"/>
+          </a:xfrm>
+          <a:prstGeom prst="rect">
+            <a:avLst/>
+          </a:prstGeom>
+          <a:noFill/>
+        </p:spPr>
+        <p:txBody>
+          <a:bodyPr wrap="none" lIns="0" rIns="0">
+            <a:noAutofit/>
+          </a:bodyPr>
+          <a:lstStyle/>
+          <a:p>
+            <a:pPr algn="r"/>
             <a:fld id="{4B0E1F8A-6C1D-4E2A-9F3B-7A5C8D2E1F60}" type="slidenum">
               <a:rPr sz="1600" b="0" i="0">
                 <a:solidFill>
@@ -29912,7 +29912,7 @@
             <a:r>
               <a:rPr sz="4200" b="1" i="0">
                 <a:solidFill>
-                  <a:srgbClr val="0A2240"/>
+                  <a:srgbClr val="0072CE"/>
                 </a:solidFill>
                 <a:latin typeface="Arial"/>
               </a:rPr>
@@ -30246,21 +30246,21 @@
         </p:nvSpPr>
         <p:spPr>
           <a:xfrm>
-            <a:off x="10363200" y="6035040"/>
-            <a:ext cx="1371600" cy="365760"/>
-          </a:xfrm>
-          <a:prstGeom prst="rect">
-            <a:avLst/>
-          </a:prstGeom>
-          <a:noFill/>
-        </p:spPr>
-        <p:txBody>
-          <a:bodyPr wrap="none" lIns="0" rIns="0">
-            <a:noAutofit/>
-          </a:bodyPr>
-          <a:lstStyle/>
-          <a:p>
-            <a:pPr algn="l"/>
+            <a:off x="11186160" y="6035040"/>
+            <a:ext cx="548640" cy="365760"/>
+          </a:xfrm>
+          <a:prstGeom prst="rect">
+            <a:avLst/>
+          </a:prstGeom>
+          <a:noFill/>
+        </p:spPr>
+        <p:txBody>
+          <a:bodyPr wrap="none" lIns="0" rIns="0">
+            <a:noAutofit/>
+          </a:bodyPr>
+          <a:lstStyle/>
+          <a:p>
+            <a:pPr algn="r"/>
             <a:fld id="{4B0E1F8A-6C1D-4E2A-9F3B-7A5C8D2E1F60}" type="slidenum">
               <a:rPr sz="1600" b="0" i="0">
                 <a:solidFill>
@@ -30624,21 +30624,21 @@
         </p:nvSpPr>
         <p:spPr>
           <a:xfrm>
-            <a:off x="10363200" y="6035040"/>
-            <a:ext cx="1371600" cy="365760"/>
-          </a:xfrm>
-          <a:prstGeom prst="rect">
-            <a:avLst/>
-          </a:prstGeom>
-          <a:noFill/>
-        </p:spPr>
-        <p:txBody>
-          <a:bodyPr wrap="none" lIns="0" rIns="0">
-            <a:noAutofit/>
-          </a:bodyPr>
-          <a:lstStyle/>
-          <a:p>
-            <a:pPr algn="l"/>
+            <a:off x="11186160" y="6035040"/>
+            <a:ext cx="548640" cy="365760"/>
+          </a:xfrm>
+          <a:prstGeom prst="rect">
+            <a:avLst/>
+          </a:prstGeom>
+          <a:noFill/>
+        </p:spPr>
+        <p:txBody>
+          <a:bodyPr wrap="none" lIns="0" rIns="0">
+            <a:noAutofit/>
+          </a:bodyPr>
+          <a:lstStyle/>
+          <a:p>
+            <a:pPr algn="r"/>
             <a:fld id="{4B0E1F8A-6C1D-4E2A-9F3B-7A5C8D2E1F60}" type="slidenum">
               <a:rPr sz="1600" b="0" i="0">
                 <a:solidFill>
@@ -30703,7 +30703,7 @@
             <a:r>
               <a:rPr sz="4200" b="1" i="0">
                 <a:solidFill>
-                  <a:srgbClr val="0A2240"/>
+                  <a:srgbClr val="0072CE"/>
                 </a:solidFill>
                 <a:latin typeface="Arial"/>
               </a:rPr>
@@ -30827,21 +30827,21 @@
         </p:nvSpPr>
         <p:spPr>
           <a:xfrm>
-            <a:off x="10363200" y="6035040"/>
-            <a:ext cx="1371600" cy="365760"/>
-          </a:xfrm>
-          <a:prstGeom prst="rect">
-            <a:avLst/>
-          </a:prstGeom>
-          <a:noFill/>
-        </p:spPr>
-        <p:txBody>
-          <a:bodyPr wrap="none" lIns="0" rIns="0">
-            <a:noAutofit/>
-          </a:bodyPr>
-          <a:lstStyle/>
-          <a:p>
-            <a:pPr algn="l"/>
+            <a:off x="11186160" y="6035040"/>
+            <a:ext cx="548640" cy="365760"/>
+          </a:xfrm>
+          <a:prstGeom prst="rect">
+            <a:avLst/>
+          </a:prstGeom>
+          <a:noFill/>
+        </p:spPr>
+        <p:txBody>
+          <a:bodyPr wrap="none" lIns="0" rIns="0">
+            <a:noAutofit/>
+          </a:bodyPr>
+          <a:lstStyle/>
+          <a:p>
+            <a:pPr algn="r"/>
             <a:fld id="{4B0E1F8A-6C1D-4E2A-9F3B-7A5C8D2E1F60}" type="slidenum">
               <a:rPr sz="1600" b="0" i="0">
                 <a:solidFill>
@@ -30906,7 +30906,7 @@
             <a:r>
               <a:rPr sz="4200" b="1" i="0">
                 <a:solidFill>
-                  <a:srgbClr val="0A2240"/>
+                  <a:srgbClr val="0072CE"/>
                 </a:solidFill>
                 <a:latin typeface="Arial"/>
               </a:rPr>
@@ -31030,21 +31030,21 @@
         </p:nvSpPr>
         <p:spPr>
           <a:xfrm>
-            <a:off x="10363200" y="6035040"/>
-            <a:ext cx="1371600" cy="365760"/>
-          </a:xfrm>
-          <a:prstGeom prst="rect">
-            <a:avLst/>
-          </a:prstGeom>
-          <a:noFill/>
-        </p:spPr>
-        <p:txBody>
-          <a:bodyPr wrap="none" lIns="0" rIns="0">
-            <a:noAutofit/>
-          </a:bodyPr>
-          <a:lstStyle/>
-          <a:p>
-            <a:pPr algn="l"/>
+            <a:off x="11186160" y="6035040"/>
+            <a:ext cx="548640" cy="365760"/>
+          </a:xfrm>
+          <a:prstGeom prst="rect">
+            <a:avLst/>
+          </a:prstGeom>
+          <a:noFill/>
+        </p:spPr>
+        <p:txBody>
+          <a:bodyPr wrap="none" lIns="0" rIns="0">
+            <a:noAutofit/>
+          </a:bodyPr>
+          <a:lstStyle/>
+          <a:p>
+            <a:pPr algn="r"/>
             <a:fld id="{4B0E1F8A-6C1D-4E2A-9F3B-7A5C8D2E1F60}" type="slidenum">
               <a:rPr sz="1600" b="0" i="0">
                 <a:solidFill>
@@ -31109,7 +31109,7 @@
             <a:r>
               <a:rPr sz="4200" b="1" i="0">
                 <a:solidFill>
-                  <a:srgbClr val="123A6B"/>
+                  <a:srgbClr val="0072CE"/>
                 </a:solidFill>
                 <a:latin typeface="Arial"/>
               </a:rPr>
@@ -31408,21 +31408,21 @@
         </p:nvSpPr>
         <p:spPr>
           <a:xfrm>
-            <a:off x="10363200" y="6035040"/>
-            <a:ext cx="1371600" cy="365760"/>
-          </a:xfrm>
-          <a:prstGeom prst="rect">
-            <a:avLst/>
-          </a:prstGeom>
-          <a:noFill/>
-        </p:spPr>
-        <p:txBody>
-          <a:bodyPr wrap="none" lIns="0" rIns="0">
-            <a:noAutofit/>
-          </a:bodyPr>
-          <a:lstStyle/>
-          <a:p>
-            <a:pPr algn="l"/>
+            <a:off x="11186160" y="6035040"/>
+            <a:ext cx="548640" cy="365760"/>
+          </a:xfrm>
+          <a:prstGeom prst="rect">
+            <a:avLst/>
+          </a:prstGeom>
+          <a:noFill/>
+        </p:spPr>
+        <p:txBody>
+          <a:bodyPr wrap="none" lIns="0" rIns="0">
+            <a:noAutofit/>
+          </a:bodyPr>
+          <a:lstStyle/>
+          <a:p>
+            <a:pPr algn="r"/>
             <a:fld id="{4B0E1F8A-6C1D-4E2A-9F3B-7A5C8D2E1F60}" type="slidenum">
               <a:rPr sz="1600" b="0" i="0">
                 <a:solidFill>
@@ -31487,7 +31487,7 @@
             <a:r>
               <a:rPr sz="4200" b="1" i="0">
                 <a:solidFill>
-                  <a:srgbClr val="0A2240"/>
+                  <a:srgbClr val="0072CE"/>
                 </a:solidFill>
                 <a:latin typeface="Arial"/>
               </a:rPr>
@@ -31611,21 +31611,21 @@
         </p:nvSpPr>
         <p:spPr>
           <a:xfrm>
-            <a:off x="10363200" y="6035040"/>
-            <a:ext cx="1371600" cy="365760"/>
-          </a:xfrm>
-          <a:prstGeom prst="rect">
-            <a:avLst/>
-          </a:prstGeom>
-          <a:noFill/>
-        </p:spPr>
-        <p:txBody>
-          <a:bodyPr wrap="none" lIns="0" rIns="0">
-            <a:noAutofit/>
-          </a:bodyPr>
-          <a:lstStyle/>
-          <a:p>
-            <a:pPr algn="l"/>
+            <a:off x="11186160" y="6035040"/>
+            <a:ext cx="548640" cy="365760"/>
+          </a:xfrm>
+          <a:prstGeom prst="rect">
+            <a:avLst/>
+          </a:prstGeom>
+          <a:noFill/>
+        </p:spPr>
+        <p:txBody>
+          <a:bodyPr wrap="none" lIns="0" rIns="0">
+            <a:noAutofit/>
+          </a:bodyPr>
+          <a:lstStyle/>
+          <a:p>
+            <a:pPr algn="r"/>
             <a:fld id="{4B0E1F8A-6C1D-4E2A-9F3B-7A5C8D2E1F60}" type="slidenum">
               <a:rPr sz="1600" b="0" i="0">
                 <a:solidFill>
@@ -31690,7 +31690,7 @@
             <a:r>
               <a:rPr sz="4200" b="1" i="0">
                 <a:solidFill>
-                  <a:srgbClr val="0A2240"/>
+                  <a:srgbClr val="0072CE"/>
                 </a:solidFill>
                 <a:latin typeface="Arial"/>
               </a:rPr>
@@ -31814,21 +31814,21 @@
         </p:nvSpPr>
         <p:spPr>
           <a:xfrm>
-            <a:off x="10363200" y="6035040"/>
-            <a:ext cx="1371600" cy="365760"/>
-          </a:xfrm>
-          <a:prstGeom prst="rect">
-            <a:avLst/>
-          </a:prstGeom>
-          <a:noFill/>
-        </p:spPr>
-        <p:txBody>
-          <a:bodyPr wrap="none" lIns="0" rIns="0">
-            <a:noAutofit/>
-          </a:bodyPr>
-          <a:lstStyle/>
-          <a:p>
-            <a:pPr algn="l"/>
+            <a:off x="11186160" y="6035040"/>
+            <a:ext cx="548640" cy="365760"/>
+          </a:xfrm>
+          <a:prstGeom prst="rect">
+            <a:avLst/>
+          </a:prstGeom>
+          <a:noFill/>
+        </p:spPr>
+        <p:txBody>
+          <a:bodyPr wrap="none" lIns="0" rIns="0">
+            <a:noAutofit/>
+          </a:bodyPr>
+          <a:lstStyle/>
+          <a:p>
+            <a:pPr algn="r"/>
             <a:fld id="{4B0E1F8A-6C1D-4E2A-9F3B-7A5C8D2E1F60}" type="slidenum">
               <a:rPr sz="1600" b="0" i="0">
                 <a:solidFill>
@@ -31893,7 +31893,7 @@
             <a:r>
               <a:rPr sz="4200" b="1" i="0">
                 <a:solidFill>
-                  <a:srgbClr val="123A6B"/>
+                  <a:srgbClr val="0072CE"/>
                 </a:solidFill>
                 <a:latin typeface="Arial"/>
               </a:rPr>
@@ -32122,21 +32122,21 @@
         </p:nvSpPr>
         <p:spPr>
           <a:xfrm>
-            <a:off x="10363200" y="6035040"/>
-            <a:ext cx="1371600" cy="365760"/>
-          </a:xfrm>
-          <a:prstGeom prst="rect">
-            <a:avLst/>
-          </a:prstGeom>
-          <a:noFill/>
-        </p:spPr>
-        <p:txBody>
-          <a:bodyPr wrap="none" lIns="0" rIns="0">
-            <a:noAutofit/>
-          </a:bodyPr>
-          <a:lstStyle/>
-          <a:p>
-            <a:pPr algn="l"/>
+            <a:off x="11186160" y="6035040"/>
+            <a:ext cx="548640" cy="365760"/>
+          </a:xfrm>
+          <a:prstGeom prst="rect">
+            <a:avLst/>
+          </a:prstGeom>
+          <a:noFill/>
+        </p:spPr>
+        <p:txBody>
+          <a:bodyPr wrap="none" lIns="0" rIns="0">
+            <a:noAutofit/>
+          </a:bodyPr>
+          <a:lstStyle/>
+          <a:p>
+            <a:pPr algn="r"/>
             <a:fld id="{4B0E1F8A-6C1D-4E2A-9F3B-7A5C8D2E1F60}" type="slidenum">
               <a:rPr sz="1600" b="0" i="0">
                 <a:solidFill>
@@ -32201,7 +32201,7 @@
             <a:r>
               <a:rPr sz="4200" b="1" i="0">
                 <a:solidFill>
-                  <a:srgbClr val="0A2240"/>
+                  <a:srgbClr val="0072CE"/>
                 </a:solidFill>
                 <a:latin typeface="Arial"/>
               </a:rPr>
@@ -32325,21 +32325,21 @@
         </p:nvSpPr>
         <p:spPr>
           <a:xfrm>
-            <a:off x="10363200" y="6035040"/>
-            <a:ext cx="1371600" cy="365760"/>
-          </a:xfrm>
-          <a:prstGeom prst="rect">
-            <a:avLst/>
-          </a:prstGeom>
-          <a:noFill/>
-        </p:spPr>
-        <p:txBody>
-          <a:bodyPr wrap="none" lIns="0" rIns="0">
-            <a:noAutofit/>
-          </a:bodyPr>
-          <a:lstStyle/>
-          <a:p>
-            <a:pPr algn="l"/>
+            <a:off x="11186160" y="6035040"/>
+            <a:ext cx="548640" cy="365760"/>
+          </a:xfrm>
+          <a:prstGeom prst="rect">
+            <a:avLst/>
+          </a:prstGeom>
+          <a:noFill/>
+        </p:spPr>
+        <p:txBody>
+          <a:bodyPr wrap="none" lIns="0" rIns="0">
+            <a:noAutofit/>
+          </a:bodyPr>
+          <a:lstStyle/>
+          <a:p>
+            <a:pPr algn="r"/>
             <a:fld id="{4B0E1F8A-6C1D-4E2A-9F3B-7A5C8D2E1F60}" type="slidenum">
               <a:rPr sz="1600" b="0" i="0">
                 <a:solidFill>
@@ -32467,21 +32467,21 @@
         </p:nvSpPr>
         <p:spPr>
           <a:xfrm>
-            <a:off x="10363200" y="6035040"/>
-            <a:ext cx="1371600" cy="365760"/>
-          </a:xfrm>
-          <a:prstGeom prst="rect">
-            <a:avLst/>
-          </a:prstGeom>
-          <a:noFill/>
-        </p:spPr>
-        <p:txBody>
-          <a:bodyPr wrap="none" lIns="0" rIns="0">
-            <a:noAutofit/>
-          </a:bodyPr>
-          <a:lstStyle/>
-          <a:p>
-            <a:pPr algn="l"/>
+            <a:off x="11186160" y="6035040"/>
+            <a:ext cx="548640" cy="365760"/>
+          </a:xfrm>
+          <a:prstGeom prst="rect">
+            <a:avLst/>
+          </a:prstGeom>
+          <a:noFill/>
+        </p:spPr>
+        <p:txBody>
+          <a:bodyPr wrap="none" lIns="0" rIns="0">
+            <a:noAutofit/>
+          </a:bodyPr>
+          <a:lstStyle/>
+          <a:p>
+            <a:pPr algn="r"/>
             <a:fld id="{4B0E1F8A-6C1D-4E2A-9F3B-7A5C8D2E1F60}" type="slidenum">
               <a:rPr sz="1600" b="0" i="0">
                 <a:solidFill>
@@ -32546,7 +32546,7 @@
             <a:r>
               <a:rPr sz="4200" b="1" i="0">
                 <a:solidFill>
-                  <a:srgbClr val="123A6B"/>
+                  <a:srgbClr val="0072CE"/>
                 </a:solidFill>
                 <a:latin typeface="Arial"/>
               </a:rPr>
@@ -32740,21 +32740,21 @@
         </p:nvSpPr>
         <p:spPr>
           <a:xfrm>
-            <a:off x="10363200" y="6035040"/>
-            <a:ext cx="1371600" cy="365760"/>
-          </a:xfrm>
-          <a:prstGeom prst="rect">
-            <a:avLst/>
-          </a:prstGeom>
-          <a:noFill/>
-        </p:spPr>
-        <p:txBody>
-          <a:bodyPr wrap="none" lIns="0" rIns="0">
-            <a:noAutofit/>
-          </a:bodyPr>
-          <a:lstStyle/>
-          <a:p>
-            <a:pPr algn="l"/>
+            <a:off x="11186160" y="6035040"/>
+            <a:ext cx="548640" cy="365760"/>
+          </a:xfrm>
+          <a:prstGeom prst="rect">
+            <a:avLst/>
+          </a:prstGeom>
+          <a:noFill/>
+        </p:spPr>
+        <p:txBody>
+          <a:bodyPr wrap="none" lIns="0" rIns="0">
+            <a:noAutofit/>
+          </a:bodyPr>
+          <a:lstStyle/>
+          <a:p>
+            <a:pPr algn="r"/>
             <a:fld id="{4B0E1F8A-6C1D-4E2A-9F3B-7A5C8D2E1F60}" type="slidenum">
               <a:rPr sz="1600" b="0" i="0">
                 <a:solidFill>
@@ -32819,7 +32819,7 @@
             <a:r>
               <a:rPr sz="4200" b="1" i="0">
                 <a:solidFill>
-                  <a:srgbClr val="123A6B"/>
+                  <a:srgbClr val="0072CE"/>
                 </a:solidFill>
                 <a:latin typeface="Arial"/>
               </a:rPr>
@@ -33434,21 +33434,21 @@
         </p:nvSpPr>
         <p:spPr>
           <a:xfrm>
-            <a:off x="10363200" y="6035040"/>
-            <a:ext cx="1371600" cy="365760"/>
-          </a:xfrm>
-          <a:prstGeom prst="rect">
-            <a:avLst/>
-          </a:prstGeom>
-          <a:noFill/>
-        </p:spPr>
-        <p:txBody>
-          <a:bodyPr wrap="none" lIns="0" rIns="0">
-            <a:noAutofit/>
-          </a:bodyPr>
-          <a:lstStyle/>
-          <a:p>
-            <a:pPr algn="l"/>
+            <a:off x="11186160" y="6035040"/>
+            <a:ext cx="548640" cy="365760"/>
+          </a:xfrm>
+          <a:prstGeom prst="rect">
+            <a:avLst/>
+          </a:prstGeom>
+          <a:noFill/>
+        </p:spPr>
+        <p:txBody>
+          <a:bodyPr wrap="none" lIns="0" rIns="0">
+            <a:noAutofit/>
+          </a:bodyPr>
+          <a:lstStyle/>
+          <a:p>
+            <a:pPr algn="r"/>
             <a:fld id="{4B0E1F8A-6C1D-4E2A-9F3B-7A5C8D2E1F60}" type="slidenum">
               <a:rPr sz="1600" b="0" i="0">
                 <a:solidFill>
@@ -33592,7 +33592,7 @@
             <a:r>
               <a:rPr sz="4200" b="1" i="0">
                 <a:solidFill>
-                  <a:srgbClr val="0A2240"/>
+                  <a:srgbClr val="0072CE"/>
                 </a:solidFill>
                 <a:latin typeface="Arial"/>
               </a:rPr>
@@ -33611,21 +33611,21 @@
         </p:nvSpPr>
         <p:spPr>
           <a:xfrm>
-            <a:off x="10363200" y="6035040"/>
-            <a:ext cx="1371600" cy="365760"/>
-          </a:xfrm>
-          <a:prstGeom prst="rect">
-            <a:avLst/>
-          </a:prstGeom>
-          <a:noFill/>
-        </p:spPr>
-        <p:txBody>
-          <a:bodyPr wrap="none" lIns="0" rIns="0">
-            <a:noAutofit/>
-          </a:bodyPr>
-          <a:lstStyle/>
-          <a:p>
-            <a:pPr algn="l"/>
+            <a:off x="11186160" y="6035040"/>
+            <a:ext cx="548640" cy="365760"/>
+          </a:xfrm>
+          <a:prstGeom prst="rect">
+            <a:avLst/>
+          </a:prstGeom>
+          <a:noFill/>
+        </p:spPr>
+        <p:txBody>
+          <a:bodyPr wrap="none" lIns="0" rIns="0">
+            <a:noAutofit/>
+          </a:bodyPr>
+          <a:lstStyle/>
+          <a:p>
+            <a:pPr algn="r"/>
             <a:fld id="{4B0E1F8A-6C1D-4E2A-9F3B-7A5C8D2E1F60}" type="slidenum">
               <a:rPr sz="1600" b="0" i="0">
                 <a:solidFill>
@@ -33788,21 +33788,21 @@
         </p:nvSpPr>
         <p:spPr>
           <a:xfrm>
-            <a:off x="10363200" y="6035040"/>
-            <a:ext cx="1371600" cy="365760"/>
-          </a:xfrm>
-          <a:prstGeom prst="rect">
-            <a:avLst/>
-          </a:prstGeom>
-          <a:noFill/>
-        </p:spPr>
-        <p:txBody>
-          <a:bodyPr wrap="none" lIns="0" rIns="0">
-            <a:noAutofit/>
-          </a:bodyPr>
-          <a:lstStyle/>
-          <a:p>
-            <a:pPr algn="l"/>
+            <a:off x="11186160" y="6035040"/>
+            <a:ext cx="548640" cy="365760"/>
+          </a:xfrm>
+          <a:prstGeom prst="rect">
+            <a:avLst/>
+          </a:prstGeom>
+          <a:noFill/>
+        </p:spPr>
+        <p:txBody>
+          <a:bodyPr wrap="none" lIns="0" rIns="0">
+            <a:noAutofit/>
+          </a:bodyPr>
+          <a:lstStyle/>
+          <a:p>
+            <a:pPr algn="r"/>
             <a:fld id="{4B0E1F8A-6C1D-4E2A-9F3B-7A5C8D2E1F60}" type="slidenum">
               <a:rPr sz="1600" b="0" i="0">
                 <a:solidFill>
@@ -33965,21 +33965,21 @@
         </p:nvSpPr>
         <p:spPr>
           <a:xfrm>
-            <a:off x="10363200" y="6035040"/>
-            <a:ext cx="1371600" cy="365760"/>
-          </a:xfrm>
-          <a:prstGeom prst="rect">
-            <a:avLst/>
-          </a:prstGeom>
-          <a:noFill/>
-        </p:spPr>
-        <p:txBody>
-          <a:bodyPr wrap="none" lIns="0" rIns="0">
-            <a:noAutofit/>
-          </a:bodyPr>
-          <a:lstStyle/>
-          <a:p>
-            <a:pPr algn="l"/>
+            <a:off x="11186160" y="6035040"/>
+            <a:ext cx="548640" cy="365760"/>
+          </a:xfrm>
+          <a:prstGeom prst="rect">
+            <a:avLst/>
+          </a:prstGeom>
+          <a:noFill/>
+        </p:spPr>
+        <p:txBody>
+          <a:bodyPr wrap="none" lIns="0" rIns="0">
+            <a:noAutofit/>
+          </a:bodyPr>
+          <a:lstStyle/>
+          <a:p>
+            <a:pPr algn="r"/>
             <a:fld id="{4B0E1F8A-6C1D-4E2A-9F3B-7A5C8D2E1F60}" type="slidenum">
               <a:rPr sz="1600" b="0" i="0">
                 <a:solidFill>

--- a/examples/pptx/immersion-1-1-problem-statement.pptx
+++ b/examples/pptx/immersion-1-1-problem-statement.pptx
@@ -550,7 +550,7 @@
           <a:lstStyle/>
           <a:p>
             <a:r>
-              <a:t>Open the session. Do not explain the agenda yet. Say the one sentence that frames the whole three days: everything you build this week rests on the problem statement you write in the next 35 minutes. A weak statement costs you Day 2 and Day 3.</a:t>
+              <a:t>This is session 1.1, From Vague to Precise. Over the next thirty-five minutes we turn whatever you arrived with into a problem statement sharp enough to build against.</a:t>
             </a:r>
           </a:p>
         </p:txBody>
@@ -620,7 +620,7 @@
           <a:lstStyle/>
           <a:p>
             <a:r>
-              <a:t>Three quick diagnostics. The fastest one to use live is the middle row: ask how many different ways this could be solved. If the answer is one, they wrote a solution.</a:t>
+              <a:t>Here is how to tell them apart. A problem describes a gap, admits several fixes, and names who suffers. A solution describes a build, assumes one fix, and names a tool.</a:t>
             </a:r>
           </a:p>
         </p:txBody>
@@ -690,7 +690,7 @@
           <a:lstStyle/>
           <a:p>
             <a:r>
-              <a:t>Work the left column to the right column out loud. Ask the room to do row four before you reveal it. The pattern: strip the tool, then ask who is stuck and on what.</a:t>
+              <a:t>These are real asks on the left and the problem underneath each one on the right. “Build a RAG chatbot” means staff cannot find answers; “use an agent” means review takes four hours.</a:t>
             </a:r>
           </a:p>
         </p:txBody>
@@ -760,7 +760,7 @@
           <a:lstStyle/>
           <a:p>
             <a:r>
-              <a:t>The second item is the one that bites during Immersion Week. If they commit to a tool on Day 1, Day 2 becomes fighting that tool rather than solving the problem. Keep the tool decision for session 2.1.</a:t>
+              <a:t>Starting from the solution costs you four things: you cannot tell if it worked, the tool choice is locked before you understand the problem, scope creeps with no boundary, and feedback arrives too late to use.</a:t>
             </a:r>
           </a:p>
         </p:txBody>
@@ -830,7 +830,7 @@
           <a:lstStyle/>
           <a:p>
             <a:r>
-              <a:t>Give them thirty seconds to run these three tells against their own sentence from the opening question. Most rooms find that two of three fire. That discomfort is the point.</a:t>
+              <a:t>Three tells that what you wrote is a solution. A tool is named. Only one fix fits. And nobody appears in it as a person who is stuck.</a:t>
             </a:r>
           </a:p>
         </p:txBody>
@@ -900,7 +900,7 @@
           <a:lstStyle/>
           <a:p>
             <a:r>
-              <a:t>The portable version of the last slide. Repeat it when teams drift back to tool talk in later sessions. It is deliberately blunt because it has to survive being remembered on Day 3.</a:t>
+              <a:t>The fastest test in the room: if it names a tool, it is not a problem statement yet.</a:t>
             </a:r>
           </a:p>
         </p:txBody>
@@ -970,7 +970,7 @@
           <a:lstStyle/>
           <a:p>
             <a:r>
-              <a:t>Reframe what Claude is for here. Most people use it to generate. In this session they use it to subtract — to strip ambiguity. That is a different prompt and a different posture.</a:t>
+              <a:t>Interrogation means handing Claude your vague ask and having it attack that ask until what is left is precise.</a:t>
             </a:r>
           </a:p>
         </p:txBody>
@@ -1040,7 +1040,7 @@
           <a:lstStyle/>
           <a:p>
             <a:r>
-              <a:t>These four instructions are what turn a helpful assistant into a useful interrogator. The third matters most: a wall of ten questions gets skimmed, one question gets answered.</a:t>
+              <a:t>Four things make it actually interrogate rather than agree: give it the adversarial role, forbid it from proposing solutions, demand one question at a time, and make it refuse to move on early.</a:t>
             </a:r>
           </a:p>
         </p:txBody>
@@ -1110,7 +1110,7 @@
           <a:lstStyle/>
           <a:p>
             <a:r>
-              <a:t>Have them paste this and change only the idea line. Point at the last rule: it gives Claude a termination condition, which is what stops the exchange from wandering. Give the room three minutes to run it.</a:t>
+              <a:t>Here is the prompt. A skeptical product lead, your idea in quotes, and four rules: one question at a time, never propose a solution, reject vague answers, stop when it is precise.</a:t>
             </a:r>
           </a:p>
         </p:txBody>
@@ -1180,7 +1180,7 @@
           <a:lstStyle/>
           <a:p>
             <a:r>
-              <a:t>Walk the loop while they work. Step three is the one people skip — having Claude restate the problem in its own words is how you catch that it understood something different from what you meant.</a:t>
+              <a:t>The loop is three steps. Answer plainly, with no hedging and no tool names. Let it push, and expect the follow-up to hurt. Then ask Claude to restate your problem back to you.</a:t>
             </a:r>
           </a:p>
         </p:txBody>
@@ -1250,7 +1250,7 @@
           <a:lstStyle/>
           <a:p>
             <a:r>
-              <a:t>A real transformation, not a tidy invention. Note that the right column is barely longer than the left — precision is not verbosity. It is the same length sentence carrying far more constraint.</a:t>
+              <a:t>This is what one interrogation does. “An AI thing for resumes”, with no idea who it is for or when it is done, becomes: recruiters miss skill gaps, for two hundred intern applicants, flagged in one pass.</a:t>
             </a:r>
           </a:p>
         </p:txBody>
@@ -1320,7 +1320,7 @@
           <a:lstStyle/>
           <a:p>
             <a:r>
-              <a:t>Set the clock and the deliverable in the same breath. This is not a lecture about problem statements; it is a working session that produces one. Name the artifact now so nobody treats the next half hour as background reading.</a:t>
+              <a:t>Thirty-five minutes, and you leave with exactly one thing: a single precise problem statement.</a:t>
             </a:r>
           </a:p>
         </p:txBody>
@@ -1390,7 +1390,7 @@
           <a:lstStyle/>
           <a:p>
             <a:r>
-              <a:t>The fourth is the strongest test and the one to leave them with. If two teammates would disagree about whether the problem is solved, the statement is still ambiguous.</a:t>
+              <a:t>You know it is precise when a stranger can restate it, you know who is stuck, you can name a wrong answer, and two people would agree on whether it is solved.</a:t>
             </a:r>
           </a:p>
         </p:txBody>
@@ -1460,7 +1460,7 @@
           <a:lstStyle/>
           <a:p>
             <a:r>
-              <a:t>Second objective. A precise problem can still be the wrong problem for this week. The scoping test is what separates precise from feasible.</a:t>
+              <a:t>Second: a precise problem still has to be the right size. That is what the scoping test is for.</a:t>
             </a:r>
           </a:p>
         </p:txBody>
@@ -1530,7 +1530,7 @@
           <a:lstStyle/>
           <a:p>
             <a:r>
-              <a:t>Emphasise that all three are pass or fail, not scores. A problem that fails one gate is out, no matter how exciting. Teams will want to negotiate. Do not let them negotiate here.</a:t>
+              <a:t>The scoping test is three gates your problem passes through before you commit to it.</a:t>
             </a:r>
           </a:p>
         </p:txBody>
@@ -1600,7 +1600,7 @@
           <a:lstStyle/>
           <a:p>
             <a:r>
-              <a:t>Read them in this order every time — measurability first, because it is the gate people most often think they pass and do not. Tell the room you will take each one in turn.</a:t>
+              <a:t>The three gates are a measurable outcome, so you can say whether it worked; data available today, in hand; and three days, meaning finishable by Friday noon.</a:t>
             </a:r>
           </a:p>
         </p:txBody>
@@ -1670,7 +1670,7 @@
           <a:lstStyle/>
           <a:p>
             <a:r>
-              <a:t>In advance is the load-bearing phrase. Deciding after the fact what counts as success is how a demo gets talked into looking successful. Write the number down before you build.</a:t>
+              <a:t>Gate one is measurable. Before you build anything, state what would prove it worked.</a:t>
             </a:r>
           </a:p>
         </p:txBody>
@@ -1740,7 +1740,7 @@
           <a:lstStyle/>
           <a:p>
             <a:r>
-              <a:t>The right column is deliberately modest. Small and checkable beats grand and unfalsifiable. Ask them which row is hardest to write for their own idea — usually the quality one.</a:t>
+              <a:t>Vague on the left, measurable on the right. “Better resumes” becomes “flags eight of ten known gaps”; “faster reviews” becomes “under thirty seconds per file”.</a:t>
             </a:r>
           </a:p>
         </p:txBody>
@@ -1810,7 +1810,7 @@
           <a:lstStyle/>
           <a:p>
             <a:r>
-              <a:t>Three separate conditions and teams fail different ones. Before lunch today is deliberately aggressive: data you will get access to next week does not exist for the purposes of this week.</a:t>
+              <a:t>Gate two is data, and it has three parts: it exists, you are allowed to use it, and you have it today.</a:t>
             </a:r>
           </a:p>
         </p:txBody>
@@ -1880,7 +1880,7 @@
           <a:lstStyle/>
           <a:p>
             <a:r>
-              <a:t>For each failure mode the fix is the same: synthesise or substitute now rather than wait. Twenty made-up records you control beat two thousand you are still waiting on.</a:t>
+              <a:t>Data plans die in three places. Access is still pending approval. The data exists but is in the wrong shape. Or it is real records too sensitive to touch.</a:t>
             </a:r>
           </a:p>
         </p:txBody>
@@ -1950,7 +1950,7 @@
           <a:lstStyle/>
           <a:p>
             <a:r>
-              <a:t>This reframes what achievable means. The failure is not being too ambitious overall; it is being too ambitious about depth on one step while the rest of the path never gets built.</a:t>
+              <a:t>Gate three is three days, and what it means is the whole path working rather than one part polished.</a:t>
             </a:r>
           </a:p>
         </p:txBody>
@@ -2020,7 +2020,7 @@
           <a:lstStyle/>
           <a:p>
             <a:r>
-              <a:t>Push them hard toward the left. Day 2 is explicitly the happy path, Day 3 is hardening. A beautiful fragment has nothing to harden and nothing to demo on Friday.</a:t>
+              <a:t>Three days buys you one of two things: one path, end to end and rough, or one part, polished and alone. Take the rough path.</a:t>
             </a:r>
           </a:p>
         </p:txBody>
@@ -2090,7 +2090,7 @@
           <a:lstStyle/>
           <a:p>
             <a:r>
-              <a:t>The three syllabus objectives, plus the interrogation technique that connects them. Point out that items two and three are things they will actually do at their laptops, not watch.</a:t>
+              <a:t>Four things this session. We separate problem statements from solution statements, get Claude to interrogate a vague ask, run the three-gate scoping test, and stand up your Claude Project.</a:t>
             </a:r>
           </a:p>
         </p:txBody>
@@ -2160,7 +2160,7 @@
           <a:lstStyle/>
           <a:p>
             <a:r>
-              <a:t>Only the first idea clears all three. Walk the second: it is a good problem that fails on data today, which is a scheduling failure, not a quality one. Advise parking it rather than abandoning it.</a:t>
+              <a:t>Three candidate ideas against the three gates. Resumes passes all three. Policy fails on data today. Grader fails on measurable and on time.</a:t>
             </a:r>
           </a:p>
         </p:txBody>
@@ -2230,7 +2230,7 @@
           <a:lstStyle/>
           <a:p>
             <a:r>
-              <a:t>This is objective two's second half. The purpose is not to change their minds; it is to surface the strongest objection while it is still cheap to act on. Better now than from a peer team on Day 3.</a:t>
+              <a:t>The opposite case means having Claude argue that your problem is the wrong one to pick.</a:t>
             </a:r>
           </a:p>
         </p:txBody>
@@ -2300,7 +2300,7 @@
           <a:lstStyle/>
           <a:p>
             <a:r>
-              <a:t>Hardest first matters — otherwise the strongest objection arrives third and gets skimmed. No alternatives keeps Claude from rescuing them with a new idea before they have absorbed the criticism.</a:t>
+              <a:t>Here is that prompt. Paste your statement, then ask for the three strongest objections to it as a three-day build, hardest first, with no alternatives offered.</a:t>
             </a:r>
           </a:p>
         </p:txBody>
@@ -2370,7 +2370,7 @@
           <a:lstStyle/>
           <a:p>
             <a:r>
-              <a:t>Step one prevents defensiveness. Step three is the real decision: most objections are answered by narrowing scope rather than by changing problems altogether.</a:t>
+              <a:t>Three steps. Read all three objections without answering. Rank them by which would actually sink you. Then either fix the problem or accept the risk knowingly.</a:t>
             </a:r>
           </a:p>
         </p:txBody>
@@ -2440,7 +2440,7 @@
           <a:lstStyle/>
           <a:p>
             <a:r>
-              <a:t>The last line is the guardrail. Teams love to switch ideas when criticised. Switching is only justified by an actual gate failure, not by discomfort.</a:t>
+              <a:t>When an objection lands, narrow the users rather than the ambition, shrink the data but keep the path, and stub the hard step for now. Change problems only if a gate actually fails.</a:t>
             </a:r>
           </a:p>
         </p:txBody>
@@ -2510,7 +2510,7 @@
           <a:lstStyle/>
           <a:p>
             <a:r>
-              <a:t>Give them the sentence to say to each other on Day 2 when scope grows: is this on the one path? Everything else is a Day 3 conversation at the earliest.</a:t>
+              <a:t>Cutting scope means one user type instead of four, one input format instead of any, and one clean path with no edge cases.</a:t>
             </a:r>
           </a:p>
         </p:txBody>
@@ -2580,7 +2580,7 @@
           <a:lstStyle/>
           <a:p>
             <a:r>
-              <a:t>Third objective. The statement they just wrote is worthless if it lives in one person's chat history. This section makes it the team's.</a:t>
+              <a:t>Third and last: getting all of this out of your head and into something the team shares.</a:t>
             </a:r>
           </a:p>
         </p:txBody>
@@ -2650,7 +2650,7 @@
           <a:lstStyle/>
           <a:p>
             <a:r>
-              <a:t>Two words to stress: persistent and shared. A chat is neither. Everything that matters this week goes in the Project so that the fifth teammate gets the same context as the first.</a:t>
+              <a:t>A Claude Project is a shared workspace that holds your instructions and your context in one place.</a:t>
             </a:r>
           </a:p>
         </p:txBody>
@@ -2720,7 +2720,7 @@
           <a:lstStyle/>
           <a:p>
             <a:r>
-              <a:t>The third row is the one that saves real hours this week. Ask how many have re-pasted the same background into a fresh chat three times. Most hands go up.</a:t>
+              <a:t>The difference from a chat is this. In a chat, context dies with the tab, one person holds it, and you re-explain it every time. In a Project, context persists, the whole team shares it, and you explain it once.</a:t>
             </a:r>
           </a:p>
         </p:txBody>
@@ -2790,7 +2790,7 @@
           <a:lstStyle/>
           <a:p>
             <a:r>
-              <a:t>Map these to the syllabus wording exactly: instructions, uploaded context, one place everyone works from. Say that the first is the one teams under-invest in.</a:t>
+              <a:t>A Project holds three things: instructions, which are standing rules for every chat; context, meaning your uploaded documents and data; and one place everybody works from.</a:t>
             </a:r>
           </a:p>
         </p:txBody>
@@ -2860,7 +2860,7 @@
           <a:lstStyle/>
           <a:p>
             <a:r>
-              <a:t>Ask it cold and take two or three answers out loud. Expect tool names and vague ambitions. Do not correct anyone yet — you are collecting the raw material you will diagnose three slides from now. Let the vagueness sit.</a:t>
+              <a:t>So: what are you building? Answer it in one sentence, out loud, before we go any further.</a:t>
             </a:r>
           </a:p>
         </p:txBody>
@@ -2930,7 +2930,7 @@
           <a:lstStyle/>
           <a:p>
             <a:r>
-              <a:t>Do this live, not later — five minutes at the laptops. Naming it for the problem rather than the team is deliberate: it keeps the problem in front of them every time they open it.</a:t>
+              <a:t>Three steps, right now. Create it and name it for the problem. Paste your problem statement into the instructions. Then add every teammate today.</a:t>
             </a:r>
           </a:p>
         </p:txBody>
@@ -3000,7 +3000,7 @@
           <a:lstStyle/>
           <a:p>
             <a:r>
-              <a:t>The out-of-scope section is the one teams omit and the one that pays off. Once cut scope is written down, Claude will push back when a teammate quietly reintroduces it on Day 2.</a:t>
+              <a:t>Here is the template for those instructions: the problem, what success looks like, and what is out of scope along with why you cut it.</a:t>
             </a:r>
           </a:p>
         </p:txBody>
@@ -3070,7 +3070,7 @@
           <a:lstStyle/>
           <a:p>
             <a:r>
-              <a:t>The middle item surprises people. The transcript records why the problem is worded this way, which stops the team relitigating settled decisions midweek.</a:t>
+              <a:t>Upload three things: sample data even if it is faked, the interrogation transcript, and the objections you accepted.</a:t>
             </a:r>
           </a:p>
         </p:txBody>
@@ -3140,7 +3140,7 @@
           <a:lstStyle/>
           <a:p>
             <a:r>
-              <a:t>Brief and firm. Substitute synthetic data for anything sensitive — gate two already told them synthetic is acceptable, so there is no excuse to take the risk.</a:t>
+              <a:t>Do not upload real personal records, anything under an NDA, or credentials and API keys.</a:t>
             </a:r>
           </a:p>
         </p:txBody>
@@ -3210,7 +3210,7 @@
           <a:lstStyle/>
           <a:p>
             <a:r>
-              <a:t>Four small habits that separate teams who finish from teams who thrash. Ask each team to pick the one they are worst at and say it out loud.</a:t>
+              <a:t>Four conventions worth agreeing now: the Project is the single source, decisions get logged in writing, everyone reads it first, and it gets updated whenever scope changes.</a:t>
             </a:r>
           </a:p>
         </p:txBody>
@@ -3280,7 +3280,7 @@
           <a:lstStyle/>
           <a:p>
             <a:r>
-              <a:t>All three are silent failures — nothing breaks, the team just drifts apart. Suggest a sixty-second Project check at the start of each day.</a:t>
+              <a:t>Three ways Projects go stale: instructions written once and never updated, uploads nobody has actually read, and one team member still working in a private chat.</a:t>
             </a:r>
           </a:p>
         </p:txBody>
@@ -3350,7 +3350,7 @@
           <a:lstStyle/>
           <a:p>
             <a:r>
-              <a:t>The exit criteria. Read them slowly and ask teams to self-assess. Anyone missing the third can fix it in ninety seconds before the break.</a:t>
+              <a:t>You are done with this session when your statement passes all three gates, the strongest objection has an answer, and the Project exists and is shared.</a:t>
             </a:r>
           </a:p>
         </p:txBody>
@@ -3420,7 +3420,7 @@
           <a:lstStyle/>
           <a:p>
             <a:r>
-              <a:t>The concrete output of 35 minutes. If a team cannot show all three, they are not ready for 1.2 — flag it now rather than discovering it during the workflow mapping.</a:t>
+              <a:t>You leave with one precise problem, three gates passed, and one shared Project.</a:t>
             </a:r>
           </a:p>
         </p:txBody>
@@ -3490,7 +3490,7 @@
           <a:lstStyle/>
           <a:p>
             <a:r>
-              <a:t>A short bridge into session 1.2 at ten o'clock. Make the dependency explicit: the workflow map is built directly on the problem statement they just wrote, so a weak statement produces a weak map.</a:t>
+              <a:t>Next session we break that problem into steps, draw it as a Claude Artifact, and name what each step needs.</a:t>
             </a:r>
           </a:p>
         </p:txBody>
@@ -3560,7 +3560,7 @@
           <a:lstStyle/>
           <a:p>
             <a:r>
-              <a:t>Close on the test, not on a summary. If the answer is no, that team spends the break fixing it. Hold the slide up while people pack up — it is the sentence you want them carrying into Day 2.</a:t>
+              <a:t>One last question to take with you: can a stranger restate your problem back to you? If not, it is not precise yet.</a:t>
             </a:r>
           </a:p>
         </p:txBody>
@@ -3630,7 +3630,7 @@
           <a:lstStyle/>
           <a:p>
             <a:r>
-              <a:t>Hold up the two answers side by side. The left is what people said. The right is what the same idea looks like after this session. Everything between here and the break is the machinery that gets you from left to right.</a:t>
+              <a:t>There are two ways to answer that. “An AI thing for resumes” is the vague one. “Flags gaps in two hundred files” is the precise one.</a:t>
             </a:r>
           </a:p>
         </p:txBody>
@@ -3700,7 +3700,7 @@
           <a:lstStyle/>
           <a:p>
             <a:r>
-              <a:t>The arc of the session in four moves. Tell them the last step is where the statement stops being a conversation and becomes a durable artifact the whole team works from. Return to this slide if the room loses the thread.</a:t>
+              <a:t>Four moves to get from one to the other: separate the problem from the solution, let Claude interrogate the ask, run it through the scoping test, then commit it to your Project.</a:t>
             </a:r>
           </a:p>
         </p:txBody>
@@ -3770,7 +3770,7 @@
           <a:lstStyle/>
           <a:p>
             <a:r>
-              <a:t>First objective. The single most common failure in a three-day build is starting from a solution nobody validated. Ten minutes here saves a wasted Day 2.</a:t>
+              <a:t>First, the distinction everything else rests on: a problem is not a solution.</a:t>
             </a:r>
           </a:p>
         </p:txBody>
@@ -3840,7 +3840,7 @@
           <a:lstStyle/>
           <a:p>
             <a:r>
-              <a:t>Stress the last clause. The test of a problem statement is that a reader could propose three different solutions to it. If only one solution fits, you have smuggled the answer into the question.</a:t>
+              <a:t>A problem statement is the mismatch between reality and expectation — a gap between what happens today and what should happen instead.</a:t>
             </a:r>
           </a:p>
         </p:txBody>
@@ -3910,7 +3910,7 @@
           <a:lstStyle/>
           <a:p>
             <a:r>
-              <a:t>Not a bad thing — just premature. The danger is that it feels like progress. Naming a tool gives the team the sensation of having decided something while the actual problem is still unexamined.</a:t>
+              <a:t>A solution statement is something you plan to build, and it quietly assumes the diagnosis is already settled.</a:t>
             </a:r>
           </a:p>
         </p:txBody>

--- a/examples/pptx/immersion-1-1-problem-statement.pptx
+++ b/examples/pptx/immersion-1-1-problem-statement.pptx
@@ -53,7 +53,6 @@
     <p:sldId id="301" r:id="rId53"/>
     <p:sldId id="302" r:id="rId54"/>
     <p:sldId id="303" r:id="rId55"/>
-    <p:sldId id="304" r:id="rId56"/>
   </p:sldIdLst>
   <p:sldSz cx="12192000" cy="6858000" type="screen16x9"/>
   <p:notesSz cx="6858000" cy="9144000"/>
@@ -3515,76 +3514,6 @@
 </p:notes>
 </file>
 
-<file path=ppt/notesSlides/notesSlide49.xml><?xml version="1.0" encoding="utf-8"?>
-<p:notes xmlns:a="http://schemas.openxmlformats.org/drawingml/2006/main" xmlns:p="http://schemas.openxmlformats.org/presentationml/2006/main" xmlns:r="http://schemas.openxmlformats.org/officeDocument/2006/relationships">
-  <p:cSld>
-    <p:spTree>
-      <p:nvGrpSpPr>
-        <p:cNvPr id="1" name=""/>
-        <p:cNvGrpSpPr/>
-        <p:nvPr/>
-      </p:nvGrpSpPr>
-      <p:grpSpPr>
-        <a:xfrm>
-          <a:off x="0" y="0"/>
-          <a:ext cx="0" cy="0"/>
-          <a:chOff x="0" y="0"/>
-          <a:chExt cx="0" cy="0"/>
-        </a:xfrm>
-      </p:grpSpPr>
-      <p:sp>
-        <p:nvSpPr>
-          <p:cNvPr id="2" name="Slide Image Placeholder 1"/>
-          <p:cNvSpPr>
-            <a:spLocks noGrp="1"/>
-          </p:cNvSpPr>
-          <p:nvPr>
-            <p:ph type="sldImg" idx="2"/>
-          </p:nvPr>
-        </p:nvSpPr>
-        <p:spPr/>
-      </p:sp>
-      <p:sp>
-        <p:nvSpPr>
-          <p:cNvPr id="3" name="Notes Placeholder 2"/>
-          <p:cNvSpPr>
-            <a:spLocks noGrp="1"/>
-          </p:cNvSpPr>
-          <p:nvPr>
-            <p:ph type="body" idx="3" sz="quarter"/>
-          </p:nvPr>
-        </p:nvSpPr>
-        <p:spPr/>
-        <p:txBody>
-          <a:bodyPr/>
-          <a:lstStyle/>
-          <a:p>
-            <a:r>
-              <a:t>One last question to take with you: can a stranger restate your problem back to you? If not, it is not precise yet.</a:t>
-            </a:r>
-          </a:p>
-        </p:txBody>
-      </p:sp>
-      <p:sp>
-        <p:nvSpPr>
-          <p:cNvPr id="4" name="Slide Number Placeholder 3"/>
-          <p:cNvSpPr>
-            <a:spLocks noGrp="1"/>
-          </p:cNvSpPr>
-          <p:nvPr>
-            <p:ph type="sldNum" idx="5" sz="quarter"/>
-          </p:nvPr>
-        </p:nvSpPr>
-        <p:spPr/>
-      </p:sp>
-    </p:spTree>
-  </p:cSld>
-  <p:clrMapOvr>
-    <a:masterClrMapping/>
-  </p:clrMapOvr>
-</p:notes>
-</file>
-
 <file path=ppt/notesSlides/notesSlide5.xml><?xml version="1.0" encoding="utf-8"?>
 <p:notes xmlns:a="http://schemas.openxmlformats.org/drawingml/2006/main" xmlns:p="http://schemas.openxmlformats.org/presentationml/2006/main" xmlns:r="http://schemas.openxmlformats.org/officeDocument/2006/relationships">
   <p:cSld>
@@ -5398,7 +5327,7 @@
             <a:r>
               <a:rPr sz="3400" b="1" i="0">
                 <a:solidFill>
-                  <a:srgbClr val="123A6B"/>
+                  <a:srgbClr val="0072CE"/>
                 </a:solidFill>
                 <a:latin typeface="Arial"/>
               </a:rPr>
@@ -5435,7 +5364,7 @@
             <a:r>
               <a:rPr sz="3400" b="1" i="0">
                 <a:solidFill>
-                  <a:srgbClr val="123A6B"/>
+                  <a:srgbClr val="0072CE"/>
                 </a:solidFill>
                 <a:latin typeface="Arial"/>
               </a:rPr>
@@ -6327,6 +6256,43 @@
         <p:spPr>
           <a:xfrm>
             <a:off x="6233160" y="1499616"/>
+            <a:ext cx="5958840" cy="609600"/>
+          </a:xfrm>
+          <a:prstGeom prst="rect">
+            <a:avLst/>
+          </a:prstGeom>
+          <a:noFill/>
+        </p:spPr>
+        <p:txBody>
+          <a:bodyPr wrap="none" lIns="0" rIns="0">
+            <a:noAutofit/>
+          </a:bodyPr>
+          <a:lstStyle/>
+          <a:p>
+            <a:pPr algn="l"/>
+            <a:r>
+              <a:rPr sz="3400" b="0" i="0">
+                <a:solidFill>
+                  <a:srgbClr val="0A2240"/>
+                </a:solidFill>
+                <a:latin typeface="Arial"/>
+              </a:rPr>
+              <a:t>Built with customers.</a:t>
+            </a:r>
+          </a:p>
+        </p:txBody>
+      </p:sp>
+      <p:sp>
+        <p:nvSpPr>
+          <p:cNvPr id="7" name="TextBox 6"/>
+          <p:cNvSpPr/>
+          <p:nvPr>
+            <p:ph type="body" idx="2"/>
+          </p:nvPr>
+        </p:nvSpPr>
+        <p:spPr>
+          <a:xfrm>
+            <a:off x="6233160" y="2383536"/>
             <a:ext cx="5501640" cy="1127760"/>
           </a:xfrm>
           <a:prstGeom prst="rect">
@@ -6348,44 +6314,7 @@
                 </a:solidFill>
                 <a:latin typeface="Arial"/>
               </a:rPr>
-              <a:t>Built with customers, not just for them.</a:t>
-            </a:r>
-          </a:p>
-        </p:txBody>
-      </p:sp>
-      <p:sp>
-        <p:nvSpPr>
-          <p:cNvPr id="7" name="TextBox 6"/>
-          <p:cNvSpPr/>
-          <p:nvPr>
-            <p:ph type="body" idx="2"/>
-          </p:nvPr>
-        </p:nvSpPr>
-        <p:spPr>
-          <a:xfrm>
-            <a:off x="6233160" y="2901696"/>
-            <a:ext cx="5501640" cy="1127760"/>
-          </a:xfrm>
-          <a:prstGeom prst="rect">
-            <a:avLst/>
-          </a:prstGeom>
-          <a:noFill/>
-        </p:spPr>
-        <p:txBody>
-          <a:bodyPr wrap="square" lIns="0" rIns="0">
-            <a:noAutofit/>
-          </a:bodyPr>
-          <a:lstStyle/>
-          <a:p>
-            <a:pPr algn="l"/>
-            <a:r>
-              <a:rPr sz="3400" b="0" i="0">
-                <a:solidFill>
-                  <a:srgbClr val="0A2240"/>
-                </a:solidFill>
-                <a:latin typeface="Arial"/>
-              </a:rPr>
-              <a:t>60% faster rollout; 50% fewer tickets.</a:t>
+              <a:t>60% faster; 50% fewer tickets</a:t>
             </a:r>
           </a:p>
         </p:txBody>
@@ -6404,405 +6333,6 @@
 </file>
 
 <file path=ppt/slideLayouts/slideLayout18.xml><?xml version="1.0" encoding="utf-8"?>
-<p:sldLayout xmlns:a="http://schemas.openxmlformats.org/drawingml/2006/main" xmlns:r="http://schemas.openxmlformats.org/officeDocument/2006/relationships" xmlns:p="http://schemas.openxmlformats.org/presentationml/2006/main" type="blank" preserve="1">
-  <p:cSld name="slidekit · Card Grid">
-    <p:bg>
-      <p:bgPr>
-        <a:solidFill>
-          <a:srgbClr val="FFFFFF"/>
-        </a:solidFill>
-        <a:effectLst/>
-      </p:bgPr>
-    </p:bg>
-    <p:spTree>
-      <p:nvGrpSpPr>
-        <p:cNvPr id="1" name=""/>
-        <p:cNvGrpSpPr/>
-        <p:nvPr/>
-      </p:nvGrpSpPr>
-      <p:grpSpPr>
-        <a:xfrm>
-          <a:off x="0" y="0"/>
-          <a:ext cx="0" cy="0"/>
-          <a:chOff x="0" y="0"/>
-          <a:chExt cx="0" cy="0"/>
-        </a:xfrm>
-      </p:grpSpPr>
-      <p:sp>
-        <p:nvSpPr>
-          <p:cNvPr id="4" name="Slide Number Placeholder 3"/>
-          <p:cNvSpPr>
-            <a:spLocks noGrp="1"/>
-          </p:cNvSpPr>
-          <p:nvPr>
-            <p:ph type="sldNum" sz="quarter" idx="12"/>
-          </p:nvPr>
-        </p:nvSpPr>
-        <p:spPr>
-          <a:xfrm>
-            <a:off x="11186160" y="6035040"/>
-            <a:ext cx="548640" cy="365760"/>
-          </a:xfrm>
-        </p:spPr>
-        <p:txBody>
-          <a:bodyPr/>
-          <a:lstStyle/>
-          <a:p>
-            <a:fld id="{C1FF6DA9-008F-8B48-92A6-B652298478BF}" type="slidenum">
-              <a:rPr lang="en-US" smtClean="0"/>
-              <a:t>‹#›</a:t>
-            </a:fld>
-            <a:endParaRPr lang="en-US"/>
-          </a:p>
-        </p:txBody>
-      </p:sp>
-      <p:sp>
-        <p:nvSpPr>
-          <p:cNvPr id="5" name="TextBox 4"/>
-          <p:cNvSpPr/>
-          <p:nvPr>
-            <p:ph type="title"/>
-          </p:nvPr>
-        </p:nvSpPr>
-        <p:spPr>
-          <a:xfrm>
-            <a:off x="457200" y="457200"/>
-            <a:ext cx="11277600" cy="768096"/>
-          </a:xfrm>
-          <a:prstGeom prst="rect">
-            <a:avLst/>
-          </a:prstGeom>
-          <a:noFill/>
-        </p:spPr>
-        <p:txBody>
-          <a:bodyPr wrap="none" lIns="0" rIns="0">
-            <a:noAutofit/>
-          </a:bodyPr>
-          <a:lstStyle/>
-          <a:p>
-            <a:pPr algn="l"/>
-            <a:r>
-              <a:rPr sz="4200" b="1" i="0">
-                <a:solidFill>
-                  <a:srgbClr val="0072CE"/>
-                </a:solidFill>
-                <a:latin typeface="Arial"/>
-              </a:rPr>
-              <a:t>What We Offer</a:t>
-            </a:r>
-          </a:p>
-        </p:txBody>
-      </p:sp>
-      <p:sp>
-        <p:nvSpPr>
-          <p:cNvPr id="6" name="TextBox 5"/>
-          <p:cNvSpPr/>
-          <p:nvPr>
-            <p:ph type="body" idx="1"/>
-          </p:nvPr>
-        </p:nvSpPr>
-        <p:spPr>
-          <a:xfrm>
-            <a:off x="457200" y="1499616"/>
-            <a:ext cx="2831366" cy="518159"/>
-          </a:xfrm>
-          <a:prstGeom prst="rect">
-            <a:avLst/>
-          </a:prstGeom>
-          <a:noFill/>
-        </p:spPr>
-        <p:txBody>
-          <a:bodyPr wrap="none" lIns="0" rIns="0">
-            <a:noAutofit/>
-          </a:bodyPr>
-          <a:lstStyle/>
-          <a:p>
-            <a:pPr algn="l"/>
-            <a:r>
-              <a:rPr sz="3400" b="1" i="0">
-                <a:solidFill>
-                  <a:srgbClr val="0A2240"/>
-                </a:solidFill>
-                <a:latin typeface="Arial"/>
-              </a:rPr>
-              <a:t>Insights</a:t>
-            </a:r>
-          </a:p>
-        </p:txBody>
-      </p:sp>
-      <p:sp>
-        <p:nvSpPr>
-          <p:cNvPr id="7" name="TextBox 6"/>
-          <p:cNvSpPr/>
-          <p:nvPr>
-            <p:ph type="body" idx="2"/>
-          </p:nvPr>
-        </p:nvSpPr>
-        <p:spPr>
-          <a:xfrm>
-            <a:off x="457200" y="2154935"/>
-            <a:ext cx="2613660" cy="3605785"/>
-          </a:xfrm>
-          <a:prstGeom prst="rect">
-            <a:avLst/>
-          </a:prstGeom>
-          <a:noFill/>
-        </p:spPr>
-        <p:txBody>
-          <a:bodyPr wrap="square" lIns="0" rIns="0">
-            <a:noAutofit/>
-          </a:bodyPr>
-          <a:lstStyle/>
-          <a:p>
-            <a:pPr algn="l"/>
-            <a:r>
-              <a:rPr sz="3400" b="0" i="0">
-                <a:solidFill>
-                  <a:srgbClr val="0A2240"/>
-                </a:solidFill>
-                <a:latin typeface="Arial"/>
-              </a:rPr>
-              <a:t>Live data and AI analytics.</a:t>
-            </a:r>
-          </a:p>
-        </p:txBody>
-      </p:sp>
-      <p:sp>
-        <p:nvSpPr>
-          <p:cNvPr id="8" name="TextBox 7"/>
-          <p:cNvSpPr/>
-          <p:nvPr>
-            <p:ph type="body" idx="3"/>
-          </p:nvPr>
-        </p:nvSpPr>
-        <p:spPr>
-          <a:xfrm>
-            <a:off x="3345180" y="1499616"/>
-            <a:ext cx="2909292" cy="518159"/>
-          </a:xfrm>
-          <a:prstGeom prst="rect">
-            <a:avLst/>
-          </a:prstGeom>
-          <a:noFill/>
-        </p:spPr>
-        <p:txBody>
-          <a:bodyPr wrap="none" lIns="0" rIns="0">
-            <a:noAutofit/>
-          </a:bodyPr>
-          <a:lstStyle/>
-          <a:p>
-            <a:pPr algn="l"/>
-            <a:r>
-              <a:rPr sz="3400" b="1" i="0">
-                <a:solidFill>
-                  <a:srgbClr val="0A2240"/>
-                </a:solidFill>
-                <a:latin typeface="Arial"/>
-              </a:rPr>
-              <a:t>Security</a:t>
-            </a:r>
-          </a:p>
-        </p:txBody>
-      </p:sp>
-      <p:sp>
-        <p:nvSpPr>
-          <p:cNvPr id="9" name="TextBox 8"/>
-          <p:cNvSpPr/>
-          <p:nvPr>
-            <p:ph type="body" idx="4"/>
-          </p:nvPr>
-        </p:nvSpPr>
-        <p:spPr>
-          <a:xfrm>
-            <a:off x="3345180" y="2154935"/>
-            <a:ext cx="2613660" cy="3605785"/>
-          </a:xfrm>
-          <a:prstGeom prst="rect">
-            <a:avLst/>
-          </a:prstGeom>
-          <a:noFill/>
-        </p:spPr>
-        <p:txBody>
-          <a:bodyPr wrap="square" lIns="0" rIns="0">
-            <a:noAutofit/>
-          </a:bodyPr>
-          <a:lstStyle/>
-          <a:p>
-            <a:pPr algn="l"/>
-            <a:r>
-              <a:rPr sz="3400" b="0" i="0">
-                <a:solidFill>
-                  <a:srgbClr val="0A2240"/>
-                </a:solidFill>
-                <a:latin typeface="Arial"/>
-              </a:rPr>
-              <a:t>Zero-trust, SOC 2 ready.</a:t>
-            </a:r>
-          </a:p>
-        </p:txBody>
-      </p:sp>
-      <p:sp>
-        <p:nvSpPr>
-          <p:cNvPr id="10" name="TextBox 9"/>
-          <p:cNvSpPr/>
-          <p:nvPr>
-            <p:ph type="body" idx="5"/>
-          </p:nvPr>
-        </p:nvSpPr>
-        <p:spPr>
-          <a:xfrm>
-            <a:off x="6233160" y="1499616"/>
-            <a:ext cx="2613660" cy="518159"/>
-          </a:xfrm>
-          <a:prstGeom prst="rect">
-            <a:avLst/>
-          </a:prstGeom>
-          <a:noFill/>
-        </p:spPr>
-        <p:txBody>
-          <a:bodyPr wrap="none" lIns="0" rIns="0">
-            <a:noAutofit/>
-          </a:bodyPr>
-          <a:lstStyle/>
-          <a:p>
-            <a:pPr algn="l"/>
-            <a:r>
-              <a:rPr sz="3400" b="1" i="0">
-                <a:solidFill>
-                  <a:srgbClr val="0A2240"/>
-                </a:solidFill>
-                <a:latin typeface="Arial"/>
-              </a:rPr>
-              <a:t>Speed</a:t>
-            </a:r>
-          </a:p>
-        </p:txBody>
-      </p:sp>
-      <p:sp>
-        <p:nvSpPr>
-          <p:cNvPr id="11" name="TextBox 10"/>
-          <p:cNvSpPr/>
-          <p:nvPr>
-            <p:ph type="body" idx="6"/>
-          </p:nvPr>
-        </p:nvSpPr>
-        <p:spPr>
-          <a:xfrm>
-            <a:off x="6233160" y="2154935"/>
-            <a:ext cx="2613660" cy="3605785"/>
-          </a:xfrm>
-          <a:prstGeom prst="rect">
-            <a:avLst/>
-          </a:prstGeom>
-          <a:noFill/>
-        </p:spPr>
-        <p:txBody>
-          <a:bodyPr wrap="square" lIns="0" rIns="0">
-            <a:noAutofit/>
-          </a:bodyPr>
-          <a:lstStyle/>
-          <a:p>
-            <a:pPr algn="l"/>
-            <a:r>
-              <a:rPr sz="3400" b="0" i="0">
-                <a:solidFill>
-                  <a:srgbClr val="0A2240"/>
-                </a:solidFill>
-                <a:latin typeface="Arial"/>
-              </a:rPr>
-              <a:t>Sub-100ms p99 latency.</a:t>
-            </a:r>
-          </a:p>
-        </p:txBody>
-      </p:sp>
-      <p:sp>
-        <p:nvSpPr>
-          <p:cNvPr id="12" name="TextBox 11"/>
-          <p:cNvSpPr/>
-          <p:nvPr>
-            <p:ph type="body" idx="7"/>
-          </p:nvPr>
-        </p:nvSpPr>
-        <p:spPr>
-          <a:xfrm>
-            <a:off x="9121140" y="1499616"/>
-            <a:ext cx="2613660" cy="518159"/>
-          </a:xfrm>
-          <a:prstGeom prst="rect">
-            <a:avLst/>
-          </a:prstGeom>
-          <a:noFill/>
-        </p:spPr>
-        <p:txBody>
-          <a:bodyPr wrap="none" lIns="0" rIns="0">
-            <a:noAutofit/>
-          </a:bodyPr>
-          <a:lstStyle/>
-          <a:p>
-            <a:pPr algn="l"/>
-            <a:r>
-              <a:rPr sz="3400" b="1" i="0">
-                <a:solidFill>
-                  <a:srgbClr val="0A2240"/>
-                </a:solidFill>
-                <a:latin typeface="Arial"/>
-              </a:rPr>
-              <a:t>APIs</a:t>
-            </a:r>
-          </a:p>
-        </p:txBody>
-      </p:sp>
-      <p:sp>
-        <p:nvSpPr>
-          <p:cNvPr id="13" name="TextBox 12"/>
-          <p:cNvSpPr/>
-          <p:nvPr>
-            <p:ph type="body" idx="8"/>
-          </p:nvPr>
-        </p:nvSpPr>
-        <p:spPr>
-          <a:xfrm>
-            <a:off x="9121140" y="2154935"/>
-            <a:ext cx="2613660" cy="3605785"/>
-          </a:xfrm>
-          <a:prstGeom prst="rect">
-            <a:avLst/>
-          </a:prstGeom>
-          <a:noFill/>
-        </p:spPr>
-        <p:txBody>
-          <a:bodyPr wrap="square" lIns="0" rIns="0">
-            <a:noAutofit/>
-          </a:bodyPr>
-          <a:lstStyle/>
-          <a:p>
-            <a:pPr algn="l"/>
-            <a:r>
-              <a:rPr sz="3400" b="0" i="0">
-                <a:solidFill>
-                  <a:srgbClr val="0A2240"/>
-                </a:solidFill>
-                <a:latin typeface="Arial"/>
-              </a:rPr>
-              <a:t>300+ open connectors.</a:t>
-            </a:r>
-          </a:p>
-        </p:txBody>
-      </p:sp>
-    </p:spTree>
-    <p:extLst>
-      <p:ext uri="{BB962C8B-B14F-4D97-AF65-F5344CB8AC3E}">
-        <p14:creationId xmlns:p14="http://schemas.microsoft.com/office/powerpoint/2010/main" val="1212999818"/>
-      </p:ext>
-    </p:extLst>
-  </p:cSld>
-  <p:clrMapOvr>
-    <a:masterClrMapping/>
-  </p:clrMapOvr>
-</p:sldLayout>
-</file>
-
-<file path=ppt/slideLayouts/slideLayout19.xml><?xml version="1.0" encoding="utf-8"?>
 <p:sldLayout xmlns:a="http://schemas.openxmlformats.org/drawingml/2006/main" xmlns:r="http://schemas.openxmlformats.org/officeDocument/2006/relationships" xmlns:p="http://schemas.openxmlformats.org/presentationml/2006/main" type="blank" preserve="1">
   <p:cSld name="slidekit · Section Divider">
     <p:bg>
@@ -6957,6 +6487,511 @@
                 <a:latin typeface="Arial"/>
               </a:rPr>
               <a:t>Where We Stand Today</a:t>
+            </a:r>
+          </a:p>
+        </p:txBody>
+      </p:sp>
+    </p:spTree>
+    <p:extLst>
+      <p:ext uri="{BB962C8B-B14F-4D97-AF65-F5344CB8AC3E}">
+        <p14:creationId xmlns:p14="http://schemas.microsoft.com/office/powerpoint/2010/main" val="1212999818"/>
+      </p:ext>
+    </p:extLst>
+  </p:cSld>
+  <p:clrMapOvr>
+    <a:masterClrMapping/>
+  </p:clrMapOvr>
+</p:sldLayout>
+</file>
+
+<file path=ppt/slideLayouts/slideLayout19.xml><?xml version="1.0" encoding="utf-8"?>
+<p:sldLayout xmlns:a="http://schemas.openxmlformats.org/drawingml/2006/main" xmlns:r="http://schemas.openxmlformats.org/officeDocument/2006/relationships" xmlns:p="http://schemas.openxmlformats.org/presentationml/2006/main" type="blank" preserve="1">
+  <p:cSld name="slidekit · Agenda">
+    <p:bg>
+      <p:bgPr>
+        <a:solidFill>
+          <a:srgbClr val="FFFFFF"/>
+        </a:solidFill>
+        <a:effectLst/>
+      </p:bgPr>
+    </p:bg>
+    <p:spTree>
+      <p:nvGrpSpPr>
+        <p:cNvPr id="1" name=""/>
+        <p:cNvGrpSpPr/>
+        <p:nvPr/>
+      </p:nvGrpSpPr>
+      <p:grpSpPr>
+        <a:xfrm>
+          <a:off x="0" y="0"/>
+          <a:ext cx="0" cy="0"/>
+          <a:chOff x="0" y="0"/>
+          <a:chExt cx="0" cy="0"/>
+        </a:xfrm>
+      </p:grpSpPr>
+      <p:sp>
+        <p:nvSpPr>
+          <p:cNvPr id="4" name="Slide Number Placeholder 3"/>
+          <p:cNvSpPr>
+            <a:spLocks noGrp="1"/>
+          </p:cNvSpPr>
+          <p:nvPr>
+            <p:ph type="sldNum" sz="quarter" idx="12"/>
+          </p:nvPr>
+        </p:nvSpPr>
+        <p:spPr>
+          <a:xfrm>
+            <a:off x="11186160" y="6035040"/>
+            <a:ext cx="548640" cy="365760"/>
+          </a:xfrm>
+        </p:spPr>
+        <p:txBody>
+          <a:bodyPr/>
+          <a:lstStyle/>
+          <a:p>
+            <a:fld id="{C1FF6DA9-008F-8B48-92A6-B652298478BF}" type="slidenum">
+              <a:rPr lang="en-US" smtClean="0"/>
+              <a:t>‹#›</a:t>
+            </a:fld>
+            <a:endParaRPr lang="en-US"/>
+          </a:p>
+        </p:txBody>
+      </p:sp>
+      <p:sp>
+        <p:nvSpPr>
+          <p:cNvPr id="5" name="TextBox 4"/>
+          <p:cNvSpPr/>
+          <p:nvPr>
+            <p:ph type="title"/>
+          </p:nvPr>
+        </p:nvSpPr>
+        <p:spPr>
+          <a:xfrm>
+            <a:off x="457200" y="457200"/>
+            <a:ext cx="11277600" cy="768096"/>
+          </a:xfrm>
+          <a:prstGeom prst="rect">
+            <a:avLst/>
+          </a:prstGeom>
+          <a:noFill/>
+        </p:spPr>
+        <p:txBody>
+          <a:bodyPr wrap="none" lIns="0" rIns="0">
+            <a:noAutofit/>
+          </a:bodyPr>
+          <a:lstStyle/>
+          <a:p>
+            <a:pPr algn="l"/>
+            <a:r>
+              <a:rPr sz="4200" b="1" i="0">
+                <a:solidFill>
+                  <a:srgbClr val="0072CE"/>
+                </a:solidFill>
+                <a:latin typeface="Arial"/>
+              </a:rPr>
+              <a:t>What We Will Cover</a:t>
+            </a:r>
+          </a:p>
+        </p:txBody>
+      </p:sp>
+      <p:sp>
+        <p:nvSpPr>
+          <p:cNvPr id="6" name="Rectangle 5"/>
+          <p:cNvSpPr/>
+          <p:nvPr>
+            <p:ph type="body" idx="1"/>
+          </p:nvPr>
+        </p:nvSpPr>
+        <p:spPr>
+          <a:xfrm>
+            <a:off x="457200" y="1280160"/>
+            <a:ext cx="11277600" cy="64008"/>
+          </a:xfrm>
+          <a:prstGeom prst="rect">
+            <a:avLst/>
+          </a:prstGeom>
+          <a:solidFill>
+            <a:srgbClr val="0072CE"/>
+          </a:solidFill>
+          <a:ln>
+            <a:noFill/>
+          </a:ln>
+          <a:effectLst/>
+        </p:spPr>
+        <p:txBody>
+          <a:bodyPr rtlCol="0" anchor="ctr"/>
+          <a:lstStyle/>
+          <a:p>
+            <a:pPr algn="ctr"/>
+          </a:p>
+        </p:txBody>
+      </p:sp>
+      <p:sp>
+        <p:nvSpPr>
+          <p:cNvPr id="7" name="TextBox 6"/>
+          <p:cNvSpPr/>
+          <p:nvPr>
+            <p:ph type="body" idx="2"/>
+          </p:nvPr>
+        </p:nvSpPr>
+        <p:spPr>
+          <a:xfrm>
+            <a:off x="457200" y="1618488"/>
+            <a:ext cx="951348" cy="518159"/>
+          </a:xfrm>
+          <a:prstGeom prst="rect">
+            <a:avLst/>
+          </a:prstGeom>
+          <a:noFill/>
+        </p:spPr>
+        <p:txBody>
+          <a:bodyPr wrap="none" lIns="0" rIns="0">
+            <a:noAutofit/>
+          </a:bodyPr>
+          <a:lstStyle/>
+          <a:p>
+            <a:pPr algn="l"/>
+            <a:r>
+              <a:rPr sz="3400" b="1" i="0">
+                <a:solidFill>
+                  <a:srgbClr val="0072CE"/>
+                </a:solidFill>
+                <a:latin typeface="Arial"/>
+              </a:rPr>
+              <a:t>01</a:t>
+            </a:r>
+          </a:p>
+        </p:txBody>
+      </p:sp>
+      <p:sp>
+        <p:nvSpPr>
+          <p:cNvPr id="8" name="TextBox 7"/>
+          <p:cNvSpPr/>
+          <p:nvPr>
+            <p:ph type="body" idx="3"/>
+          </p:nvPr>
+        </p:nvSpPr>
+        <p:spPr>
+          <a:xfrm>
+            <a:off x="1371600" y="1618488"/>
+            <a:ext cx="10363200" cy="518159"/>
+          </a:xfrm>
+          <a:prstGeom prst="rect">
+            <a:avLst/>
+          </a:prstGeom>
+          <a:noFill/>
+        </p:spPr>
+        <p:txBody>
+          <a:bodyPr wrap="none" lIns="0" rIns="0">
+            <a:noAutofit/>
+          </a:bodyPr>
+          <a:lstStyle/>
+          <a:p>
+            <a:pPr algn="l"/>
+            <a:r>
+              <a:rPr sz="3400" b="0" i="0">
+                <a:solidFill>
+                  <a:srgbClr val="0A2240"/>
+                </a:solidFill>
+                <a:latin typeface="Arial"/>
+              </a:rPr>
+              <a:t>Performance against targets</a:t>
+            </a:r>
+          </a:p>
+        </p:txBody>
+      </p:sp>
+      <p:sp>
+        <p:nvSpPr>
+          <p:cNvPr id="9" name="TextBox 8"/>
+          <p:cNvSpPr/>
+          <p:nvPr>
+            <p:ph type="body" idx="4"/>
+          </p:nvPr>
+        </p:nvSpPr>
+        <p:spPr>
+          <a:xfrm>
+            <a:off x="457200" y="2501798"/>
+            <a:ext cx="951348" cy="518159"/>
+          </a:xfrm>
+          <a:prstGeom prst="rect">
+            <a:avLst/>
+          </a:prstGeom>
+          <a:noFill/>
+        </p:spPr>
+        <p:txBody>
+          <a:bodyPr wrap="none" lIns="0" rIns="0">
+            <a:noAutofit/>
+          </a:bodyPr>
+          <a:lstStyle/>
+          <a:p>
+            <a:pPr algn="l"/>
+            <a:r>
+              <a:rPr sz="3400" b="1" i="0">
+                <a:solidFill>
+                  <a:srgbClr val="0072CE"/>
+                </a:solidFill>
+                <a:latin typeface="Arial"/>
+              </a:rPr>
+              <a:t>02</a:t>
+            </a:r>
+          </a:p>
+        </p:txBody>
+      </p:sp>
+      <p:sp>
+        <p:nvSpPr>
+          <p:cNvPr id="10" name="TextBox 9"/>
+          <p:cNvSpPr/>
+          <p:nvPr>
+            <p:ph type="body" idx="5"/>
+          </p:nvPr>
+        </p:nvSpPr>
+        <p:spPr>
+          <a:xfrm>
+            <a:off x="1371600" y="2501798"/>
+            <a:ext cx="10363200" cy="518159"/>
+          </a:xfrm>
+          <a:prstGeom prst="rect">
+            <a:avLst/>
+          </a:prstGeom>
+          <a:noFill/>
+        </p:spPr>
+        <p:txBody>
+          <a:bodyPr wrap="none" lIns="0" rIns="0">
+            <a:noAutofit/>
+          </a:bodyPr>
+          <a:lstStyle/>
+          <a:p>
+            <a:pPr algn="l"/>
+            <a:r>
+              <a:rPr sz="3400" b="0" i="0">
+                <a:solidFill>
+                  <a:srgbClr val="0A2240"/>
+                </a:solidFill>
+                <a:latin typeface="Arial"/>
+              </a:rPr>
+              <a:t>Customer and market signals</a:t>
+            </a:r>
+          </a:p>
+        </p:txBody>
+      </p:sp>
+      <p:sp>
+        <p:nvSpPr>
+          <p:cNvPr id="11" name="TextBox 10"/>
+          <p:cNvSpPr/>
+          <p:nvPr>
+            <p:ph type="body" idx="6"/>
+          </p:nvPr>
+        </p:nvSpPr>
+        <p:spPr>
+          <a:xfrm>
+            <a:off x="457200" y="3385108"/>
+            <a:ext cx="951348" cy="518159"/>
+          </a:xfrm>
+          <a:prstGeom prst="rect">
+            <a:avLst/>
+          </a:prstGeom>
+          <a:noFill/>
+        </p:spPr>
+        <p:txBody>
+          <a:bodyPr wrap="none" lIns="0" rIns="0">
+            <a:noAutofit/>
+          </a:bodyPr>
+          <a:lstStyle/>
+          <a:p>
+            <a:pPr algn="l"/>
+            <a:r>
+              <a:rPr sz="3400" b="1" i="0">
+                <a:solidFill>
+                  <a:srgbClr val="0072CE"/>
+                </a:solidFill>
+                <a:latin typeface="Arial"/>
+              </a:rPr>
+              <a:t>03</a:t>
+            </a:r>
+          </a:p>
+        </p:txBody>
+      </p:sp>
+      <p:sp>
+        <p:nvSpPr>
+          <p:cNvPr id="12" name="TextBox 11"/>
+          <p:cNvSpPr/>
+          <p:nvPr>
+            <p:ph type="body" idx="7"/>
+          </p:nvPr>
+        </p:nvSpPr>
+        <p:spPr>
+          <a:xfrm>
+            <a:off x="1371600" y="3385108"/>
+            <a:ext cx="10363200" cy="518159"/>
+          </a:xfrm>
+          <a:prstGeom prst="rect">
+            <a:avLst/>
+          </a:prstGeom>
+          <a:noFill/>
+        </p:spPr>
+        <p:txBody>
+          <a:bodyPr wrap="none" lIns="0" rIns="0">
+            <a:noAutofit/>
+          </a:bodyPr>
+          <a:lstStyle/>
+          <a:p>
+            <a:pPr algn="l"/>
+            <a:r>
+              <a:rPr sz="3400" b="0" i="0">
+                <a:solidFill>
+                  <a:srgbClr val="0A2240"/>
+                </a:solidFill>
+                <a:latin typeface="Arial"/>
+              </a:rPr>
+              <a:t>Operational health and risks</a:t>
+            </a:r>
+          </a:p>
+        </p:txBody>
+      </p:sp>
+      <p:sp>
+        <p:nvSpPr>
+          <p:cNvPr id="13" name="TextBox 12"/>
+          <p:cNvSpPr/>
+          <p:nvPr>
+            <p:ph type="body" idx="8"/>
+          </p:nvPr>
+        </p:nvSpPr>
+        <p:spPr>
+          <a:xfrm>
+            <a:off x="457200" y="4268418"/>
+            <a:ext cx="951348" cy="518159"/>
+          </a:xfrm>
+          <a:prstGeom prst="rect">
+            <a:avLst/>
+          </a:prstGeom>
+          <a:noFill/>
+        </p:spPr>
+        <p:txBody>
+          <a:bodyPr wrap="none" lIns="0" rIns="0">
+            <a:noAutofit/>
+          </a:bodyPr>
+          <a:lstStyle/>
+          <a:p>
+            <a:pPr algn="l"/>
+            <a:r>
+              <a:rPr sz="3400" b="1" i="0">
+                <a:solidFill>
+                  <a:srgbClr val="0072CE"/>
+                </a:solidFill>
+                <a:latin typeface="Arial"/>
+              </a:rPr>
+              <a:t>04</a:t>
+            </a:r>
+          </a:p>
+        </p:txBody>
+      </p:sp>
+      <p:sp>
+        <p:nvSpPr>
+          <p:cNvPr id="14" name="TextBox 13"/>
+          <p:cNvSpPr/>
+          <p:nvPr>
+            <p:ph type="body" idx="9"/>
+          </p:nvPr>
+        </p:nvSpPr>
+        <p:spPr>
+          <a:xfrm>
+            <a:off x="1371600" y="4268418"/>
+            <a:ext cx="10363200" cy="518159"/>
+          </a:xfrm>
+          <a:prstGeom prst="rect">
+            <a:avLst/>
+          </a:prstGeom>
+          <a:noFill/>
+        </p:spPr>
+        <p:txBody>
+          <a:bodyPr wrap="none" lIns="0" rIns="0">
+            <a:noAutofit/>
+          </a:bodyPr>
+          <a:lstStyle/>
+          <a:p>
+            <a:pPr algn="l"/>
+            <a:r>
+              <a:rPr sz="3400" b="0" i="0">
+                <a:solidFill>
+                  <a:srgbClr val="0A2240"/>
+                </a:solidFill>
+                <a:latin typeface="Arial"/>
+              </a:rPr>
+              <a:t>Roadmap for next quarter</a:t>
+            </a:r>
+          </a:p>
+        </p:txBody>
+      </p:sp>
+      <p:sp>
+        <p:nvSpPr>
+          <p:cNvPr id="15" name="TextBox 14"/>
+          <p:cNvSpPr/>
+          <p:nvPr>
+            <p:ph type="body" idx="13"/>
+          </p:nvPr>
+        </p:nvSpPr>
+        <p:spPr>
+          <a:xfrm>
+            <a:off x="457200" y="5151728"/>
+            <a:ext cx="951348" cy="518159"/>
+          </a:xfrm>
+          <a:prstGeom prst="rect">
+            <a:avLst/>
+          </a:prstGeom>
+          <a:noFill/>
+        </p:spPr>
+        <p:txBody>
+          <a:bodyPr wrap="none" lIns="0" rIns="0">
+            <a:noAutofit/>
+          </a:bodyPr>
+          <a:lstStyle/>
+          <a:p>
+            <a:pPr algn="l"/>
+            <a:r>
+              <a:rPr sz="3400" b="1" i="0">
+                <a:solidFill>
+                  <a:srgbClr val="0072CE"/>
+                </a:solidFill>
+                <a:latin typeface="Arial"/>
+              </a:rPr>
+              <a:t>05</a:t>
+            </a:r>
+          </a:p>
+        </p:txBody>
+      </p:sp>
+      <p:sp>
+        <p:nvSpPr>
+          <p:cNvPr id="16" name="TextBox 15"/>
+          <p:cNvSpPr/>
+          <p:nvPr>
+            <p:ph type="body" idx="14"/>
+          </p:nvPr>
+        </p:nvSpPr>
+        <p:spPr>
+          <a:xfrm>
+            <a:off x="1371600" y="5151728"/>
+            <a:ext cx="10363200" cy="518159"/>
+          </a:xfrm>
+          <a:prstGeom prst="rect">
+            <a:avLst/>
+          </a:prstGeom>
+          <a:noFill/>
+        </p:spPr>
+        <p:txBody>
+          <a:bodyPr wrap="none" lIns="0" rIns="0">
+            <a:noAutofit/>
+          </a:bodyPr>
+          <a:lstStyle/>
+          <a:p>
+            <a:pPr algn="l"/>
+            <a:r>
+              <a:rPr sz="3400" b="0" i="0">
+                <a:solidFill>
+                  <a:srgbClr val="0A2240"/>
+                </a:solidFill>
+                <a:latin typeface="Arial"/>
+              </a:rPr>
+              <a:t>Decisions we need today</a:t>
             </a:r>
           </a:p>
         </p:txBody>
@@ -7146,511 +7181,6 @@
 
 <file path=ppt/slideLayouts/slideLayout20.xml><?xml version="1.0" encoding="utf-8"?>
 <p:sldLayout xmlns:a="http://schemas.openxmlformats.org/drawingml/2006/main" xmlns:r="http://schemas.openxmlformats.org/officeDocument/2006/relationships" xmlns:p="http://schemas.openxmlformats.org/presentationml/2006/main" type="blank" preserve="1">
-  <p:cSld name="slidekit · Agenda">
-    <p:bg>
-      <p:bgPr>
-        <a:solidFill>
-          <a:srgbClr val="FFFFFF"/>
-        </a:solidFill>
-        <a:effectLst/>
-      </p:bgPr>
-    </p:bg>
-    <p:spTree>
-      <p:nvGrpSpPr>
-        <p:cNvPr id="1" name=""/>
-        <p:cNvGrpSpPr/>
-        <p:nvPr/>
-      </p:nvGrpSpPr>
-      <p:grpSpPr>
-        <a:xfrm>
-          <a:off x="0" y="0"/>
-          <a:ext cx="0" cy="0"/>
-          <a:chOff x="0" y="0"/>
-          <a:chExt cx="0" cy="0"/>
-        </a:xfrm>
-      </p:grpSpPr>
-      <p:sp>
-        <p:nvSpPr>
-          <p:cNvPr id="4" name="Slide Number Placeholder 3"/>
-          <p:cNvSpPr>
-            <a:spLocks noGrp="1"/>
-          </p:cNvSpPr>
-          <p:nvPr>
-            <p:ph type="sldNum" sz="quarter" idx="12"/>
-          </p:nvPr>
-        </p:nvSpPr>
-        <p:spPr>
-          <a:xfrm>
-            <a:off x="11186160" y="6035040"/>
-            <a:ext cx="548640" cy="365760"/>
-          </a:xfrm>
-        </p:spPr>
-        <p:txBody>
-          <a:bodyPr/>
-          <a:lstStyle/>
-          <a:p>
-            <a:fld id="{C1FF6DA9-008F-8B48-92A6-B652298478BF}" type="slidenum">
-              <a:rPr lang="en-US" smtClean="0"/>
-              <a:t>‹#›</a:t>
-            </a:fld>
-            <a:endParaRPr lang="en-US"/>
-          </a:p>
-        </p:txBody>
-      </p:sp>
-      <p:sp>
-        <p:nvSpPr>
-          <p:cNvPr id="5" name="TextBox 4"/>
-          <p:cNvSpPr/>
-          <p:nvPr>
-            <p:ph type="title"/>
-          </p:nvPr>
-        </p:nvSpPr>
-        <p:spPr>
-          <a:xfrm>
-            <a:off x="457200" y="457200"/>
-            <a:ext cx="11277600" cy="768096"/>
-          </a:xfrm>
-          <a:prstGeom prst="rect">
-            <a:avLst/>
-          </a:prstGeom>
-          <a:noFill/>
-        </p:spPr>
-        <p:txBody>
-          <a:bodyPr wrap="none" lIns="0" rIns="0">
-            <a:noAutofit/>
-          </a:bodyPr>
-          <a:lstStyle/>
-          <a:p>
-            <a:pPr algn="l"/>
-            <a:r>
-              <a:rPr sz="4200" b="1" i="0">
-                <a:solidFill>
-                  <a:srgbClr val="0072CE"/>
-                </a:solidFill>
-                <a:latin typeface="Arial"/>
-              </a:rPr>
-              <a:t>What We Will Cover</a:t>
-            </a:r>
-          </a:p>
-        </p:txBody>
-      </p:sp>
-      <p:sp>
-        <p:nvSpPr>
-          <p:cNvPr id="6" name="Rectangle 5"/>
-          <p:cNvSpPr/>
-          <p:nvPr>
-            <p:ph type="body" idx="1"/>
-          </p:nvPr>
-        </p:nvSpPr>
-        <p:spPr>
-          <a:xfrm>
-            <a:off x="457200" y="1280160"/>
-            <a:ext cx="11277600" cy="64008"/>
-          </a:xfrm>
-          <a:prstGeom prst="rect">
-            <a:avLst/>
-          </a:prstGeom>
-          <a:solidFill>
-            <a:srgbClr val="0072CE"/>
-          </a:solidFill>
-          <a:ln>
-            <a:noFill/>
-          </a:ln>
-          <a:effectLst/>
-        </p:spPr>
-        <p:txBody>
-          <a:bodyPr rtlCol="0" anchor="ctr"/>
-          <a:lstStyle/>
-          <a:p>
-            <a:pPr algn="ctr"/>
-          </a:p>
-        </p:txBody>
-      </p:sp>
-      <p:sp>
-        <p:nvSpPr>
-          <p:cNvPr id="7" name="TextBox 6"/>
-          <p:cNvSpPr/>
-          <p:nvPr>
-            <p:ph type="body" idx="2"/>
-          </p:nvPr>
-        </p:nvSpPr>
-        <p:spPr>
-          <a:xfrm>
-            <a:off x="457200" y="1618488"/>
-            <a:ext cx="951348" cy="518159"/>
-          </a:xfrm>
-          <a:prstGeom prst="rect">
-            <a:avLst/>
-          </a:prstGeom>
-          <a:noFill/>
-        </p:spPr>
-        <p:txBody>
-          <a:bodyPr wrap="none" lIns="0" rIns="0">
-            <a:noAutofit/>
-          </a:bodyPr>
-          <a:lstStyle/>
-          <a:p>
-            <a:pPr algn="l"/>
-            <a:r>
-              <a:rPr sz="3400" b="1" i="0">
-                <a:solidFill>
-                  <a:srgbClr val="0072CE"/>
-                </a:solidFill>
-                <a:latin typeface="Arial"/>
-              </a:rPr>
-              <a:t>01</a:t>
-            </a:r>
-          </a:p>
-        </p:txBody>
-      </p:sp>
-      <p:sp>
-        <p:nvSpPr>
-          <p:cNvPr id="8" name="TextBox 7"/>
-          <p:cNvSpPr/>
-          <p:nvPr>
-            <p:ph type="body" idx="3"/>
-          </p:nvPr>
-        </p:nvSpPr>
-        <p:spPr>
-          <a:xfrm>
-            <a:off x="1371600" y="1618488"/>
-            <a:ext cx="10363200" cy="518159"/>
-          </a:xfrm>
-          <a:prstGeom prst="rect">
-            <a:avLst/>
-          </a:prstGeom>
-          <a:noFill/>
-        </p:spPr>
-        <p:txBody>
-          <a:bodyPr wrap="none" lIns="0" rIns="0">
-            <a:noAutofit/>
-          </a:bodyPr>
-          <a:lstStyle/>
-          <a:p>
-            <a:pPr algn="l"/>
-            <a:r>
-              <a:rPr sz="3400" b="0" i="0">
-                <a:solidFill>
-                  <a:srgbClr val="0A2240"/>
-                </a:solidFill>
-                <a:latin typeface="Arial"/>
-              </a:rPr>
-              <a:t>Performance against targets</a:t>
-            </a:r>
-          </a:p>
-        </p:txBody>
-      </p:sp>
-      <p:sp>
-        <p:nvSpPr>
-          <p:cNvPr id="9" name="TextBox 8"/>
-          <p:cNvSpPr/>
-          <p:nvPr>
-            <p:ph type="body" idx="4"/>
-          </p:nvPr>
-        </p:nvSpPr>
-        <p:spPr>
-          <a:xfrm>
-            <a:off x="457200" y="2501798"/>
-            <a:ext cx="951348" cy="518159"/>
-          </a:xfrm>
-          <a:prstGeom prst="rect">
-            <a:avLst/>
-          </a:prstGeom>
-          <a:noFill/>
-        </p:spPr>
-        <p:txBody>
-          <a:bodyPr wrap="none" lIns="0" rIns="0">
-            <a:noAutofit/>
-          </a:bodyPr>
-          <a:lstStyle/>
-          <a:p>
-            <a:pPr algn="l"/>
-            <a:r>
-              <a:rPr sz="3400" b="1" i="0">
-                <a:solidFill>
-                  <a:srgbClr val="0072CE"/>
-                </a:solidFill>
-                <a:latin typeface="Arial"/>
-              </a:rPr>
-              <a:t>02</a:t>
-            </a:r>
-          </a:p>
-        </p:txBody>
-      </p:sp>
-      <p:sp>
-        <p:nvSpPr>
-          <p:cNvPr id="10" name="TextBox 9"/>
-          <p:cNvSpPr/>
-          <p:nvPr>
-            <p:ph type="body" idx="5"/>
-          </p:nvPr>
-        </p:nvSpPr>
-        <p:spPr>
-          <a:xfrm>
-            <a:off x="1371600" y="2501798"/>
-            <a:ext cx="10363200" cy="518159"/>
-          </a:xfrm>
-          <a:prstGeom prst="rect">
-            <a:avLst/>
-          </a:prstGeom>
-          <a:noFill/>
-        </p:spPr>
-        <p:txBody>
-          <a:bodyPr wrap="none" lIns="0" rIns="0">
-            <a:noAutofit/>
-          </a:bodyPr>
-          <a:lstStyle/>
-          <a:p>
-            <a:pPr algn="l"/>
-            <a:r>
-              <a:rPr sz="3400" b="0" i="0">
-                <a:solidFill>
-                  <a:srgbClr val="0A2240"/>
-                </a:solidFill>
-                <a:latin typeface="Arial"/>
-              </a:rPr>
-              <a:t>Customer and market signals</a:t>
-            </a:r>
-          </a:p>
-        </p:txBody>
-      </p:sp>
-      <p:sp>
-        <p:nvSpPr>
-          <p:cNvPr id="11" name="TextBox 10"/>
-          <p:cNvSpPr/>
-          <p:nvPr>
-            <p:ph type="body" idx="6"/>
-          </p:nvPr>
-        </p:nvSpPr>
-        <p:spPr>
-          <a:xfrm>
-            <a:off x="457200" y="3385108"/>
-            <a:ext cx="951348" cy="518159"/>
-          </a:xfrm>
-          <a:prstGeom prst="rect">
-            <a:avLst/>
-          </a:prstGeom>
-          <a:noFill/>
-        </p:spPr>
-        <p:txBody>
-          <a:bodyPr wrap="none" lIns="0" rIns="0">
-            <a:noAutofit/>
-          </a:bodyPr>
-          <a:lstStyle/>
-          <a:p>
-            <a:pPr algn="l"/>
-            <a:r>
-              <a:rPr sz="3400" b="1" i="0">
-                <a:solidFill>
-                  <a:srgbClr val="0072CE"/>
-                </a:solidFill>
-                <a:latin typeface="Arial"/>
-              </a:rPr>
-              <a:t>03</a:t>
-            </a:r>
-          </a:p>
-        </p:txBody>
-      </p:sp>
-      <p:sp>
-        <p:nvSpPr>
-          <p:cNvPr id="12" name="TextBox 11"/>
-          <p:cNvSpPr/>
-          <p:nvPr>
-            <p:ph type="body" idx="7"/>
-          </p:nvPr>
-        </p:nvSpPr>
-        <p:spPr>
-          <a:xfrm>
-            <a:off x="1371600" y="3385108"/>
-            <a:ext cx="10363200" cy="518159"/>
-          </a:xfrm>
-          <a:prstGeom prst="rect">
-            <a:avLst/>
-          </a:prstGeom>
-          <a:noFill/>
-        </p:spPr>
-        <p:txBody>
-          <a:bodyPr wrap="none" lIns="0" rIns="0">
-            <a:noAutofit/>
-          </a:bodyPr>
-          <a:lstStyle/>
-          <a:p>
-            <a:pPr algn="l"/>
-            <a:r>
-              <a:rPr sz="3400" b="0" i="0">
-                <a:solidFill>
-                  <a:srgbClr val="0A2240"/>
-                </a:solidFill>
-                <a:latin typeface="Arial"/>
-              </a:rPr>
-              <a:t>Operational health and risks</a:t>
-            </a:r>
-          </a:p>
-        </p:txBody>
-      </p:sp>
-      <p:sp>
-        <p:nvSpPr>
-          <p:cNvPr id="13" name="TextBox 12"/>
-          <p:cNvSpPr/>
-          <p:nvPr>
-            <p:ph type="body" idx="8"/>
-          </p:nvPr>
-        </p:nvSpPr>
-        <p:spPr>
-          <a:xfrm>
-            <a:off x="457200" y="4268418"/>
-            <a:ext cx="951348" cy="518159"/>
-          </a:xfrm>
-          <a:prstGeom prst="rect">
-            <a:avLst/>
-          </a:prstGeom>
-          <a:noFill/>
-        </p:spPr>
-        <p:txBody>
-          <a:bodyPr wrap="none" lIns="0" rIns="0">
-            <a:noAutofit/>
-          </a:bodyPr>
-          <a:lstStyle/>
-          <a:p>
-            <a:pPr algn="l"/>
-            <a:r>
-              <a:rPr sz="3400" b="1" i="0">
-                <a:solidFill>
-                  <a:srgbClr val="0072CE"/>
-                </a:solidFill>
-                <a:latin typeface="Arial"/>
-              </a:rPr>
-              <a:t>04</a:t>
-            </a:r>
-          </a:p>
-        </p:txBody>
-      </p:sp>
-      <p:sp>
-        <p:nvSpPr>
-          <p:cNvPr id="14" name="TextBox 13"/>
-          <p:cNvSpPr/>
-          <p:nvPr>
-            <p:ph type="body" idx="9"/>
-          </p:nvPr>
-        </p:nvSpPr>
-        <p:spPr>
-          <a:xfrm>
-            <a:off x="1371600" y="4268418"/>
-            <a:ext cx="10363200" cy="518159"/>
-          </a:xfrm>
-          <a:prstGeom prst="rect">
-            <a:avLst/>
-          </a:prstGeom>
-          <a:noFill/>
-        </p:spPr>
-        <p:txBody>
-          <a:bodyPr wrap="none" lIns="0" rIns="0">
-            <a:noAutofit/>
-          </a:bodyPr>
-          <a:lstStyle/>
-          <a:p>
-            <a:pPr algn="l"/>
-            <a:r>
-              <a:rPr sz="3400" b="0" i="0">
-                <a:solidFill>
-                  <a:srgbClr val="0A2240"/>
-                </a:solidFill>
-                <a:latin typeface="Arial"/>
-              </a:rPr>
-              <a:t>Roadmap for next quarter</a:t>
-            </a:r>
-          </a:p>
-        </p:txBody>
-      </p:sp>
-      <p:sp>
-        <p:nvSpPr>
-          <p:cNvPr id="15" name="TextBox 14"/>
-          <p:cNvSpPr/>
-          <p:nvPr>
-            <p:ph type="body" idx="13"/>
-          </p:nvPr>
-        </p:nvSpPr>
-        <p:spPr>
-          <a:xfrm>
-            <a:off x="457200" y="5151728"/>
-            <a:ext cx="951348" cy="518159"/>
-          </a:xfrm>
-          <a:prstGeom prst="rect">
-            <a:avLst/>
-          </a:prstGeom>
-          <a:noFill/>
-        </p:spPr>
-        <p:txBody>
-          <a:bodyPr wrap="none" lIns="0" rIns="0">
-            <a:noAutofit/>
-          </a:bodyPr>
-          <a:lstStyle/>
-          <a:p>
-            <a:pPr algn="l"/>
-            <a:r>
-              <a:rPr sz="3400" b="1" i="0">
-                <a:solidFill>
-                  <a:srgbClr val="0072CE"/>
-                </a:solidFill>
-                <a:latin typeface="Arial"/>
-              </a:rPr>
-              <a:t>05</a:t>
-            </a:r>
-          </a:p>
-        </p:txBody>
-      </p:sp>
-      <p:sp>
-        <p:nvSpPr>
-          <p:cNvPr id="16" name="TextBox 15"/>
-          <p:cNvSpPr/>
-          <p:nvPr>
-            <p:ph type="body" idx="14"/>
-          </p:nvPr>
-        </p:nvSpPr>
-        <p:spPr>
-          <a:xfrm>
-            <a:off x="1371600" y="5151728"/>
-            <a:ext cx="10363200" cy="518159"/>
-          </a:xfrm>
-          <a:prstGeom prst="rect">
-            <a:avLst/>
-          </a:prstGeom>
-          <a:noFill/>
-        </p:spPr>
-        <p:txBody>
-          <a:bodyPr wrap="none" lIns="0" rIns="0">
-            <a:noAutofit/>
-          </a:bodyPr>
-          <a:lstStyle/>
-          <a:p>
-            <a:pPr algn="l"/>
-            <a:r>
-              <a:rPr sz="3400" b="0" i="0">
-                <a:solidFill>
-                  <a:srgbClr val="0A2240"/>
-                </a:solidFill>
-                <a:latin typeface="Arial"/>
-              </a:rPr>
-              <a:t>Decisions we need today</a:t>
-            </a:r>
-          </a:p>
-        </p:txBody>
-      </p:sp>
-    </p:spTree>
-    <p:extLst>
-      <p:ext uri="{BB962C8B-B14F-4D97-AF65-F5344CB8AC3E}">
-        <p14:creationId xmlns:p14="http://schemas.microsoft.com/office/powerpoint/2010/main" val="1212999818"/>
-      </p:ext>
-    </p:extLst>
-  </p:cSld>
-  <p:clrMapOvr>
-    <a:masterClrMapping/>
-  </p:clrMapOvr>
-</p:sldLayout>
-</file>
-
-<file path=ppt/slideLayouts/slideLayout21.xml><?xml version="1.0" encoding="utf-8"?>
-<p:sldLayout xmlns:a="http://schemas.openxmlformats.org/drawingml/2006/main" xmlns:r="http://schemas.openxmlformats.org/officeDocument/2006/relationships" xmlns:p="http://schemas.openxmlformats.org/presentationml/2006/main" type="blank" preserve="1">
   <p:cSld name="slidekit · Big Number">
     <p:bg>
       <p:bgPr>
@@ -7821,7 +7351,7 @@
 </p:sldLayout>
 </file>
 
-<file path=ppt/slideLayouts/slideLayout22.xml><?xml version="1.0" encoding="utf-8"?>
+<file path=ppt/slideLayouts/slideLayout21.xml><?xml version="1.0" encoding="utf-8"?>
 <p:sldLayout xmlns:a="http://schemas.openxmlformats.org/drawingml/2006/main" xmlns:r="http://schemas.openxmlformats.org/officeDocument/2006/relationships" xmlns:p="http://schemas.openxmlformats.org/presentationml/2006/main" type="blank" preserve="1">
   <p:cSld name="slidekit · Pull Quote">
     <p:bg>
@@ -7884,8 +7414,8 @@
         </p:nvSpPr>
         <p:spPr>
           <a:xfrm>
-            <a:off x="457200" y="2301240"/>
-            <a:ext cx="128016" cy="2255520"/>
+            <a:off x="457200" y="2621280"/>
+            <a:ext cx="128016" cy="1615440"/>
           </a:xfrm>
           <a:prstGeom prst="rect">
             <a:avLst/>
@@ -7916,16 +7446,16 @@
         </p:nvSpPr>
         <p:spPr>
           <a:xfrm>
-            <a:off x="996696" y="2301240"/>
-            <a:ext cx="10738104" cy="1371600"/>
-          </a:xfrm>
-          <a:prstGeom prst="rect">
-            <a:avLst/>
-          </a:prstGeom>
-          <a:noFill/>
-        </p:spPr>
-        <p:txBody>
-          <a:bodyPr wrap="square" lIns="0" rIns="0">
+            <a:off x="996696" y="2621280"/>
+            <a:ext cx="11195304" cy="731520"/>
+          </a:xfrm>
+          <a:prstGeom prst="rect">
+            <a:avLst/>
+          </a:prstGeom>
+          <a:noFill/>
+        </p:spPr>
+        <p:txBody>
+          <a:bodyPr wrap="none" lIns="0" rIns="0">
             <a:noAutofit/>
           </a:bodyPr>
           <a:lstStyle/>
@@ -7938,7 +7468,7 @@
                 </a:solidFill>
                 <a:latin typeface="Arial"/>
               </a:rPr>
-              <a:t>"We stopped buying tools and started buying outcomes."</a:t>
+              <a:t>"We buy outcomes, not tools."</a:t>
             </a:r>
           </a:p>
         </p:txBody>
@@ -7953,7 +7483,7 @@
         </p:nvSpPr>
         <p:spPr>
           <a:xfrm>
-            <a:off x="996696" y="3947160"/>
+            <a:off x="996696" y="3627120"/>
             <a:ext cx="11195304" cy="609600"/>
           </a:xfrm>
           <a:prstGeom prst="rect">
@@ -7971,7 +7501,7 @@
             <a:r>
               <a:rPr sz="3400" b="0" i="0">
                 <a:solidFill>
-                  <a:srgbClr val="5B6B82"/>
+                  <a:srgbClr val="0A2240"/>
                 </a:solidFill>
                 <a:latin typeface="Arial"/>
               </a:rPr>
@@ -7993,7 +7523,7 @@
 </p:sldLayout>
 </file>
 
-<file path=ppt/slideLayouts/slideLayout23.xml><?xml version="1.0" encoding="utf-8"?>
+<file path=ppt/slideLayouts/slideLayout22.xml><?xml version="1.0" encoding="utf-8"?>
 <p:sldLayout xmlns:a="http://schemas.openxmlformats.org/drawingml/2006/main" xmlns:r="http://schemas.openxmlformats.org/officeDocument/2006/relationships" xmlns:p="http://schemas.openxmlformats.org/presentationml/2006/main" type="blank" preserve="1">
   <p:cSld name="slidekit · Definition">
     <p:bg>
@@ -8056,8 +7586,8 @@
         </p:nvSpPr>
         <p:spPr>
           <a:xfrm>
-            <a:off x="457200" y="1965960"/>
-            <a:ext cx="128016" cy="2926080"/>
+            <a:off x="457200" y="2484120"/>
+            <a:ext cx="128016" cy="1889760"/>
           </a:xfrm>
           <a:prstGeom prst="rect">
             <a:avLst/>
@@ -8088,7 +7618,7 @@
         </p:nvSpPr>
         <p:spPr>
           <a:xfrm>
-            <a:off x="996696" y="1965960"/>
+            <a:off x="996696" y="2484120"/>
             <a:ext cx="11195304" cy="1005840"/>
           </a:xfrm>
           <a:prstGeom prst="rect">
@@ -8125,16 +7655,16 @@
         </p:nvSpPr>
         <p:spPr>
           <a:xfrm>
-            <a:off x="996696" y="3246120"/>
-            <a:ext cx="10738104" cy="1645920"/>
-          </a:xfrm>
-          <a:prstGeom prst="rect">
-            <a:avLst/>
-          </a:prstGeom>
-          <a:noFill/>
-        </p:spPr>
-        <p:txBody>
-          <a:bodyPr wrap="square" lIns="0" rIns="0">
+            <a:off x="996696" y="3764280"/>
+            <a:ext cx="11195304" cy="609600"/>
+          </a:xfrm>
+          <a:prstGeom prst="rect">
+            <a:avLst/>
+          </a:prstGeom>
+          <a:noFill/>
+        </p:spPr>
+        <p:txBody>
+          <a:bodyPr wrap="none" lIns="0" rIns="0">
             <a:noAutofit/>
           </a:bodyPr>
           <a:lstStyle/>
@@ -8147,7 +7677,7 @@
                 </a:solidFill>
                 <a:latin typeface="Arial"/>
               </a:rPr>
-              <a:t>The percentage of recurring revenue retained from existing customers over a period, including expansion and after churn.</a:t>
+              <a:t>Revenue kept from existing customers.</a:t>
             </a:r>
           </a:p>
         </p:txBody>
@@ -8165,7 +7695,7 @@
 </p:sldLayout>
 </file>
 
-<file path=ppt/slideLayouts/slideLayout24.xml><?xml version="1.0" encoding="utf-8"?>
+<file path=ppt/slideLayouts/slideLayout23.xml><?xml version="1.0" encoding="utf-8"?>
 <p:sldLayout xmlns:a="http://schemas.openxmlformats.org/drawingml/2006/main" xmlns:r="http://schemas.openxmlformats.org/officeDocument/2006/relationships" xmlns:p="http://schemas.openxmlformats.org/presentationml/2006/main" type="blank" preserve="1">
   <p:cSld name="slidekit · Question">
     <p:bg>
@@ -8228,8 +7758,8 @@
         </p:nvSpPr>
         <p:spPr>
           <a:xfrm>
-            <a:off x="457200" y="2011680"/>
-            <a:ext cx="128016" cy="2834640"/>
+            <a:off x="457200" y="2926080"/>
+            <a:ext cx="128016" cy="1005840"/>
           </a:xfrm>
           <a:prstGeom prst="rect">
             <a:avLst/>
@@ -8260,16 +7790,16 @@
         </p:nvSpPr>
         <p:spPr>
           <a:xfrm>
-            <a:off x="996696" y="2011680"/>
-            <a:ext cx="10738104" cy="2834640"/>
-          </a:xfrm>
-          <a:prstGeom prst="rect">
-            <a:avLst/>
-          </a:prstGeom>
-          <a:noFill/>
-        </p:spPr>
-        <p:txBody>
-          <a:bodyPr wrap="square" lIns="0" rIns="0">
+            <a:off x="996696" y="2926080"/>
+            <a:ext cx="11195304" cy="1005840"/>
+          </a:xfrm>
+          <a:prstGeom prst="rect">
+            <a:avLst/>
+          </a:prstGeom>
+          <a:noFill/>
+        </p:spPr>
+        <p:txBody>
+          <a:bodyPr wrap="none" lIns="0" rIns="0">
             <a:noAutofit/>
           </a:bodyPr>
           <a:lstStyle/>
@@ -8282,7 +7812,7 @@
                 </a:solidFill>
                 <a:latin typeface="Arial"/>
               </a:rPr>
-              <a:t>What would we build if we trusted our customers completely?</a:t>
+              <a:t>What if we trusted users?</a:t>
             </a:r>
           </a:p>
         </p:txBody>
@@ -8300,7 +7830,7 @@
 </p:sldLayout>
 </file>
 
-<file path=ppt/slideLayouts/slideLayout25.xml><?xml version="1.0" encoding="utf-8"?>
+<file path=ppt/slideLayouts/slideLayout24.xml><?xml version="1.0" encoding="utf-8"?>
 <p:sldLayout xmlns:a="http://schemas.openxmlformats.org/drawingml/2006/main" xmlns:r="http://schemas.openxmlformats.org/officeDocument/2006/relationships" xmlns:p="http://schemas.openxmlformats.org/presentationml/2006/main" type="blank" preserve="1">
   <p:cSld name="slidekit · Bullet List">
     <p:bg>
@@ -8514,7 +8044,7 @@
 </p:sldLayout>
 </file>
 
-<file path=ppt/slideLayouts/slideLayout26.xml><?xml version="1.0" encoding="utf-8"?>
+<file path=ppt/slideLayouts/slideLayout25.xml><?xml version="1.0" encoding="utf-8"?>
 <p:sldLayout xmlns:a="http://schemas.openxmlformats.org/drawingml/2006/main" xmlns:r="http://schemas.openxmlformats.org/officeDocument/2006/relationships" xmlns:p="http://schemas.openxmlformats.org/presentationml/2006/main" type="blank" preserve="1">
   <p:cSld name="slidekit · Code Block">
     <p:bg>
@@ -8584,7 +8114,7 @@
             <a:avLst/>
           </a:prstGeom>
           <a:solidFill>
-            <a:srgbClr val="FF5F56"/>
+            <a:srgbClr val="FFFFFF"/>
           </a:solidFill>
           <a:ln>
             <a:noFill/>
@@ -8616,7 +8146,7 @@
             <a:avLst/>
           </a:prstGeom>
           <a:solidFill>
-            <a:srgbClr val="FFBD2E"/>
+            <a:srgbClr val="FFFFFF"/>
           </a:solidFill>
           <a:ln>
             <a:noFill/>
@@ -8648,7 +8178,7 @@
             <a:avLst/>
           </a:prstGeom>
           <a:solidFill>
-            <a:srgbClr val="27C93F"/>
+            <a:srgbClr val="FFFFFF"/>
           </a:solidFill>
           <a:ln>
             <a:noFill/>
@@ -8691,7 +8221,7 @@
             <a:r>
               <a:rPr sz="4200" b="0" i="0">
                 <a:solidFill>
-                  <a:srgbClr val="D4D4D4"/>
+                  <a:srgbClr val="FFFFFF"/>
                 </a:solidFill>
                 <a:latin typeface="Arial"/>
               </a:rPr>
@@ -8728,7 +8258,7 @@
             <a:r>
               <a:rPr sz="3400" b="0" i="0">
                 <a:solidFill>
-                  <a:srgbClr val="6A9955"/>
+                  <a:srgbClr val="FFFFFF"/>
                 </a:solidFill>
                 <a:latin typeface="Arial"/>
               </a:rPr>
@@ -8785,7 +8315,7 @@
         <p:spPr>
           <a:xfrm>
             <a:off x="1057461" y="2356103"/>
-            <a:ext cx="302848" cy="518159"/>
+            <a:ext cx="2524382" cy="518159"/>
           </a:xfrm>
           <a:prstGeom prst="rect">
             <a:avLst/>
@@ -8802,11 +8332,11 @@
             <a:r>
               <a:rPr sz="3400" b="0" i="0">
                 <a:solidFill>
-                  <a:srgbClr val="D4D4D4"/>
-                </a:solidFill>
-                <a:latin typeface="Arial"/>
-              </a:rPr>
-              <a:t> </a:t>
+                  <a:srgbClr val="FFFFFF"/>
+                </a:solidFill>
+                <a:latin typeface="Arial"/>
+              </a:rPr>
+              <a:t> main():</a:t>
             </a:r>
           </a:p>
         </p:txBody>
@@ -8821,8 +8351,8 @@
         </p:nvSpPr>
         <p:spPr>
           <a:xfrm>
-            <a:off x="1177429" y="2356103"/>
-            <a:ext cx="1680348" cy="518159"/>
+            <a:off x="457200" y="2874262"/>
+            <a:ext cx="7046475" cy="518159"/>
           </a:xfrm>
           <a:prstGeom prst="rect">
             <a:avLst/>
@@ -8839,11 +8369,11 @@
             <a:r>
               <a:rPr sz="3400" b="0" i="0">
                 <a:solidFill>
-                  <a:srgbClr val="DCDCAA"/>
-                </a:solidFill>
-                <a:latin typeface="Arial"/>
-              </a:rPr>
-              <a:t>main</a:t>
+                  <a:srgbClr val="FFFFFF"/>
+                </a:solidFill>
+                <a:latin typeface="Arial"/>
+              </a:rPr>
+              <a:t>    print("Hello, world!")</a:t>
             </a:r>
           </a:p>
         </p:txBody>
@@ -8858,8 +8388,8 @@
         </p:nvSpPr>
         <p:spPr>
           <a:xfrm>
-            <a:off x="2113347" y="2356103"/>
-            <a:ext cx="834964" cy="518159"/>
+            <a:off x="457200" y="3910580"/>
+            <a:ext cx="2140486" cy="518159"/>
           </a:xfrm>
           <a:prstGeom prst="rect">
             <a:avLst/>
@@ -8876,11 +8406,11 @@
             <a:r>
               <a:rPr sz="3400" b="0" i="0">
                 <a:solidFill>
-                  <a:srgbClr val="D4D4D4"/>
-                </a:solidFill>
-                <a:latin typeface="Arial"/>
-              </a:rPr>
-              <a:t>():</a:t>
+                  <a:srgbClr val="FFFFFF"/>
+                </a:solidFill>
+                <a:latin typeface="Arial"/>
+              </a:rPr>
+              <a:t>main()</a:t>
             </a:r>
           </a:p>
         </p:txBody>
@@ -8891,265 +8421,6 @@
           <p:cNvSpPr/>
           <p:nvPr>
             <p:ph type="body" idx="13"/>
-          </p:nvPr>
-        </p:nvSpPr>
-        <p:spPr>
-          <a:xfrm>
-            <a:off x="457200" y="2874262"/>
-            <a:ext cx="662751" cy="518159"/>
-          </a:xfrm>
-          <a:prstGeom prst="rect">
-            <a:avLst/>
-          </a:prstGeom>
-          <a:noFill/>
-        </p:spPr>
-        <p:txBody>
-          <a:bodyPr wrap="none" lIns="0" rIns="0">
-            <a:noAutofit/>
-          </a:bodyPr>
-          <a:lstStyle/>
-          <a:p>
-            <a:pPr algn="l"/>
-            <a:r>
-              <a:rPr sz="3400" b="0" i="0">
-                <a:solidFill>
-                  <a:srgbClr val="D4D4D4"/>
-                </a:solidFill>
-                <a:latin typeface="Arial"/>
-              </a:rPr>
-              <a:t>    </a:t>
-            </a:r>
-          </a:p>
-        </p:txBody>
-      </p:sp>
-      <p:sp>
-        <p:nvSpPr>
-          <p:cNvPr id="15" name="TextBox 14"/>
-          <p:cNvSpPr/>
-          <p:nvPr>
-            <p:ph type="body" idx="14"/>
-          </p:nvPr>
-        </p:nvSpPr>
-        <p:spPr>
-          <a:xfrm>
-            <a:off x="937071" y="2874262"/>
-            <a:ext cx="1526857" cy="518159"/>
-          </a:xfrm>
-          <a:prstGeom prst="rect">
-            <a:avLst/>
-          </a:prstGeom>
-          <a:noFill/>
-        </p:spPr>
-        <p:txBody>
-          <a:bodyPr wrap="none" lIns="0" rIns="0">
-            <a:noAutofit/>
-          </a:bodyPr>
-          <a:lstStyle/>
-          <a:p>
-            <a:pPr algn="l"/>
-            <a:r>
-              <a:rPr sz="3400" b="0" i="0">
-                <a:solidFill>
-                  <a:srgbClr val="DCDCAA"/>
-                </a:solidFill>
-                <a:latin typeface="Arial"/>
-              </a:rPr>
-              <a:t>print</a:t>
-            </a:r>
-          </a:p>
-        </p:txBody>
-      </p:sp>
-      <p:sp>
-        <p:nvSpPr>
-          <p:cNvPr id="16" name="TextBox 15"/>
-          <p:cNvSpPr/>
-          <p:nvPr>
-            <p:ph type="body" idx="15"/>
-          </p:nvPr>
-        </p:nvSpPr>
-        <p:spPr>
-          <a:xfrm>
-            <a:off x="1777057" y="2874262"/>
-            <a:ext cx="412948" cy="518159"/>
-          </a:xfrm>
-          <a:prstGeom prst="rect">
-            <a:avLst/>
-          </a:prstGeom>
-          <a:noFill/>
-        </p:spPr>
-        <p:txBody>
-          <a:bodyPr wrap="none" lIns="0" rIns="0">
-            <a:noAutofit/>
-          </a:bodyPr>
-          <a:lstStyle/>
-          <a:p>
-            <a:pPr algn="l"/>
-            <a:r>
-              <a:rPr sz="3400" b="0" i="0">
-                <a:solidFill>
-                  <a:srgbClr val="D4D4D4"/>
-                </a:solidFill>
-                <a:latin typeface="Arial"/>
-              </a:rPr>
-              <a:t>(</a:t>
-            </a:r>
-          </a:p>
-        </p:txBody>
-      </p:sp>
-      <p:sp>
-        <p:nvSpPr>
-          <p:cNvPr id="17" name="TextBox 16"/>
-          <p:cNvSpPr/>
-          <p:nvPr>
-            <p:ph type="body" idx="16"/>
-          </p:nvPr>
-        </p:nvSpPr>
-        <p:spPr>
-          <a:xfrm>
-            <a:off x="1920850" y="2874262"/>
-            <a:ext cx="4474566" cy="518159"/>
-          </a:xfrm>
-          <a:prstGeom prst="rect">
-            <a:avLst/>
-          </a:prstGeom>
-          <a:noFill/>
-        </p:spPr>
-        <p:txBody>
-          <a:bodyPr wrap="none" lIns="0" rIns="0">
-            <a:noAutofit/>
-          </a:bodyPr>
-          <a:lstStyle/>
-          <a:p>
-            <a:pPr algn="l"/>
-            <a:r>
-              <a:rPr sz="3400" b="0" i="0">
-                <a:solidFill>
-                  <a:srgbClr val="CE9178"/>
-                </a:solidFill>
-                <a:latin typeface="Arial"/>
-              </a:rPr>
-              <a:t>"Hello, world!"</a:t>
-            </a:r>
-          </a:p>
-        </p:txBody>
-      </p:sp>
-      <p:sp>
-        <p:nvSpPr>
-          <p:cNvPr id="18" name="TextBox 17"/>
-          <p:cNvSpPr/>
-          <p:nvPr>
-            <p:ph type="body" idx="17"/>
-          </p:nvPr>
-        </p:nvSpPr>
-        <p:spPr>
-          <a:xfrm>
-            <a:off x="4603155" y="2874262"/>
-            <a:ext cx="412948" cy="518159"/>
-          </a:xfrm>
-          <a:prstGeom prst="rect">
-            <a:avLst/>
-          </a:prstGeom>
-          <a:noFill/>
-        </p:spPr>
-        <p:txBody>
-          <a:bodyPr wrap="none" lIns="0" rIns="0">
-            <a:noAutofit/>
-          </a:bodyPr>
-          <a:lstStyle/>
-          <a:p>
-            <a:pPr algn="l"/>
-            <a:r>
-              <a:rPr sz="3400" b="0" i="0">
-                <a:solidFill>
-                  <a:srgbClr val="D4D4D4"/>
-                </a:solidFill>
-                <a:latin typeface="Arial"/>
-              </a:rPr>
-              <a:t>)</a:t>
-            </a:r>
-          </a:p>
-        </p:txBody>
-      </p:sp>
-      <p:sp>
-        <p:nvSpPr>
-          <p:cNvPr id="19" name="TextBox 18"/>
-          <p:cNvSpPr/>
-          <p:nvPr>
-            <p:ph type="body" idx="18"/>
-          </p:nvPr>
-        </p:nvSpPr>
-        <p:spPr>
-          <a:xfrm>
-            <a:off x="457200" y="3910580"/>
-            <a:ext cx="1680348" cy="518159"/>
-          </a:xfrm>
-          <a:prstGeom prst="rect">
-            <a:avLst/>
-          </a:prstGeom>
-          <a:noFill/>
-        </p:spPr>
-        <p:txBody>
-          <a:bodyPr wrap="none" lIns="0" rIns="0">
-            <a:noAutofit/>
-          </a:bodyPr>
-          <a:lstStyle/>
-          <a:p>
-            <a:pPr algn="l"/>
-            <a:r>
-              <a:rPr sz="3400" b="0" i="0">
-                <a:solidFill>
-                  <a:srgbClr val="DCDCAA"/>
-                </a:solidFill>
-                <a:latin typeface="Arial"/>
-              </a:rPr>
-              <a:t>main</a:t>
-            </a:r>
-          </a:p>
-        </p:txBody>
-      </p:sp>
-      <p:sp>
-        <p:nvSpPr>
-          <p:cNvPr id="20" name="TextBox 19"/>
-          <p:cNvSpPr/>
-          <p:nvPr>
-            <p:ph type="body" idx="19"/>
-          </p:nvPr>
-        </p:nvSpPr>
-        <p:spPr>
-          <a:xfrm>
-            <a:off x="1393118" y="3910580"/>
-            <a:ext cx="643017" cy="518159"/>
-          </a:xfrm>
-          <a:prstGeom prst="rect">
-            <a:avLst/>
-          </a:prstGeom>
-          <a:noFill/>
-        </p:spPr>
-        <p:txBody>
-          <a:bodyPr wrap="none" lIns="0" rIns="0">
-            <a:noAutofit/>
-          </a:bodyPr>
-          <a:lstStyle/>
-          <a:p>
-            <a:pPr algn="l"/>
-            <a:r>
-              <a:rPr sz="3400" b="0" i="0">
-                <a:solidFill>
-                  <a:srgbClr val="D4D4D4"/>
-                </a:solidFill>
-                <a:latin typeface="Arial"/>
-              </a:rPr>
-              <a:t>()</a:t>
-            </a:r>
-          </a:p>
-        </p:txBody>
-      </p:sp>
-      <p:sp>
-        <p:nvSpPr>
-          <p:cNvPr id="21" name="TextBox 20"/>
-          <p:cNvSpPr/>
-          <p:nvPr>
-            <p:ph type="body" idx="20"/>
           </p:nvPr>
         </p:nvSpPr>
         <p:spPr>
@@ -9172,7 +8443,7 @@
             <a:r>
               <a:rPr sz="3400" b="0" i="0">
                 <a:solidFill>
-                  <a:srgbClr val="4EC9B0"/>
+                  <a:srgbClr val="569CD6"/>
                 </a:solidFill>
                 <a:latin typeface="Arial"/>
               </a:rPr>
@@ -9183,10 +8454,10 @@
       </p:sp>
       <p:sp>
         <p:nvSpPr>
-          <p:cNvPr id="22" name="TextBox 21"/>
-          <p:cNvSpPr/>
-          <p:nvPr>
-            <p:ph type="body" idx="21"/>
+          <p:cNvPr id="15" name="TextBox 14"/>
+          <p:cNvSpPr/>
+          <p:nvPr>
+            <p:ph type="body" idx="14"/>
           </p:nvPr>
         </p:nvSpPr>
         <p:spPr>
@@ -9209,7 +8480,7 @@
             <a:r>
               <a:rPr sz="3400" b="0" i="0">
                 <a:solidFill>
-                  <a:srgbClr val="D4D4D4"/>
+                  <a:srgbClr val="FFFFFF"/>
                 </a:solidFill>
                 <a:latin typeface="Arial"/>
               </a:rPr>
@@ -9220,10 +8491,10 @@
       </p:sp>
       <p:sp>
         <p:nvSpPr>
-          <p:cNvPr id="23" name="TextBox 22"/>
-          <p:cNvSpPr/>
-          <p:nvPr>
-            <p:ph type="body" idx="22"/>
+          <p:cNvPr id="16" name="TextBox 15"/>
+          <p:cNvSpPr/>
+          <p:nvPr>
+            <p:ph type="body" idx="15"/>
           </p:nvPr>
         </p:nvSpPr>
         <p:spPr>
@@ -9246,7 +8517,7 @@
             <a:r>
               <a:rPr sz="3400" b="0" i="0">
                 <a:solidFill>
-                  <a:srgbClr val="D4D4D4"/>
+                  <a:srgbClr val="FFFFFF"/>
                 </a:solidFill>
                 <a:latin typeface="Arial"/>
               </a:rPr>
@@ -9268,7 +8539,7 @@
 </p:sldLayout>
 </file>
 
-<file path=ppt/slideLayouts/slideLayout27.xml><?xml version="1.0" encoding="utf-8"?>
+<file path=ppt/slideLayouts/slideLayout26.xml><?xml version="1.0" encoding="utf-8"?>
 <p:sldLayout xmlns:a="http://schemas.openxmlformats.org/drawingml/2006/main" xmlns:r="http://schemas.openxmlformats.org/officeDocument/2006/relationships" xmlns:p="http://schemas.openxmlformats.org/presentationml/2006/main" type="blank" preserve="1">
   <p:cSld name="slidekit · File Tree">
     <p:bg>
@@ -9377,7 +8648,7 @@
             </a:avLst>
           </a:prstGeom>
           <a:solidFill>
-            <a:srgbClr val="0C1A1C"/>
+            <a:srgbClr val="0A2240"/>
           </a:solidFill>
           <a:ln>
             <a:noFill/>
@@ -9420,7 +8691,7 @@
             <a:r>
               <a:rPr sz="2600" b="1" i="0">
                 <a:solidFill>
-                  <a:srgbClr val="569CD6"/>
+                  <a:srgbClr val="0072CE"/>
                 </a:solidFill>
                 <a:latin typeface="Courier New"/>
               </a:rPr>
@@ -9457,7 +8728,7 @@
             <a:r>
               <a:rPr sz="2600" b="0" i="0">
                 <a:solidFill>
-                  <a:srgbClr val="55707A"/>
+                  <a:srgbClr val="0072CE"/>
                 </a:solidFill>
                 <a:latin typeface="Courier New"/>
               </a:rPr>
@@ -9494,7 +8765,7 @@
             <a:r>
               <a:rPr sz="2600" b="1" i="0">
                 <a:solidFill>
-                  <a:srgbClr val="569CD6"/>
+                  <a:srgbClr val="0072CE"/>
                 </a:solidFill>
                 <a:latin typeface="Courier New"/>
               </a:rPr>
@@ -9531,7 +8802,7 @@
             <a:r>
               <a:rPr sz="2600" b="0" i="0">
                 <a:solidFill>
-                  <a:srgbClr val="55707A"/>
+                  <a:srgbClr val="0072CE"/>
                 </a:solidFill>
                 <a:latin typeface="Courier New"/>
               </a:rPr>
@@ -9568,7 +8839,7 @@
             <a:r>
               <a:rPr sz="2600" b="1" i="0">
                 <a:solidFill>
-                  <a:srgbClr val="569CD6"/>
+                  <a:srgbClr val="0072CE"/>
                 </a:solidFill>
                 <a:latin typeface="Courier New"/>
               </a:rPr>
@@ -9605,7 +8876,7 @@
             <a:r>
               <a:rPr sz="2600" b="0" i="0">
                 <a:solidFill>
-                  <a:srgbClr val="55707A"/>
+                  <a:srgbClr val="0072CE"/>
                 </a:solidFill>
                 <a:latin typeface="Courier New"/>
               </a:rPr>
@@ -9642,7 +8913,7 @@
             <a:r>
               <a:rPr sz="2600" b="0" i="0">
                 <a:solidFill>
-                  <a:srgbClr val="D4D4D4"/>
+                  <a:srgbClr val="FFFFFF"/>
                 </a:solidFill>
                 <a:latin typeface="Courier New"/>
               </a:rPr>
@@ -9679,7 +8950,7 @@
             <a:r>
               <a:rPr sz="2600" b="0" i="0">
                 <a:solidFill>
-                  <a:srgbClr val="55707A"/>
+                  <a:srgbClr val="0072CE"/>
                 </a:solidFill>
                 <a:latin typeface="Courier New"/>
               </a:rPr>
@@ -9716,7 +8987,7 @@
             <a:r>
               <a:rPr sz="2600" b="0" i="0">
                 <a:solidFill>
-                  <a:srgbClr val="D4D4D4"/>
+                  <a:srgbClr val="FFFFFF"/>
                 </a:solidFill>
                 <a:latin typeface="Courier New"/>
               </a:rPr>
@@ -9753,7 +9024,7 @@
             <a:r>
               <a:rPr sz="2600" b="0" i="0">
                 <a:solidFill>
-                  <a:srgbClr val="55707A"/>
+                  <a:srgbClr val="0072CE"/>
                 </a:solidFill>
                 <a:latin typeface="Courier New"/>
               </a:rPr>
@@ -9790,7 +9061,7 @@
             <a:r>
               <a:rPr sz="2600" b="0" i="0">
                 <a:solidFill>
-                  <a:srgbClr val="D4D4D4"/>
+                  <a:srgbClr val="FFFFFF"/>
                 </a:solidFill>
                 <a:latin typeface="Courier New"/>
               </a:rPr>
@@ -9827,7 +9098,7 @@
             <a:r>
               <a:rPr sz="2600" b="0" i="0">
                 <a:solidFill>
-                  <a:srgbClr val="55707A"/>
+                  <a:srgbClr val="0072CE"/>
                 </a:solidFill>
                 <a:latin typeface="Courier New"/>
               </a:rPr>
@@ -9864,7 +9135,7 @@
             <a:r>
               <a:rPr sz="2600" b="0" i="0">
                 <a:solidFill>
-                  <a:srgbClr val="D4D4D4"/>
+                  <a:srgbClr val="FFFFFF"/>
                 </a:solidFill>
                 <a:latin typeface="Courier New"/>
               </a:rPr>
@@ -9901,7 +9172,7 @@
             <a:r>
               <a:rPr sz="2600" b="0" i="0">
                 <a:solidFill>
-                  <a:srgbClr val="55707A"/>
+                  <a:srgbClr val="0072CE"/>
                 </a:solidFill>
                 <a:latin typeface="Courier New"/>
               </a:rPr>
@@ -9938,7 +9209,7 @@
             <a:r>
               <a:rPr sz="2600" b="0" i="0">
                 <a:solidFill>
-                  <a:srgbClr val="D4D4D4"/>
+                  <a:srgbClr val="FFFFFF"/>
                 </a:solidFill>
                 <a:latin typeface="Courier New"/>
               </a:rPr>
@@ -9960,7 +9231,7 @@
 </p:sldLayout>
 </file>
 
-<file path=ppt/slideLayouts/slideLayout28.xml><?xml version="1.0" encoding="utf-8"?>
+<file path=ppt/slideLayouts/slideLayout27.xml><?xml version="1.0" encoding="utf-8"?>
 <p:sldLayout xmlns:a="http://schemas.openxmlformats.org/drawingml/2006/main" xmlns:r="http://schemas.openxmlformats.org/officeDocument/2006/relationships" xmlns:p="http://schemas.openxmlformats.org/presentationml/2006/main" type="blank" preserve="1">
   <p:cSld name="slidekit · Numbered Steps">
     <p:bg>
@@ -10078,7 +9349,7 @@
             <a:r>
               <a:rPr sz="4200" b="1" i="0">
                 <a:solidFill>
-                  <a:srgbClr val="123A6B"/>
+                  <a:srgbClr val="0072CE"/>
                 </a:solidFill>
                 <a:latin typeface="Arial"/>
               </a:rPr>
@@ -10115,7 +9386,7 @@
             <a:r>
               <a:rPr sz="4200" b="1" i="0">
                 <a:solidFill>
-                  <a:srgbClr val="123A6B"/>
+                  <a:srgbClr val="0072CE"/>
                 </a:solidFill>
                 <a:latin typeface="Arial"/>
               </a:rPr>
@@ -10189,7 +9460,7 @@
             <a:r>
               <a:rPr sz="4200" b="1" i="0">
                 <a:solidFill>
-                  <a:srgbClr val="123A6B"/>
+                  <a:srgbClr val="0072CE"/>
                 </a:solidFill>
                 <a:latin typeface="Arial"/>
               </a:rPr>
@@ -10226,7 +9497,7 @@
             <a:r>
               <a:rPr sz="4200" b="1" i="0">
                 <a:solidFill>
-                  <a:srgbClr val="123A6B"/>
+                  <a:srgbClr val="0072CE"/>
                 </a:solidFill>
                 <a:latin typeface="Arial"/>
               </a:rPr>
@@ -10300,7 +9571,7 @@
             <a:r>
               <a:rPr sz="4200" b="1" i="0">
                 <a:solidFill>
-                  <a:srgbClr val="123A6B"/>
+                  <a:srgbClr val="0072CE"/>
                 </a:solidFill>
                 <a:latin typeface="Arial"/>
               </a:rPr>
@@ -10337,7 +9608,7 @@
             <a:r>
               <a:rPr sz="4200" b="1" i="0">
                 <a:solidFill>
-                  <a:srgbClr val="123A6B"/>
+                  <a:srgbClr val="0072CE"/>
                 </a:solidFill>
                 <a:latin typeface="Arial"/>
               </a:rPr>
@@ -10396,7 +9667,7 @@
 </p:sldLayout>
 </file>
 
-<file path=ppt/slideLayouts/slideLayout29.xml><?xml version="1.0" encoding="utf-8"?>
+<file path=ppt/slideLayouts/slideLayout28.xml><?xml version="1.0" encoding="utf-8"?>
 <p:sldLayout xmlns:a="http://schemas.openxmlformats.org/drawingml/2006/main" xmlns:r="http://schemas.openxmlformats.org/officeDocument/2006/relationships" xmlns:p="http://schemas.openxmlformats.org/presentationml/2006/main" type="blank" preserve="1">
   <p:cSld name="slidekit · Two Panel List">
     <p:bg>
@@ -10514,7 +9785,7 @@
             <a:r>
               <a:rPr sz="3400" b="1" i="0">
                 <a:solidFill>
-                  <a:srgbClr val="123A6B"/>
+                  <a:srgbClr val="0072CE"/>
                 </a:solidFill>
                 <a:latin typeface="Arial"/>
               </a:rPr>
@@ -10533,14 +9804,14 @@
         </p:nvSpPr>
         <p:spPr>
           <a:xfrm>
-            <a:off x="548640" y="2176271"/>
-            <a:ext cx="1650492" cy="54864"/>
+            <a:off x="457200" y="2176271"/>
+            <a:ext cx="1367718" cy="54864"/>
           </a:xfrm>
           <a:prstGeom prst="rect">
             <a:avLst/>
           </a:prstGeom>
           <a:solidFill>
-            <a:srgbClr val="123A6B"/>
+            <a:srgbClr val="0072CE"/>
           </a:solidFill>
           <a:ln>
             <a:noFill/>
@@ -10583,7 +9854,7 @@
             <a:r>
               <a:rPr sz="3400" b="1" i="0">
                 <a:solidFill>
-                  <a:srgbClr val="5B6B82"/>
+                  <a:srgbClr val="0A2240"/>
                 </a:solidFill>
                 <a:latin typeface="Arial"/>
               </a:rPr>
@@ -10602,14 +9873,14 @@
         </p:nvSpPr>
         <p:spPr>
           <a:xfrm>
-            <a:off x="6324600" y="2176271"/>
-            <a:ext cx="1650492" cy="54864"/>
+            <a:off x="6233160" y="2176271"/>
+            <a:ext cx="1007604" cy="54864"/>
           </a:xfrm>
           <a:prstGeom prst="rect">
             <a:avLst/>
           </a:prstGeom>
           <a:solidFill>
-            <a:srgbClr val="5B6B82"/>
+            <a:srgbClr val="0A2240"/>
           </a:solidFill>
           <a:ln>
             <a:noFill/>
@@ -10842,6 +10113,294 @@
                 <a:latin typeface="Arial"/>
               </a:rPr>
               <a:t>In-product live chat</a:t>
+            </a:r>
+          </a:p>
+        </p:txBody>
+      </p:sp>
+    </p:spTree>
+    <p:extLst>
+      <p:ext uri="{BB962C8B-B14F-4D97-AF65-F5344CB8AC3E}">
+        <p14:creationId xmlns:p14="http://schemas.microsoft.com/office/powerpoint/2010/main" val="1212999818"/>
+      </p:ext>
+    </p:extLst>
+  </p:cSld>
+  <p:clrMapOvr>
+    <a:masterClrMapping/>
+  </p:clrMapOvr>
+</p:sldLayout>
+</file>
+
+<file path=ppt/slideLayouts/slideLayout29.xml><?xml version="1.0" encoding="utf-8"?>
+<p:sldLayout xmlns:a="http://schemas.openxmlformats.org/drawingml/2006/main" xmlns:r="http://schemas.openxmlformats.org/officeDocument/2006/relationships" xmlns:p="http://schemas.openxmlformats.org/presentationml/2006/main" type="blank" preserve="1">
+  <p:cSld name="slidekit · This vs That">
+    <p:bg>
+      <p:bgPr>
+        <a:solidFill>
+          <a:srgbClr val="FFFFFF"/>
+        </a:solidFill>
+        <a:effectLst/>
+      </p:bgPr>
+    </p:bg>
+    <p:spTree>
+      <p:nvGrpSpPr>
+        <p:cNvPr id="1" name=""/>
+        <p:cNvGrpSpPr/>
+        <p:nvPr/>
+      </p:nvGrpSpPr>
+      <p:grpSpPr>
+        <a:xfrm>
+          <a:off x="0" y="0"/>
+          <a:ext cx="0" cy="0"/>
+          <a:chOff x="0" y="0"/>
+          <a:chExt cx="0" cy="0"/>
+        </a:xfrm>
+      </p:grpSpPr>
+      <p:sp>
+        <p:nvSpPr>
+          <p:cNvPr id="4" name="Slide Number Placeholder 3"/>
+          <p:cNvSpPr>
+            <a:spLocks noGrp="1"/>
+          </p:cNvSpPr>
+          <p:nvPr>
+            <p:ph type="sldNum" sz="quarter" idx="12"/>
+          </p:nvPr>
+        </p:nvSpPr>
+        <p:spPr>
+          <a:xfrm>
+            <a:off x="11186160" y="6035040"/>
+            <a:ext cx="548640" cy="365760"/>
+          </a:xfrm>
+        </p:spPr>
+        <p:txBody>
+          <a:bodyPr/>
+          <a:lstStyle/>
+          <a:p>
+            <a:fld id="{C1FF6DA9-008F-8B48-92A6-B652298478BF}" type="slidenum">
+              <a:rPr lang="en-US" smtClean="0"/>
+              <a:t>‹#›</a:t>
+            </a:fld>
+            <a:endParaRPr lang="en-US"/>
+          </a:p>
+        </p:txBody>
+      </p:sp>
+      <p:sp>
+        <p:nvSpPr>
+          <p:cNvPr id="5" name="TextBox 4"/>
+          <p:cNvSpPr/>
+          <p:nvPr>
+            <p:ph type="title"/>
+          </p:nvPr>
+        </p:nvSpPr>
+        <p:spPr>
+          <a:xfrm>
+            <a:off x="457200" y="457200"/>
+            <a:ext cx="11277600" cy="768096"/>
+          </a:xfrm>
+          <a:prstGeom prst="rect">
+            <a:avLst/>
+          </a:prstGeom>
+          <a:noFill/>
+        </p:spPr>
+        <p:txBody>
+          <a:bodyPr wrap="none" lIns="0" rIns="0">
+            <a:noAutofit/>
+          </a:bodyPr>
+          <a:lstStyle/>
+          <a:p>
+            <a:pPr algn="l"/>
+            <a:r>
+              <a:rPr sz="4200" b="1" i="0">
+                <a:solidFill>
+                  <a:srgbClr val="0072CE"/>
+                </a:solidFill>
+                <a:latin typeface="Arial"/>
+              </a:rPr>
+              <a:t>Cloud or On-Prem</a:t>
+            </a:r>
+          </a:p>
+        </p:txBody>
+      </p:sp>
+      <p:sp>
+        <p:nvSpPr>
+          <p:cNvPr id="6" name="TextBox 5"/>
+          <p:cNvSpPr/>
+          <p:nvPr>
+            <p:ph type="body" idx="1"/>
+          </p:nvPr>
+        </p:nvSpPr>
+        <p:spPr>
+          <a:xfrm>
+            <a:off x="457200" y="2776728"/>
+            <a:ext cx="4792980" cy="914400"/>
+          </a:xfrm>
+          <a:prstGeom prst="rect">
+            <a:avLst/>
+          </a:prstGeom>
+          <a:noFill/>
+        </p:spPr>
+        <p:txBody>
+          <a:bodyPr wrap="none" lIns="0" rIns="0">
+            <a:noAutofit/>
+          </a:bodyPr>
+          <a:lstStyle/>
+          <a:p>
+            <a:pPr algn="ctr"/>
+            <a:r>
+              <a:rPr sz="6000" b="1" i="0">
+                <a:solidFill>
+                  <a:srgbClr val="0A2240"/>
+                </a:solidFill>
+                <a:latin typeface="Arial"/>
+              </a:rPr>
+              <a:t>3 wks</a:t>
+            </a:r>
+          </a:p>
+        </p:txBody>
+      </p:sp>
+      <p:sp>
+        <p:nvSpPr>
+          <p:cNvPr id="7" name="TextBox 6"/>
+          <p:cNvSpPr/>
+          <p:nvPr>
+            <p:ph type="body" idx="2"/>
+          </p:nvPr>
+        </p:nvSpPr>
+        <p:spPr>
+          <a:xfrm>
+            <a:off x="0" y="3965448"/>
+            <a:ext cx="5707380" cy="518159"/>
+          </a:xfrm>
+          <a:prstGeom prst="rect">
+            <a:avLst/>
+          </a:prstGeom>
+          <a:noFill/>
+        </p:spPr>
+        <p:txBody>
+          <a:bodyPr wrap="none" lIns="0" rIns="0">
+            <a:noAutofit/>
+          </a:bodyPr>
+          <a:lstStyle/>
+          <a:p>
+            <a:pPr algn="ctr"/>
+            <a:r>
+              <a:rPr sz="3400" b="0" i="0">
+                <a:solidFill>
+                  <a:srgbClr val="0A2240"/>
+                </a:solidFill>
+                <a:latin typeface="Arial"/>
+              </a:rPr>
+              <a:t>Cloud time-to-launch</a:t>
+            </a:r>
+          </a:p>
+        </p:txBody>
+      </p:sp>
+      <p:sp>
+        <p:nvSpPr>
+          <p:cNvPr id="8" name="TextBox 7"/>
+          <p:cNvSpPr/>
+          <p:nvPr>
+            <p:ph type="body" idx="3"/>
+          </p:nvPr>
+        </p:nvSpPr>
+        <p:spPr>
+          <a:xfrm>
+            <a:off x="6941820" y="2776728"/>
+            <a:ext cx="4792980" cy="914400"/>
+          </a:xfrm>
+          <a:prstGeom prst="rect">
+            <a:avLst/>
+          </a:prstGeom>
+          <a:noFill/>
+        </p:spPr>
+        <p:txBody>
+          <a:bodyPr wrap="none" lIns="0" rIns="0">
+            <a:noAutofit/>
+          </a:bodyPr>
+          <a:lstStyle/>
+          <a:p>
+            <a:pPr algn="ctr"/>
+            <a:r>
+              <a:rPr sz="6000" b="1" i="0">
+                <a:solidFill>
+                  <a:srgbClr val="0A2240"/>
+                </a:solidFill>
+                <a:latin typeface="Arial"/>
+              </a:rPr>
+              <a:t>6 mo</a:t>
+            </a:r>
+          </a:p>
+        </p:txBody>
+      </p:sp>
+      <p:sp>
+        <p:nvSpPr>
+          <p:cNvPr id="9" name="TextBox 8"/>
+          <p:cNvSpPr/>
+          <p:nvPr>
+            <p:ph type="body" idx="4"/>
+          </p:nvPr>
+        </p:nvSpPr>
+        <p:spPr>
+          <a:xfrm>
+            <a:off x="6484620" y="3965448"/>
+            <a:ext cx="5707380" cy="518159"/>
+          </a:xfrm>
+          <a:prstGeom prst="rect">
+            <a:avLst/>
+          </a:prstGeom>
+          <a:noFill/>
+        </p:spPr>
+        <p:txBody>
+          <a:bodyPr wrap="none" lIns="0" rIns="0">
+            <a:noAutofit/>
+          </a:bodyPr>
+          <a:lstStyle/>
+          <a:p>
+            <a:pPr algn="ctr"/>
+            <a:r>
+              <a:rPr sz="3400" b="0" i="0">
+                <a:solidFill>
+                  <a:srgbClr val="0A2240"/>
+                </a:solidFill>
+                <a:latin typeface="Arial"/>
+              </a:rPr>
+              <a:t>On-prem time-to-launch</a:t>
+            </a:r>
+          </a:p>
+        </p:txBody>
+      </p:sp>
+      <p:sp>
+        <p:nvSpPr>
+          <p:cNvPr id="10" name="TextBox 9"/>
+          <p:cNvSpPr/>
+          <p:nvPr>
+            <p:ph type="body" idx="5"/>
+          </p:nvPr>
+        </p:nvSpPr>
+        <p:spPr>
+          <a:xfrm>
+            <a:off x="5435323" y="3310127"/>
+            <a:ext cx="1321354" cy="640080"/>
+          </a:xfrm>
+          <a:prstGeom prst="rect">
+            <a:avLst/>
+          </a:prstGeom>
+          <a:noFill/>
+        </p:spPr>
+        <p:txBody>
+          <a:bodyPr wrap="none" lIns="0" rIns="0">
+            <a:noAutofit/>
+          </a:bodyPr>
+          <a:lstStyle/>
+          <a:p>
+            <a:pPr algn="ctr"/>
+            <a:r>
+              <a:rPr sz="4200" b="1" i="0">
+                <a:solidFill>
+                  <a:srgbClr val="0A2240"/>
+                </a:solidFill>
+                <a:latin typeface="Arial"/>
+              </a:rPr>
+              <a:t>VS</a:t>
             </a:r>
           </a:p>
         </p:txBody>
@@ -11107,294 +10666,6 @@
 
 <file path=ppt/slideLayouts/slideLayout30.xml><?xml version="1.0" encoding="utf-8"?>
 <p:sldLayout xmlns:a="http://schemas.openxmlformats.org/drawingml/2006/main" xmlns:r="http://schemas.openxmlformats.org/officeDocument/2006/relationships" xmlns:p="http://schemas.openxmlformats.org/presentationml/2006/main" type="blank" preserve="1">
-  <p:cSld name="slidekit · This vs That">
-    <p:bg>
-      <p:bgPr>
-        <a:solidFill>
-          <a:srgbClr val="FFFFFF"/>
-        </a:solidFill>
-        <a:effectLst/>
-      </p:bgPr>
-    </p:bg>
-    <p:spTree>
-      <p:nvGrpSpPr>
-        <p:cNvPr id="1" name=""/>
-        <p:cNvGrpSpPr/>
-        <p:nvPr/>
-      </p:nvGrpSpPr>
-      <p:grpSpPr>
-        <a:xfrm>
-          <a:off x="0" y="0"/>
-          <a:ext cx="0" cy="0"/>
-          <a:chOff x="0" y="0"/>
-          <a:chExt cx="0" cy="0"/>
-        </a:xfrm>
-      </p:grpSpPr>
-      <p:sp>
-        <p:nvSpPr>
-          <p:cNvPr id="4" name="Slide Number Placeholder 3"/>
-          <p:cNvSpPr>
-            <a:spLocks noGrp="1"/>
-          </p:cNvSpPr>
-          <p:nvPr>
-            <p:ph type="sldNum" sz="quarter" idx="12"/>
-          </p:nvPr>
-        </p:nvSpPr>
-        <p:spPr>
-          <a:xfrm>
-            <a:off x="11186160" y="6035040"/>
-            <a:ext cx="548640" cy="365760"/>
-          </a:xfrm>
-        </p:spPr>
-        <p:txBody>
-          <a:bodyPr/>
-          <a:lstStyle/>
-          <a:p>
-            <a:fld id="{C1FF6DA9-008F-8B48-92A6-B652298478BF}" type="slidenum">
-              <a:rPr lang="en-US" smtClean="0"/>
-              <a:t>‹#›</a:t>
-            </a:fld>
-            <a:endParaRPr lang="en-US"/>
-          </a:p>
-        </p:txBody>
-      </p:sp>
-      <p:sp>
-        <p:nvSpPr>
-          <p:cNvPr id="5" name="TextBox 4"/>
-          <p:cNvSpPr/>
-          <p:nvPr>
-            <p:ph type="title"/>
-          </p:nvPr>
-        </p:nvSpPr>
-        <p:spPr>
-          <a:xfrm>
-            <a:off x="457200" y="457200"/>
-            <a:ext cx="11277600" cy="768096"/>
-          </a:xfrm>
-          <a:prstGeom prst="rect">
-            <a:avLst/>
-          </a:prstGeom>
-          <a:noFill/>
-        </p:spPr>
-        <p:txBody>
-          <a:bodyPr wrap="none" lIns="0" rIns="0">
-            <a:noAutofit/>
-          </a:bodyPr>
-          <a:lstStyle/>
-          <a:p>
-            <a:pPr algn="l"/>
-            <a:r>
-              <a:rPr sz="4200" b="1" i="0">
-                <a:solidFill>
-                  <a:srgbClr val="0072CE"/>
-                </a:solidFill>
-                <a:latin typeface="Arial"/>
-              </a:rPr>
-              <a:t>Cloud or On-Prem</a:t>
-            </a:r>
-          </a:p>
-        </p:txBody>
-      </p:sp>
-      <p:sp>
-        <p:nvSpPr>
-          <p:cNvPr id="6" name="TextBox 5"/>
-          <p:cNvSpPr/>
-          <p:nvPr>
-            <p:ph type="body" idx="1"/>
-          </p:nvPr>
-        </p:nvSpPr>
-        <p:spPr>
-          <a:xfrm>
-            <a:off x="457200" y="2776728"/>
-            <a:ext cx="4792980" cy="914400"/>
-          </a:xfrm>
-          <a:prstGeom prst="rect">
-            <a:avLst/>
-          </a:prstGeom>
-          <a:noFill/>
-        </p:spPr>
-        <p:txBody>
-          <a:bodyPr wrap="none" lIns="0" rIns="0">
-            <a:noAutofit/>
-          </a:bodyPr>
-          <a:lstStyle/>
-          <a:p>
-            <a:pPr algn="ctr"/>
-            <a:r>
-              <a:rPr sz="6000" b="1" i="0">
-                <a:solidFill>
-                  <a:srgbClr val="0A2240"/>
-                </a:solidFill>
-                <a:latin typeface="Arial"/>
-              </a:rPr>
-              <a:t>3 wks</a:t>
-            </a:r>
-          </a:p>
-        </p:txBody>
-      </p:sp>
-      <p:sp>
-        <p:nvSpPr>
-          <p:cNvPr id="7" name="TextBox 6"/>
-          <p:cNvSpPr/>
-          <p:nvPr>
-            <p:ph type="body" idx="2"/>
-          </p:nvPr>
-        </p:nvSpPr>
-        <p:spPr>
-          <a:xfrm>
-            <a:off x="0" y="3965448"/>
-            <a:ext cx="5707380" cy="518159"/>
-          </a:xfrm>
-          <a:prstGeom prst="rect">
-            <a:avLst/>
-          </a:prstGeom>
-          <a:noFill/>
-        </p:spPr>
-        <p:txBody>
-          <a:bodyPr wrap="none" lIns="0" rIns="0">
-            <a:noAutofit/>
-          </a:bodyPr>
-          <a:lstStyle/>
-          <a:p>
-            <a:pPr algn="ctr"/>
-            <a:r>
-              <a:rPr sz="3400" b="0" i="0">
-                <a:solidFill>
-                  <a:srgbClr val="0A2240"/>
-                </a:solidFill>
-                <a:latin typeface="Arial"/>
-              </a:rPr>
-              <a:t>Cloud time-to-launch</a:t>
-            </a:r>
-          </a:p>
-        </p:txBody>
-      </p:sp>
-      <p:sp>
-        <p:nvSpPr>
-          <p:cNvPr id="8" name="TextBox 7"/>
-          <p:cNvSpPr/>
-          <p:nvPr>
-            <p:ph type="body" idx="3"/>
-          </p:nvPr>
-        </p:nvSpPr>
-        <p:spPr>
-          <a:xfrm>
-            <a:off x="6941820" y="2776728"/>
-            <a:ext cx="4792980" cy="914400"/>
-          </a:xfrm>
-          <a:prstGeom prst="rect">
-            <a:avLst/>
-          </a:prstGeom>
-          <a:noFill/>
-        </p:spPr>
-        <p:txBody>
-          <a:bodyPr wrap="none" lIns="0" rIns="0">
-            <a:noAutofit/>
-          </a:bodyPr>
-          <a:lstStyle/>
-          <a:p>
-            <a:pPr algn="ctr"/>
-            <a:r>
-              <a:rPr sz="6000" b="1" i="0">
-                <a:solidFill>
-                  <a:srgbClr val="0A2240"/>
-                </a:solidFill>
-                <a:latin typeface="Arial"/>
-              </a:rPr>
-              <a:t>6 mo</a:t>
-            </a:r>
-          </a:p>
-        </p:txBody>
-      </p:sp>
-      <p:sp>
-        <p:nvSpPr>
-          <p:cNvPr id="9" name="TextBox 8"/>
-          <p:cNvSpPr/>
-          <p:nvPr>
-            <p:ph type="body" idx="4"/>
-          </p:nvPr>
-        </p:nvSpPr>
-        <p:spPr>
-          <a:xfrm>
-            <a:off x="6484620" y="3965448"/>
-            <a:ext cx="5707380" cy="518159"/>
-          </a:xfrm>
-          <a:prstGeom prst="rect">
-            <a:avLst/>
-          </a:prstGeom>
-          <a:noFill/>
-        </p:spPr>
-        <p:txBody>
-          <a:bodyPr wrap="none" lIns="0" rIns="0">
-            <a:noAutofit/>
-          </a:bodyPr>
-          <a:lstStyle/>
-          <a:p>
-            <a:pPr algn="ctr"/>
-            <a:r>
-              <a:rPr sz="3400" b="0" i="0">
-                <a:solidFill>
-                  <a:srgbClr val="0A2240"/>
-                </a:solidFill>
-                <a:latin typeface="Arial"/>
-              </a:rPr>
-              <a:t>On-prem time-to-launch</a:t>
-            </a:r>
-          </a:p>
-        </p:txBody>
-      </p:sp>
-      <p:sp>
-        <p:nvSpPr>
-          <p:cNvPr id="10" name="TextBox 9"/>
-          <p:cNvSpPr/>
-          <p:nvPr>
-            <p:ph type="body" idx="5"/>
-          </p:nvPr>
-        </p:nvSpPr>
-        <p:spPr>
-          <a:xfrm>
-            <a:off x="5435323" y="3310127"/>
-            <a:ext cx="1321354" cy="640080"/>
-          </a:xfrm>
-          <a:prstGeom prst="rect">
-            <a:avLst/>
-          </a:prstGeom>
-          <a:noFill/>
-        </p:spPr>
-        <p:txBody>
-          <a:bodyPr wrap="none" lIns="0" rIns="0">
-            <a:noAutofit/>
-          </a:bodyPr>
-          <a:lstStyle/>
-          <a:p>
-            <a:pPr algn="ctr"/>
-            <a:r>
-              <a:rPr sz="4200" b="1" i="0">
-                <a:solidFill>
-                  <a:srgbClr val="5B6B82"/>
-                </a:solidFill>
-                <a:latin typeface="Arial"/>
-              </a:rPr>
-              <a:t>VS</a:t>
-            </a:r>
-          </a:p>
-        </p:txBody>
-      </p:sp>
-    </p:spTree>
-    <p:extLst>
-      <p:ext uri="{BB962C8B-B14F-4D97-AF65-F5344CB8AC3E}">
-        <p14:creationId xmlns:p14="http://schemas.microsoft.com/office/powerpoint/2010/main" val="1212999818"/>
-      </p:ext>
-    </p:extLst>
-  </p:cSld>
-  <p:clrMapOvr>
-    <a:masterClrMapping/>
-  </p:clrMapOvr>
-</p:sldLayout>
-</file>
-
-<file path=ppt/slideLayouts/slideLayout31.xml><?xml version="1.0" encoding="utf-8"?>
-<p:sldLayout xmlns:a="http://schemas.openxmlformats.org/drawingml/2006/main" xmlns:r="http://schemas.openxmlformats.org/officeDocument/2006/relationships" xmlns:p="http://schemas.openxmlformats.org/presentationml/2006/main" type="blank" preserve="1">
   <p:cSld name="slidekit · KPI Grid">
     <p:bg>
       <p:bgPr>
@@ -11917,7 +11188,7 @@
         </p:nvSpPr>
         <p:spPr>
           <a:xfrm>
-            <a:off x="4307840" y="3797808"/>
+            <a:off x="4307840" y="4056888"/>
             <a:ext cx="3576320" cy="640080"/>
           </a:xfrm>
           <a:prstGeom prst="rect">
@@ -11954,7 +11225,7 @@
         </p:nvSpPr>
         <p:spPr>
           <a:xfrm>
-            <a:off x="5559552" y="4492752"/>
+            <a:off x="5559552" y="4751832"/>
             <a:ext cx="1072896" cy="54864"/>
           </a:xfrm>
           <a:prstGeom prst="rect">
@@ -11986,16 +11257,16 @@
         </p:nvSpPr>
         <p:spPr>
           <a:xfrm>
-            <a:off x="4307840" y="4602480"/>
-            <a:ext cx="3576320" cy="1127760"/>
-          </a:xfrm>
-          <a:prstGeom prst="rect">
-            <a:avLst/>
-          </a:prstGeom>
-          <a:noFill/>
-        </p:spPr>
-        <p:txBody>
-          <a:bodyPr wrap="square" lIns="0" rIns="0">
+            <a:off x="3943896" y="4861560"/>
+            <a:ext cx="4304208" cy="609600"/>
+          </a:xfrm>
+          <a:prstGeom prst="rect">
+            <a:avLst/>
+          </a:prstGeom>
+          <a:noFill/>
+        </p:spPr>
+        <p:txBody>
+          <a:bodyPr wrap="none" lIns="0" rIns="0">
             <a:noAutofit/>
           </a:bodyPr>
           <a:lstStyle/>
@@ -12008,7 +11279,7 @@
                 </a:solidFill>
                 <a:latin typeface="Arial"/>
               </a:rPr>
-              <a:t>Avg. time to value</a:t>
+              <a:t>Time to value</a:t>
             </a:r>
           </a:p>
         </p:txBody>
@@ -12132,7 +11403,7 @@
 </p:sldLayout>
 </file>
 
-<file path=ppt/slideLayouts/slideLayout32.xml><?xml version="1.0" encoding="utf-8"?>
+<file path=ppt/slideLayouts/slideLayout31.xml><?xml version="1.0" encoding="utf-8"?>
 <p:sldLayout xmlns:a="http://schemas.openxmlformats.org/drawingml/2006/main" xmlns:r="http://schemas.openxmlformats.org/officeDocument/2006/relationships" xmlns:p="http://schemas.openxmlformats.org/presentationml/2006/main" type="blank" preserve="1">
   <p:cSld name="slidekit · Chart With Insight">
     <p:bg>
@@ -12319,7 +11590,7 @@
             <a:r>
               <a:rPr sz="2500" b="0" i="0">
                 <a:solidFill>
-                  <a:srgbClr val="5B6B82"/>
+                  <a:srgbClr val="0A2240"/>
                 </a:solidFill>
                 <a:latin typeface="Arial"/>
               </a:rPr>
@@ -12425,7 +11696,7 @@
             <a:r>
               <a:rPr sz="2500" b="0" i="0">
                 <a:solidFill>
-                  <a:srgbClr val="5B6B82"/>
+                  <a:srgbClr val="0A2240"/>
                 </a:solidFill>
                 <a:latin typeface="Arial"/>
               </a:rPr>
@@ -12531,7 +11802,7 @@
             <a:r>
               <a:rPr sz="2500" b="0" i="0">
                 <a:solidFill>
-                  <a:srgbClr val="5B6B82"/>
+                  <a:srgbClr val="0A2240"/>
                 </a:solidFill>
                 <a:latin typeface="Arial"/>
               </a:rPr>
@@ -12637,7 +11908,7 @@
             <a:r>
               <a:rPr sz="2500" b="0" i="0">
                 <a:solidFill>
-                  <a:srgbClr val="5B6B82"/>
+                  <a:srgbClr val="0A2240"/>
                 </a:solidFill>
                 <a:latin typeface="Arial"/>
               </a:rPr>
@@ -12656,8 +11927,8 @@
         </p:nvSpPr>
         <p:spPr>
           <a:xfrm>
-            <a:off x="7498080" y="1770888"/>
-            <a:ext cx="128016" cy="3718560"/>
+            <a:off x="7498080" y="3325368"/>
+            <a:ext cx="128016" cy="609600"/>
           </a:xfrm>
           <a:prstGeom prst="rect">
             <a:avLst/>
@@ -12688,16 +11959,16 @@
         </p:nvSpPr>
         <p:spPr>
           <a:xfrm>
-            <a:off x="8037576" y="1770888"/>
-            <a:ext cx="3697224" cy="3718560"/>
-          </a:xfrm>
-          <a:prstGeom prst="rect">
-            <a:avLst/>
-          </a:prstGeom>
-          <a:noFill/>
-        </p:spPr>
-        <p:txBody>
-          <a:bodyPr wrap="square" lIns="0" rIns="0">
+            <a:off x="8037576" y="3325368"/>
+            <a:ext cx="4154424" cy="609600"/>
+          </a:xfrm>
+          <a:prstGeom prst="rect">
+            <a:avLst/>
+          </a:prstGeom>
+          <a:noFill/>
+        </p:spPr>
+        <p:txBody>
+          <a:bodyPr wrap="none" lIns="0" rIns="0">
             <a:noAutofit/>
           </a:bodyPr>
           <a:lstStyle/>
@@ -12710,7 +11981,7 @@
                 </a:solidFill>
                 <a:latin typeface="Arial"/>
               </a:rPr>
-              <a:t>Activations nearly quadrupled once self-serve onboarding shipped in February.</a:t>
+              <a:t>Activations 4x.</a:t>
             </a:r>
           </a:p>
         </p:txBody>
@@ -12728,7 +11999,7 @@
 </p:sldLayout>
 </file>
 
-<file path=ppt/slideLayouts/slideLayout33.xml><?xml version="1.0" encoding="utf-8"?>
+<file path=ppt/slideLayouts/slideLayout32.xml><?xml version="1.0" encoding="utf-8"?>
 <p:sldLayout xmlns:a="http://schemas.openxmlformats.org/drawingml/2006/main" xmlns:r="http://schemas.openxmlformats.org/officeDocument/2006/relationships" xmlns:p="http://schemas.openxmlformats.org/presentationml/2006/main" type="blank" preserve="1">
   <p:cSld name="slidekit · Table">
     <p:bg>
@@ -12846,7 +12117,7 @@
             <a:r>
               <a:rPr sz="3400" b="1" i="0">
                 <a:solidFill>
-                  <a:srgbClr val="123A6B"/>
+                  <a:srgbClr val="0072CE"/>
                 </a:solidFill>
                 <a:latin typeface="Arial"/>
               </a:rPr>
@@ -12883,7 +12154,7 @@
             <a:r>
               <a:rPr sz="3400" b="1" i="0">
                 <a:solidFill>
-                  <a:srgbClr val="123A6B"/>
+                  <a:srgbClr val="0072CE"/>
                 </a:solidFill>
                 <a:latin typeface="Arial"/>
               </a:rPr>
@@ -12920,7 +12191,7 @@
             <a:r>
               <a:rPr sz="3400" b="1" i="0">
                 <a:solidFill>
-                  <a:srgbClr val="123A6B"/>
+                  <a:srgbClr val="0072CE"/>
                 </a:solidFill>
                 <a:latin typeface="Arial"/>
               </a:rPr>
@@ -13418,7 +12689,7 @@
 </p:sldLayout>
 </file>
 
-<file path=ppt/slideLayouts/slideLayout34.xml><?xml version="1.0" encoding="utf-8"?>
+<file path=ppt/slideLayouts/slideLayout33.xml><?xml version="1.0" encoding="utf-8"?>
 <p:sldLayout xmlns:a="http://schemas.openxmlformats.org/drawingml/2006/main" xmlns:r="http://schemas.openxmlformats.org/officeDocument/2006/relationships" xmlns:p="http://schemas.openxmlformats.org/presentationml/2006/main" type="blank" preserve="1">
   <p:cSld name="slidekit · Metric Comparison">
     <p:bg>
@@ -13518,7 +12789,7 @@
         </p:nvSpPr>
         <p:spPr>
           <a:xfrm>
-            <a:off x="457200" y="2075688"/>
+            <a:off x="457200" y="2334768"/>
             <a:ext cx="3576320" cy="914400"/>
           </a:xfrm>
           <a:prstGeom prst="rect">
@@ -13555,16 +12826,16 @@
         </p:nvSpPr>
         <p:spPr>
           <a:xfrm>
-            <a:off x="457200" y="3264408"/>
-            <a:ext cx="3576320" cy="1127760"/>
-          </a:xfrm>
-          <a:prstGeom prst="rect">
-            <a:avLst/>
-          </a:prstGeom>
-          <a:noFill/>
-        </p:spPr>
-        <p:txBody>
-          <a:bodyPr wrap="square" lIns="0" rIns="0">
+            <a:off x="457200" y="3523488"/>
+            <a:ext cx="3576320" cy="609600"/>
+          </a:xfrm>
+          <a:prstGeom prst="rect">
+            <a:avLst/>
+          </a:prstGeom>
+          <a:noFill/>
+        </p:spPr>
+        <p:txBody>
+          <a:bodyPr wrap="none" lIns="0" rIns="0">
             <a:noAutofit/>
           </a:bodyPr>
           <a:lstStyle/>
@@ -13577,7 +12848,7 @@
                 </a:solidFill>
                 <a:latin typeface="Arial"/>
               </a:rPr>
-              <a:t>Annual recurring revenue</a:t>
+              <a:t>Revenue</a:t>
             </a:r>
           </a:p>
         </p:txBody>
@@ -13592,7 +12863,7 @@
         </p:nvSpPr>
         <p:spPr>
           <a:xfrm>
-            <a:off x="1522569" y="4666488"/>
+            <a:off x="1522569" y="4407408"/>
             <a:ext cx="1445581" cy="518159"/>
           </a:xfrm>
           <a:prstGeom prst="rect">
@@ -13624,7 +12895,7 @@
         </p:nvSpPr>
         <p:spPr>
           <a:xfrm>
-            <a:off x="1260802" y="4666488"/>
+            <a:off x="1260802" y="4407408"/>
             <a:ext cx="1969115" cy="518159"/>
           </a:xfrm>
           <a:prstGeom prst="rect">
@@ -13661,7 +12932,7 @@
         </p:nvSpPr>
         <p:spPr>
           <a:xfrm>
-            <a:off x="4307840" y="2075688"/>
+            <a:off x="4307840" y="2334768"/>
             <a:ext cx="3576320" cy="914400"/>
           </a:xfrm>
           <a:prstGeom prst="rect">
@@ -13698,8 +12969,8 @@
         </p:nvSpPr>
         <p:spPr>
           <a:xfrm>
-            <a:off x="3834934" y="3264408"/>
-            <a:ext cx="4522132" cy="1127760"/>
+            <a:off x="3834934" y="3523488"/>
+            <a:ext cx="4522132" cy="609600"/>
           </a:xfrm>
           <a:prstGeom prst="rect">
             <a:avLst/>
@@ -13735,7 +13006,7 @@
         </p:nvSpPr>
         <p:spPr>
           <a:xfrm>
-            <a:off x="5175547" y="4666488"/>
+            <a:off x="5175547" y="4407408"/>
             <a:ext cx="1840906" cy="518159"/>
           </a:xfrm>
           <a:prstGeom prst="rect">
@@ -13767,7 +13038,7 @@
         </p:nvSpPr>
         <p:spPr>
           <a:xfrm>
-            <a:off x="4795183" y="4666488"/>
+            <a:off x="4795183" y="4407408"/>
             <a:ext cx="2601634" cy="518159"/>
           </a:xfrm>
           <a:prstGeom prst="rect">
@@ -13804,7 +13075,7 @@
         </p:nvSpPr>
         <p:spPr>
           <a:xfrm>
-            <a:off x="8158480" y="2075688"/>
+            <a:off x="8158480" y="2334768"/>
             <a:ext cx="3576320" cy="914400"/>
           </a:xfrm>
           <a:prstGeom prst="rect">
@@ -13841,16 +13112,16 @@
         </p:nvSpPr>
         <p:spPr>
           <a:xfrm>
-            <a:off x="8158480" y="3264408"/>
-            <a:ext cx="3576320" cy="1127760"/>
-          </a:xfrm>
-          <a:prstGeom prst="rect">
-            <a:avLst/>
-          </a:prstGeom>
-          <a:noFill/>
-        </p:spPr>
-        <p:txBody>
-          <a:bodyPr wrap="square" lIns="0" rIns="0">
+            <a:off x="7701280" y="3523488"/>
+            <a:ext cx="4490720" cy="609600"/>
+          </a:xfrm>
+          <a:prstGeom prst="rect">
+            <a:avLst/>
+          </a:prstGeom>
+          <a:noFill/>
+        </p:spPr>
+        <p:txBody>
+          <a:bodyPr wrap="none" lIns="0" rIns="0">
             <a:noAutofit/>
           </a:bodyPr>
           <a:lstStyle/>
@@ -13863,7 +13134,7 @@
                 </a:solidFill>
                 <a:latin typeface="Arial"/>
               </a:rPr>
-              <a:t>Net promoter score</a:t>
+              <a:t>Promoter score</a:t>
             </a:r>
           </a:p>
         </p:txBody>
@@ -13878,7 +13149,7 @@
         </p:nvSpPr>
         <p:spPr>
           <a:xfrm>
-            <a:off x="9427731" y="4666488"/>
+            <a:off x="9427731" y="4407408"/>
             <a:ext cx="1037817" cy="518159"/>
           </a:xfrm>
           <a:prstGeom prst="rect">
@@ -13910,7 +13181,7 @@
         </p:nvSpPr>
         <p:spPr>
           <a:xfrm>
-            <a:off x="9288294" y="4666488"/>
+            <a:off x="9288294" y="4407408"/>
             <a:ext cx="1316691" cy="518159"/>
           </a:xfrm>
           <a:prstGeom prst="rect">
@@ -13950,7 +13221,7 @@
 </p:sldLayout>
 </file>
 
-<file path=ppt/slideLayouts/slideLayout35.xml><?xml version="1.0" encoding="utf-8"?>
+<file path=ppt/slideLayouts/slideLayout34.xml><?xml version="1.0" encoding="utf-8"?>
 <p:sldLayout xmlns:a="http://schemas.openxmlformats.org/drawingml/2006/main" xmlns:r="http://schemas.openxmlformats.org/officeDocument/2006/relationships" xmlns:p="http://schemas.openxmlformats.org/presentationml/2006/main" type="blank" preserve="1">
   <p:cSld name="slidekit · Process Steps">
     <p:bg>
@@ -14068,7 +13339,7 @@
             <a:r>
               <a:rPr sz="4200" b="1" i="0">
                 <a:solidFill>
-                  <a:srgbClr val="123A6B"/>
+                  <a:srgbClr val="0072CE"/>
                 </a:solidFill>
                 <a:latin typeface="Arial"/>
               </a:rPr>
@@ -14088,13 +13359,13 @@
         <p:spPr>
           <a:xfrm>
             <a:off x="457200" y="2194560"/>
-            <a:ext cx="784098" cy="54864"/>
+            <a:ext cx="593303" cy="54864"/>
           </a:xfrm>
           <a:prstGeom prst="rect">
             <a:avLst/>
           </a:prstGeom>
           <a:solidFill>
-            <a:srgbClr val="123A6B"/>
+            <a:srgbClr val="0072CE"/>
           </a:solidFill>
           <a:ln>
             <a:noFill/>
@@ -14137,7 +13408,7 @@
             <a:r>
               <a:rPr sz="3400" b="1" i="0">
                 <a:solidFill>
-                  <a:srgbClr val="123A6B"/>
+                  <a:srgbClr val="0072CE"/>
                 </a:solidFill>
                 <a:latin typeface="Arial"/>
               </a:rPr>
@@ -14211,7 +13482,7 @@
             <a:r>
               <a:rPr sz="4200" b="1" i="0">
                 <a:solidFill>
-                  <a:srgbClr val="123A6B"/>
+                  <a:srgbClr val="0072CE"/>
                 </a:solidFill>
                 <a:latin typeface="Arial"/>
               </a:rPr>
@@ -14231,13 +13502,13 @@
         <p:spPr>
           <a:xfrm>
             <a:off x="3345180" y="2194560"/>
-            <a:ext cx="784098" cy="54864"/>
+            <a:ext cx="593303" cy="54864"/>
           </a:xfrm>
           <a:prstGeom prst="rect">
             <a:avLst/>
           </a:prstGeom>
           <a:solidFill>
-            <a:srgbClr val="123A6B"/>
+            <a:srgbClr val="0072CE"/>
           </a:solidFill>
           <a:ln>
             <a:noFill/>
@@ -14280,7 +13551,7 @@
             <a:r>
               <a:rPr sz="3400" b="1" i="0">
                 <a:solidFill>
-                  <a:srgbClr val="123A6B"/>
+                  <a:srgbClr val="0072CE"/>
                 </a:solidFill>
                 <a:latin typeface="Arial"/>
               </a:rPr>
@@ -14354,7 +13625,7 @@
             <a:r>
               <a:rPr sz="4200" b="1" i="0">
                 <a:solidFill>
-                  <a:srgbClr val="123A6B"/>
+                  <a:srgbClr val="0072CE"/>
                 </a:solidFill>
                 <a:latin typeface="Arial"/>
               </a:rPr>
@@ -14374,13 +13645,13 @@
         <p:spPr>
           <a:xfrm>
             <a:off x="6233160" y="2194560"/>
-            <a:ext cx="784098" cy="54864"/>
+            <a:ext cx="593303" cy="54864"/>
           </a:xfrm>
           <a:prstGeom prst="rect">
             <a:avLst/>
           </a:prstGeom>
           <a:solidFill>
-            <a:srgbClr val="123A6B"/>
+            <a:srgbClr val="0072CE"/>
           </a:solidFill>
           <a:ln>
             <a:noFill/>
@@ -14423,7 +13694,7 @@
             <a:r>
               <a:rPr sz="3400" b="1" i="0">
                 <a:solidFill>
-                  <a:srgbClr val="123A6B"/>
+                  <a:srgbClr val="0072CE"/>
                 </a:solidFill>
                 <a:latin typeface="Arial"/>
               </a:rPr>
@@ -14497,7 +13768,7 @@
             <a:r>
               <a:rPr sz="4200" b="1" i="0">
                 <a:solidFill>
-                  <a:srgbClr val="123A6B"/>
+                  <a:srgbClr val="0072CE"/>
                 </a:solidFill>
                 <a:latin typeface="Arial"/>
               </a:rPr>
@@ -14517,13 +13788,13 @@
         <p:spPr>
           <a:xfrm>
             <a:off x="9121140" y="2194560"/>
-            <a:ext cx="784098" cy="54864"/>
+            <a:ext cx="593303" cy="54864"/>
           </a:xfrm>
           <a:prstGeom prst="rect">
             <a:avLst/>
           </a:prstGeom>
           <a:solidFill>
-            <a:srgbClr val="123A6B"/>
+            <a:srgbClr val="0072CE"/>
           </a:solidFill>
           <a:ln>
             <a:noFill/>
@@ -14566,7 +13837,7 @@
             <a:r>
               <a:rPr sz="3400" b="1" i="0">
                 <a:solidFill>
-                  <a:srgbClr val="123A6B"/>
+                  <a:srgbClr val="0072CE"/>
                 </a:solidFill>
                 <a:latin typeface="Arial"/>
               </a:rPr>
@@ -14625,7 +13896,7 @@
 </p:sldLayout>
 </file>
 
-<file path=ppt/slideLayouts/slideLayout36.xml><?xml version="1.0" encoding="utf-8"?>
+<file path=ppt/slideLayouts/slideLayout35.xml><?xml version="1.0" encoding="utf-8"?>
 <p:sldLayout xmlns:a="http://schemas.openxmlformats.org/drawingml/2006/main" xmlns:r="http://schemas.openxmlformats.org/officeDocument/2006/relationships" xmlns:p="http://schemas.openxmlformats.org/presentationml/2006/main" type="blank" preserve="1">
   <p:cSld name="slidekit · Roadmap">
     <p:bg>
@@ -15157,7 +14428,7 @@
 </p:sldLayout>
 </file>
 
-<file path=ppt/slideLayouts/slideLayout37.xml><?xml version="1.0" encoding="utf-8"?>
+<file path=ppt/slideLayouts/slideLayout36.xml><?xml version="1.0" encoding="utf-8"?>
 <p:sldLayout xmlns:a="http://schemas.openxmlformats.org/drawingml/2006/main" xmlns:r="http://schemas.openxmlformats.org/officeDocument/2006/relationships" xmlns:p="http://schemas.openxmlformats.org/presentationml/2006/main" type="blank" preserve="1">
   <p:cSld name="slidekit · Funnel">
     <p:bg>
@@ -15536,7 +14807,7 @@
 </p:sldLayout>
 </file>
 
-<file path=ppt/slideLayouts/slideLayout38.xml><?xml version="1.0" encoding="utf-8"?>
+<file path=ppt/slideLayouts/slideLayout37.xml><?xml version="1.0" encoding="utf-8"?>
 <p:sldLayout xmlns:a="http://schemas.openxmlformats.org/drawingml/2006/main" xmlns:r="http://schemas.openxmlformats.org/officeDocument/2006/relationships" xmlns:p="http://schemas.openxmlformats.org/presentationml/2006/main" type="blank" preserve="1">
   <p:cSld name="slidekit · Nested Circles">
     <p:bg>
@@ -15643,7 +14914,7 @@
             <a:avLst/>
           </a:prstGeom>
           <a:solidFill>
-            <a:srgbClr val="5B6B82"/>
+            <a:srgbClr val="0A2240"/>
           </a:solidFill>
           <a:ln>
             <a:noFill/>
@@ -15707,7 +14978,7 @@
             <a:avLst/>
           </a:prstGeom>
           <a:solidFill>
-            <a:srgbClr val="123A6B"/>
+            <a:srgbClr val="0A2240"/>
           </a:solidFill>
           <a:ln>
             <a:noFill/>
@@ -15957,7 +15228,7 @@
 </p:sldLayout>
 </file>
 
-<file path=ppt/slideLayouts/slideLayout39.xml><?xml version="1.0" encoding="utf-8"?>
+<file path=ppt/slideLayouts/slideLayout38.xml><?xml version="1.0" encoding="utf-8"?>
 <p:sldLayout xmlns:a="http://schemas.openxmlformats.org/drawingml/2006/main" xmlns:r="http://schemas.openxmlformats.org/officeDocument/2006/relationships" xmlns:p="http://schemas.openxmlformats.org/presentationml/2006/main" type="blank" preserve="1">
   <p:cSld name="slidekit · Pyramid">
     <p:bg>
@@ -16064,7 +15335,7 @@
             <a:avLst/>
           </a:prstGeom>
           <a:solidFill>
-            <a:srgbClr val="123A6B"/>
+            <a:srgbClr val="0072CE"/>
           </a:solidFill>
           <a:ln>
             <a:noFill/>
@@ -16202,7 +15473,7 @@
             <a:avLst/>
           </a:prstGeom>
           <a:solidFill>
-            <a:srgbClr val="123A6B"/>
+            <a:srgbClr val="0072CE"/>
           </a:solidFill>
           <a:ln>
             <a:noFill/>
@@ -16319,6 +15590,533 @@
                 <a:latin typeface="Arial"/>
               </a:rPr>
               <a:t>Tactics</a:t>
+            </a:r>
+          </a:p>
+        </p:txBody>
+      </p:sp>
+    </p:spTree>
+    <p:extLst>
+      <p:ext uri="{BB962C8B-B14F-4D97-AF65-F5344CB8AC3E}">
+        <p14:creationId xmlns:p14="http://schemas.microsoft.com/office/powerpoint/2010/main" val="1212999818"/>
+      </p:ext>
+    </p:extLst>
+  </p:cSld>
+  <p:clrMapOvr>
+    <a:masterClrMapping/>
+  </p:clrMapOvr>
+</p:sldLayout>
+</file>
+
+<file path=ppt/slideLayouts/slideLayout39.xml><?xml version="1.0" encoding="utf-8"?>
+<p:sldLayout xmlns:a="http://schemas.openxmlformats.org/drawingml/2006/main" xmlns:r="http://schemas.openxmlformats.org/officeDocument/2006/relationships" xmlns:p="http://schemas.openxmlformats.org/presentationml/2006/main" type="blank" preserve="1">
+  <p:cSld name="slidekit · SWOT">
+    <p:bg>
+      <p:bgPr>
+        <a:solidFill>
+          <a:srgbClr val="FFFFFF"/>
+        </a:solidFill>
+        <a:effectLst/>
+      </p:bgPr>
+    </p:bg>
+    <p:spTree>
+      <p:nvGrpSpPr>
+        <p:cNvPr id="1" name=""/>
+        <p:cNvGrpSpPr/>
+        <p:nvPr/>
+      </p:nvGrpSpPr>
+      <p:grpSpPr>
+        <a:xfrm>
+          <a:off x="0" y="0"/>
+          <a:ext cx="0" cy="0"/>
+          <a:chOff x="0" y="0"/>
+          <a:chExt cx="0" cy="0"/>
+        </a:xfrm>
+      </p:grpSpPr>
+      <p:sp>
+        <p:nvSpPr>
+          <p:cNvPr id="4" name="Slide Number Placeholder 3"/>
+          <p:cNvSpPr>
+            <a:spLocks noGrp="1"/>
+          </p:cNvSpPr>
+          <p:nvPr>
+            <p:ph type="sldNum" sz="quarter" idx="12"/>
+          </p:nvPr>
+        </p:nvSpPr>
+        <p:spPr>
+          <a:xfrm>
+            <a:off x="11186160" y="6035040"/>
+            <a:ext cx="548640" cy="365760"/>
+          </a:xfrm>
+        </p:spPr>
+        <p:txBody>
+          <a:bodyPr/>
+          <a:lstStyle/>
+          <a:p>
+            <a:fld id="{C1FF6DA9-008F-8B48-92A6-B652298478BF}" type="slidenum">
+              <a:rPr lang="en-US" smtClean="0"/>
+              <a:t>‹#›</a:t>
+            </a:fld>
+            <a:endParaRPr lang="en-US"/>
+          </a:p>
+        </p:txBody>
+      </p:sp>
+      <p:sp>
+        <p:nvSpPr>
+          <p:cNvPr id="5" name="TextBox 4"/>
+          <p:cNvSpPr/>
+          <p:nvPr>
+            <p:ph type="title"/>
+          </p:nvPr>
+        </p:nvSpPr>
+        <p:spPr>
+          <a:xfrm>
+            <a:off x="457200" y="457200"/>
+            <a:ext cx="11277600" cy="768096"/>
+          </a:xfrm>
+          <a:prstGeom prst="rect">
+            <a:avLst/>
+          </a:prstGeom>
+          <a:noFill/>
+        </p:spPr>
+        <p:txBody>
+          <a:bodyPr wrap="none" lIns="0" rIns="0">
+            <a:noAutofit/>
+          </a:bodyPr>
+          <a:lstStyle/>
+          <a:p>
+            <a:pPr algn="l"/>
+            <a:r>
+              <a:rPr sz="4200" b="1" i="0">
+                <a:solidFill>
+                  <a:srgbClr val="0072CE"/>
+                </a:solidFill>
+                <a:latin typeface="Arial"/>
+              </a:rPr>
+              <a:t>SWOT Analysis</a:t>
+            </a:r>
+          </a:p>
+        </p:txBody>
+      </p:sp>
+      <p:sp>
+        <p:nvSpPr>
+          <p:cNvPr id="6" name="TextBox 5"/>
+          <p:cNvSpPr/>
+          <p:nvPr>
+            <p:ph type="body" idx="1"/>
+          </p:nvPr>
+        </p:nvSpPr>
+        <p:spPr>
+          <a:xfrm>
+            <a:off x="457200" y="1499616"/>
+            <a:ext cx="5501640" cy="621791"/>
+          </a:xfrm>
+          <a:prstGeom prst="rect">
+            <a:avLst/>
+          </a:prstGeom>
+          <a:noFill/>
+        </p:spPr>
+        <p:txBody>
+          <a:bodyPr wrap="none" lIns="0" rIns="0">
+            <a:noAutofit/>
+          </a:bodyPr>
+          <a:lstStyle/>
+          <a:p>
+            <a:pPr algn="l"/>
+            <a:r>
+              <a:rPr sz="3400" b="1" i="0">
+                <a:solidFill>
+                  <a:srgbClr val="0072CE"/>
+                </a:solidFill>
+                <a:latin typeface="Arial"/>
+              </a:rPr>
+              <a:t>Strengths</a:t>
+            </a:r>
+          </a:p>
+        </p:txBody>
+      </p:sp>
+      <p:sp>
+        <p:nvSpPr>
+          <p:cNvPr id="7" name="Rectangle 6"/>
+          <p:cNvSpPr/>
+          <p:nvPr>
+            <p:ph type="body" idx="2"/>
+          </p:nvPr>
+        </p:nvSpPr>
+        <p:spPr>
+          <a:xfrm>
+            <a:off x="457200" y="2176271"/>
+            <a:ext cx="2015207" cy="54864"/>
+          </a:xfrm>
+          <a:prstGeom prst="rect">
+            <a:avLst/>
+          </a:prstGeom>
+          <a:solidFill>
+            <a:srgbClr val="0072CE"/>
+          </a:solidFill>
+          <a:ln>
+            <a:noFill/>
+          </a:ln>
+          <a:effectLst/>
+        </p:spPr>
+        <p:txBody>
+          <a:bodyPr rtlCol="0" anchor="ctr"/>
+          <a:lstStyle/>
+          <a:p>
+            <a:pPr algn="ctr"/>
+          </a:p>
+        </p:txBody>
+      </p:sp>
+      <p:sp>
+        <p:nvSpPr>
+          <p:cNvPr id="8" name="TextBox 7"/>
+          <p:cNvSpPr/>
+          <p:nvPr>
+            <p:ph type="body" idx="3"/>
+          </p:nvPr>
+        </p:nvSpPr>
+        <p:spPr>
+          <a:xfrm>
+            <a:off x="457200" y="2395727"/>
+            <a:ext cx="7863523" cy="609600"/>
+          </a:xfrm>
+          <a:prstGeom prst="rect">
+            <a:avLst/>
+          </a:prstGeom>
+          <a:noFill/>
+        </p:spPr>
+        <p:txBody>
+          <a:bodyPr wrap="none" lIns="0" rIns="0">
+            <a:noAutofit/>
+          </a:bodyPr>
+          <a:lstStyle/>
+          <a:p>
+            <a:pPr algn="l"/>
+            <a:r>
+              <a:rPr sz="3400" b="0" i="0">
+                <a:solidFill>
+                  <a:srgbClr val="0A2240"/>
+                </a:solidFill>
+                <a:latin typeface="Arial"/>
+              </a:rPr>
+              <a:t>Strong brand, loyal users</a:t>
+            </a:r>
+          </a:p>
+        </p:txBody>
+      </p:sp>
+      <p:sp>
+        <p:nvSpPr>
+          <p:cNvPr id="9" name="TextBox 8"/>
+          <p:cNvSpPr/>
+          <p:nvPr>
+            <p:ph type="body" idx="4"/>
+          </p:nvPr>
+        </p:nvSpPr>
+        <p:spPr>
+          <a:xfrm>
+            <a:off x="6233160" y="1499616"/>
+            <a:ext cx="5501640" cy="621791"/>
+          </a:xfrm>
+          <a:prstGeom prst="rect">
+            <a:avLst/>
+          </a:prstGeom>
+          <a:noFill/>
+        </p:spPr>
+        <p:txBody>
+          <a:bodyPr wrap="none" lIns="0" rIns="0">
+            <a:noAutofit/>
+          </a:bodyPr>
+          <a:lstStyle/>
+          <a:p>
+            <a:pPr algn="l"/>
+            <a:r>
+              <a:rPr sz="3400" b="1" i="0">
+                <a:solidFill>
+                  <a:srgbClr val="0A2240"/>
+                </a:solidFill>
+                <a:latin typeface="Arial"/>
+              </a:rPr>
+              <a:t>Weaknesses</a:t>
+            </a:r>
+          </a:p>
+        </p:txBody>
+      </p:sp>
+      <p:sp>
+        <p:nvSpPr>
+          <p:cNvPr id="10" name="Rectangle 9"/>
+          <p:cNvSpPr/>
+          <p:nvPr>
+            <p:ph type="body" idx="5"/>
+          </p:nvPr>
+        </p:nvSpPr>
+        <p:spPr>
+          <a:xfrm>
+            <a:off x="6233160" y="2176271"/>
+            <a:ext cx="2584686" cy="54864"/>
+          </a:xfrm>
+          <a:prstGeom prst="rect">
+            <a:avLst/>
+          </a:prstGeom>
+          <a:solidFill>
+            <a:srgbClr val="0A2240"/>
+          </a:solidFill>
+          <a:ln>
+            <a:noFill/>
+          </a:ln>
+          <a:effectLst/>
+        </p:spPr>
+        <p:txBody>
+          <a:bodyPr rtlCol="0" anchor="ctr"/>
+          <a:lstStyle/>
+          <a:p>
+            <a:pPr algn="ctr"/>
+          </a:p>
+        </p:txBody>
+      </p:sp>
+      <p:sp>
+        <p:nvSpPr>
+          <p:cNvPr id="11" name="TextBox 10"/>
+          <p:cNvSpPr/>
+          <p:nvPr>
+            <p:ph type="body" idx="6"/>
+          </p:nvPr>
+        </p:nvSpPr>
+        <p:spPr>
+          <a:xfrm>
+            <a:off x="6233160" y="2395727"/>
+            <a:ext cx="5958840" cy="609600"/>
+          </a:xfrm>
+          <a:prstGeom prst="rect">
+            <a:avLst/>
+          </a:prstGeom>
+          <a:noFill/>
+        </p:spPr>
+        <p:txBody>
+          <a:bodyPr wrap="none" lIns="0" rIns="0">
+            <a:noAutofit/>
+          </a:bodyPr>
+          <a:lstStyle/>
+          <a:p>
+            <a:pPr algn="l"/>
+            <a:r>
+              <a:rPr sz="3400" b="0" i="0">
+                <a:solidFill>
+                  <a:srgbClr val="0A2240"/>
+                </a:solidFill>
+                <a:latin typeface="Arial"/>
+              </a:rPr>
+              <a:t>Thin margins, small team</a:t>
+            </a:r>
+          </a:p>
+        </p:txBody>
+      </p:sp>
+      <p:sp>
+        <p:nvSpPr>
+          <p:cNvPr id="12" name="TextBox 11"/>
+          <p:cNvSpPr/>
+          <p:nvPr>
+            <p:ph type="body" idx="7"/>
+          </p:nvPr>
+        </p:nvSpPr>
+        <p:spPr>
+          <a:xfrm>
+            <a:off x="457200" y="3767328"/>
+            <a:ext cx="5501640" cy="621791"/>
+          </a:xfrm>
+          <a:prstGeom prst="rect">
+            <a:avLst/>
+          </a:prstGeom>
+          <a:noFill/>
+        </p:spPr>
+        <p:txBody>
+          <a:bodyPr wrap="none" lIns="0" rIns="0">
+            <a:noAutofit/>
+          </a:bodyPr>
+          <a:lstStyle/>
+          <a:p>
+            <a:pPr algn="l"/>
+            <a:r>
+              <a:rPr sz="3400" b="1" i="0">
+                <a:solidFill>
+                  <a:srgbClr val="0072CE"/>
+                </a:solidFill>
+                <a:latin typeface="Arial"/>
+              </a:rPr>
+              <a:t>Opportunities</a:t>
+            </a:r>
+          </a:p>
+        </p:txBody>
+      </p:sp>
+      <p:sp>
+        <p:nvSpPr>
+          <p:cNvPr id="13" name="Rectangle 12"/>
+          <p:cNvSpPr/>
+          <p:nvPr>
+            <p:ph type="body" idx="8"/>
+          </p:nvPr>
+        </p:nvSpPr>
+        <p:spPr>
+          <a:xfrm>
+            <a:off x="457200" y="4443983"/>
+            <a:ext cx="2830525" cy="54864"/>
+          </a:xfrm>
+          <a:prstGeom prst="rect">
+            <a:avLst/>
+          </a:prstGeom>
+          <a:solidFill>
+            <a:srgbClr val="0072CE"/>
+          </a:solidFill>
+          <a:ln>
+            <a:noFill/>
+          </a:ln>
+          <a:effectLst/>
+        </p:spPr>
+        <p:txBody>
+          <a:bodyPr rtlCol="0" anchor="ctr"/>
+          <a:lstStyle/>
+          <a:p>
+            <a:pPr algn="ctr"/>
+          </a:p>
+        </p:txBody>
+      </p:sp>
+      <p:sp>
+        <p:nvSpPr>
+          <p:cNvPr id="14" name="TextBox 13"/>
+          <p:cNvSpPr/>
+          <p:nvPr>
+            <p:ph type="body" idx="9"/>
+          </p:nvPr>
+        </p:nvSpPr>
+        <p:spPr>
+          <a:xfrm>
+            <a:off x="457200" y="4663439"/>
+            <a:ext cx="8015326" cy="609600"/>
+          </a:xfrm>
+          <a:prstGeom prst="rect">
+            <a:avLst/>
+          </a:prstGeom>
+          <a:noFill/>
+        </p:spPr>
+        <p:txBody>
+          <a:bodyPr wrap="none" lIns="0" rIns="0">
+            <a:noAutofit/>
+          </a:bodyPr>
+          <a:lstStyle/>
+          <a:p>
+            <a:pPr algn="l"/>
+            <a:r>
+              <a:rPr sz="3400" b="0" i="0">
+                <a:solidFill>
+                  <a:srgbClr val="0A2240"/>
+                </a:solidFill>
+                <a:latin typeface="Arial"/>
+              </a:rPr>
+              <a:t>New markets via partners</a:t>
+            </a:r>
+          </a:p>
+        </p:txBody>
+      </p:sp>
+      <p:sp>
+        <p:nvSpPr>
+          <p:cNvPr id="15" name="TextBox 14"/>
+          <p:cNvSpPr/>
+          <p:nvPr>
+            <p:ph type="body" idx="13"/>
+          </p:nvPr>
+        </p:nvSpPr>
+        <p:spPr>
+          <a:xfrm>
+            <a:off x="6233160" y="3767328"/>
+            <a:ext cx="5501640" cy="621791"/>
+          </a:xfrm>
+          <a:prstGeom prst="rect">
+            <a:avLst/>
+          </a:prstGeom>
+          <a:noFill/>
+        </p:spPr>
+        <p:txBody>
+          <a:bodyPr wrap="none" lIns="0" rIns="0">
+            <a:noAutofit/>
+          </a:bodyPr>
+          <a:lstStyle/>
+          <a:p>
+            <a:pPr algn="l"/>
+            <a:r>
+              <a:rPr sz="3400" b="1" i="0">
+                <a:solidFill>
+                  <a:srgbClr val="0A2240"/>
+                </a:solidFill>
+                <a:latin typeface="Arial"/>
+              </a:rPr>
+              <a:t>Threats</a:t>
+            </a:r>
+          </a:p>
+        </p:txBody>
+      </p:sp>
+      <p:sp>
+        <p:nvSpPr>
+          <p:cNvPr id="16" name="Rectangle 15"/>
+          <p:cNvSpPr/>
+          <p:nvPr>
+            <p:ph type="body" idx="14"/>
+          </p:nvPr>
+        </p:nvSpPr>
+        <p:spPr>
+          <a:xfrm>
+            <a:off x="6233160" y="4443983"/>
+            <a:ext cx="1559793" cy="54864"/>
+          </a:xfrm>
+          <a:prstGeom prst="rect">
+            <a:avLst/>
+          </a:prstGeom>
+          <a:solidFill>
+            <a:srgbClr val="0A2240"/>
+          </a:solidFill>
+          <a:ln>
+            <a:noFill/>
+          </a:ln>
+          <a:effectLst/>
+        </p:spPr>
+        <p:txBody>
+          <a:bodyPr rtlCol="0" anchor="ctr"/>
+          <a:lstStyle/>
+          <a:p>
+            <a:pPr algn="ctr"/>
+          </a:p>
+        </p:txBody>
+      </p:sp>
+      <p:sp>
+        <p:nvSpPr>
+          <p:cNvPr id="17" name="TextBox 16"/>
+          <p:cNvSpPr/>
+          <p:nvPr>
+            <p:ph type="body" idx="15"/>
+          </p:nvPr>
+        </p:nvSpPr>
+        <p:spPr>
+          <a:xfrm>
+            <a:off x="6233160" y="4663439"/>
+            <a:ext cx="5958840" cy="609600"/>
+          </a:xfrm>
+          <a:prstGeom prst="rect">
+            <a:avLst/>
+          </a:prstGeom>
+          <a:noFill/>
+        </p:spPr>
+        <p:txBody>
+          <a:bodyPr wrap="none" lIns="0" rIns="0">
+            <a:noAutofit/>
+          </a:bodyPr>
+          <a:lstStyle/>
+          <a:p>
+            <a:pPr algn="l"/>
+            <a:r>
+              <a:rPr sz="3400" b="0" i="0">
+                <a:solidFill>
+                  <a:srgbClr val="0A2240"/>
+                </a:solidFill>
+                <a:latin typeface="Arial"/>
+              </a:rPr>
+              <a:t>New entrants cut prices</a:t>
             </a:r>
           </a:p>
         </p:txBody>
@@ -16625,533 +16423,6 @@
 </file>
 
 <file path=ppt/slideLayouts/slideLayout40.xml><?xml version="1.0" encoding="utf-8"?>
-<p:sldLayout xmlns:a="http://schemas.openxmlformats.org/drawingml/2006/main" xmlns:r="http://schemas.openxmlformats.org/officeDocument/2006/relationships" xmlns:p="http://schemas.openxmlformats.org/presentationml/2006/main" type="blank" preserve="1">
-  <p:cSld name="slidekit · SWOT">
-    <p:bg>
-      <p:bgPr>
-        <a:solidFill>
-          <a:srgbClr val="FFFFFF"/>
-        </a:solidFill>
-        <a:effectLst/>
-      </p:bgPr>
-    </p:bg>
-    <p:spTree>
-      <p:nvGrpSpPr>
-        <p:cNvPr id="1" name=""/>
-        <p:cNvGrpSpPr/>
-        <p:nvPr/>
-      </p:nvGrpSpPr>
-      <p:grpSpPr>
-        <a:xfrm>
-          <a:off x="0" y="0"/>
-          <a:ext cx="0" cy="0"/>
-          <a:chOff x="0" y="0"/>
-          <a:chExt cx="0" cy="0"/>
-        </a:xfrm>
-      </p:grpSpPr>
-      <p:sp>
-        <p:nvSpPr>
-          <p:cNvPr id="4" name="Slide Number Placeholder 3"/>
-          <p:cNvSpPr>
-            <a:spLocks noGrp="1"/>
-          </p:cNvSpPr>
-          <p:nvPr>
-            <p:ph type="sldNum" sz="quarter" idx="12"/>
-          </p:nvPr>
-        </p:nvSpPr>
-        <p:spPr>
-          <a:xfrm>
-            <a:off x="11186160" y="6035040"/>
-            <a:ext cx="548640" cy="365760"/>
-          </a:xfrm>
-        </p:spPr>
-        <p:txBody>
-          <a:bodyPr/>
-          <a:lstStyle/>
-          <a:p>
-            <a:fld id="{C1FF6DA9-008F-8B48-92A6-B652298478BF}" type="slidenum">
-              <a:rPr lang="en-US" smtClean="0"/>
-              <a:t>‹#›</a:t>
-            </a:fld>
-            <a:endParaRPr lang="en-US"/>
-          </a:p>
-        </p:txBody>
-      </p:sp>
-      <p:sp>
-        <p:nvSpPr>
-          <p:cNvPr id="5" name="TextBox 4"/>
-          <p:cNvSpPr/>
-          <p:nvPr>
-            <p:ph type="title"/>
-          </p:nvPr>
-        </p:nvSpPr>
-        <p:spPr>
-          <a:xfrm>
-            <a:off x="457200" y="457200"/>
-            <a:ext cx="11277600" cy="768096"/>
-          </a:xfrm>
-          <a:prstGeom prst="rect">
-            <a:avLst/>
-          </a:prstGeom>
-          <a:noFill/>
-        </p:spPr>
-        <p:txBody>
-          <a:bodyPr wrap="none" lIns="0" rIns="0">
-            <a:noAutofit/>
-          </a:bodyPr>
-          <a:lstStyle/>
-          <a:p>
-            <a:pPr algn="l"/>
-            <a:r>
-              <a:rPr sz="4200" b="1" i="0">
-                <a:solidFill>
-                  <a:srgbClr val="0072CE"/>
-                </a:solidFill>
-                <a:latin typeface="Arial"/>
-              </a:rPr>
-              <a:t>SWOT Analysis</a:t>
-            </a:r>
-          </a:p>
-        </p:txBody>
-      </p:sp>
-      <p:sp>
-        <p:nvSpPr>
-          <p:cNvPr id="6" name="TextBox 5"/>
-          <p:cNvSpPr/>
-          <p:nvPr>
-            <p:ph type="body" idx="1"/>
-          </p:nvPr>
-        </p:nvSpPr>
-        <p:spPr>
-          <a:xfrm>
-            <a:off x="457200" y="1499616"/>
-            <a:ext cx="5501640" cy="621791"/>
-          </a:xfrm>
-          <a:prstGeom prst="rect">
-            <a:avLst/>
-          </a:prstGeom>
-          <a:noFill/>
-        </p:spPr>
-        <p:txBody>
-          <a:bodyPr wrap="none" lIns="0" rIns="0">
-            <a:noAutofit/>
-          </a:bodyPr>
-          <a:lstStyle/>
-          <a:p>
-            <a:pPr algn="l"/>
-            <a:r>
-              <a:rPr sz="3400" b="1" i="0">
-                <a:solidFill>
-                  <a:srgbClr val="0072CE"/>
-                </a:solidFill>
-                <a:latin typeface="Arial"/>
-              </a:rPr>
-              <a:t>Strengths</a:t>
-            </a:r>
-          </a:p>
-        </p:txBody>
-      </p:sp>
-      <p:sp>
-        <p:nvSpPr>
-          <p:cNvPr id="7" name="Rectangle 6"/>
-          <p:cNvSpPr/>
-          <p:nvPr>
-            <p:ph type="body" idx="2"/>
-          </p:nvPr>
-        </p:nvSpPr>
-        <p:spPr>
-          <a:xfrm>
-            <a:off x="457200" y="2176271"/>
-            <a:ext cx="1650492" cy="54864"/>
-          </a:xfrm>
-          <a:prstGeom prst="rect">
-            <a:avLst/>
-          </a:prstGeom>
-          <a:solidFill>
-            <a:srgbClr val="0072CE"/>
-          </a:solidFill>
-          <a:ln>
-            <a:noFill/>
-          </a:ln>
-          <a:effectLst/>
-        </p:spPr>
-        <p:txBody>
-          <a:bodyPr rtlCol="0" anchor="ctr"/>
-          <a:lstStyle/>
-          <a:p>
-            <a:pPr algn="ctr"/>
-          </a:p>
-        </p:txBody>
-      </p:sp>
-      <p:sp>
-        <p:nvSpPr>
-          <p:cNvPr id="8" name="TextBox 7"/>
-          <p:cNvSpPr/>
-          <p:nvPr>
-            <p:ph type="body" idx="3"/>
-          </p:nvPr>
-        </p:nvSpPr>
-        <p:spPr>
-          <a:xfrm>
-            <a:off x="457200" y="2395727"/>
-            <a:ext cx="5501640" cy="1097281"/>
-          </a:xfrm>
-          <a:prstGeom prst="rect">
-            <a:avLst/>
-          </a:prstGeom>
-          <a:noFill/>
-        </p:spPr>
-        <p:txBody>
-          <a:bodyPr wrap="square" lIns="0" rIns="0">
-            <a:noAutofit/>
-          </a:bodyPr>
-          <a:lstStyle/>
-          <a:p>
-            <a:pPr algn="l"/>
-            <a:r>
-              <a:rPr sz="3400" b="0" i="0">
-                <a:solidFill>
-                  <a:srgbClr val="0A2240"/>
-                </a:solidFill>
-                <a:latin typeface="Arial"/>
-              </a:rPr>
-              <a:t>A strong brand with loyal users</a:t>
-            </a:r>
-          </a:p>
-        </p:txBody>
-      </p:sp>
-      <p:sp>
-        <p:nvSpPr>
-          <p:cNvPr id="9" name="TextBox 8"/>
-          <p:cNvSpPr/>
-          <p:nvPr>
-            <p:ph type="body" idx="4"/>
-          </p:nvPr>
-        </p:nvSpPr>
-        <p:spPr>
-          <a:xfrm>
-            <a:off x="6233160" y="1499616"/>
-            <a:ext cx="5501640" cy="621791"/>
-          </a:xfrm>
-          <a:prstGeom prst="rect">
-            <a:avLst/>
-          </a:prstGeom>
-          <a:noFill/>
-        </p:spPr>
-        <p:txBody>
-          <a:bodyPr wrap="none" lIns="0" rIns="0">
-            <a:noAutofit/>
-          </a:bodyPr>
-          <a:lstStyle/>
-          <a:p>
-            <a:pPr algn="l"/>
-            <a:r>
-              <a:rPr sz="3400" b="1" i="0">
-                <a:solidFill>
-                  <a:srgbClr val="5B6B82"/>
-                </a:solidFill>
-                <a:latin typeface="Arial"/>
-              </a:rPr>
-              <a:t>Weaknesses</a:t>
-            </a:r>
-          </a:p>
-        </p:txBody>
-      </p:sp>
-      <p:sp>
-        <p:nvSpPr>
-          <p:cNvPr id="10" name="Rectangle 9"/>
-          <p:cNvSpPr/>
-          <p:nvPr>
-            <p:ph type="body" idx="5"/>
-          </p:nvPr>
-        </p:nvSpPr>
-        <p:spPr>
-          <a:xfrm>
-            <a:off x="6233160" y="2176271"/>
-            <a:ext cx="1650492" cy="54864"/>
-          </a:xfrm>
-          <a:prstGeom prst="rect">
-            <a:avLst/>
-          </a:prstGeom>
-          <a:solidFill>
-            <a:srgbClr val="5B6B82"/>
-          </a:solidFill>
-          <a:ln>
-            <a:noFill/>
-          </a:ln>
-          <a:effectLst/>
-        </p:spPr>
-        <p:txBody>
-          <a:bodyPr rtlCol="0" anchor="ctr"/>
-          <a:lstStyle/>
-          <a:p>
-            <a:pPr algn="ctr"/>
-          </a:p>
-        </p:txBody>
-      </p:sp>
-      <p:sp>
-        <p:nvSpPr>
-          <p:cNvPr id="11" name="TextBox 10"/>
-          <p:cNvSpPr/>
-          <p:nvPr>
-            <p:ph type="body" idx="6"/>
-          </p:nvPr>
-        </p:nvSpPr>
-        <p:spPr>
-          <a:xfrm>
-            <a:off x="6233160" y="2395727"/>
-            <a:ext cx="5501640" cy="1097281"/>
-          </a:xfrm>
-          <a:prstGeom prst="rect">
-            <a:avLst/>
-          </a:prstGeom>
-          <a:noFill/>
-        </p:spPr>
-        <p:txBody>
-          <a:bodyPr wrap="square" lIns="0" rIns="0">
-            <a:noAutofit/>
-          </a:bodyPr>
-          <a:lstStyle/>
-          <a:p>
-            <a:pPr algn="l"/>
-            <a:r>
-              <a:rPr sz="3400" b="0" i="0">
-                <a:solidFill>
-                  <a:srgbClr val="0A2240"/>
-                </a:solidFill>
-                <a:latin typeface="Arial"/>
-              </a:rPr>
-              <a:t>Thin margins and a small team</a:t>
-            </a:r>
-          </a:p>
-        </p:txBody>
-      </p:sp>
-      <p:sp>
-        <p:nvSpPr>
-          <p:cNvPr id="12" name="TextBox 11"/>
-          <p:cNvSpPr/>
-          <p:nvPr>
-            <p:ph type="body" idx="7"/>
-          </p:nvPr>
-        </p:nvSpPr>
-        <p:spPr>
-          <a:xfrm>
-            <a:off x="457200" y="3767328"/>
-            <a:ext cx="5501640" cy="621791"/>
-          </a:xfrm>
-          <a:prstGeom prst="rect">
-            <a:avLst/>
-          </a:prstGeom>
-          <a:noFill/>
-        </p:spPr>
-        <p:txBody>
-          <a:bodyPr wrap="none" lIns="0" rIns="0">
-            <a:noAutofit/>
-          </a:bodyPr>
-          <a:lstStyle/>
-          <a:p>
-            <a:pPr algn="l"/>
-            <a:r>
-              <a:rPr sz="3400" b="1" i="0">
-                <a:solidFill>
-                  <a:srgbClr val="0072CE"/>
-                </a:solidFill>
-                <a:latin typeface="Arial"/>
-              </a:rPr>
-              <a:t>Opportunities</a:t>
-            </a:r>
-          </a:p>
-        </p:txBody>
-      </p:sp>
-      <p:sp>
-        <p:nvSpPr>
-          <p:cNvPr id="13" name="Rectangle 12"/>
-          <p:cNvSpPr/>
-          <p:nvPr>
-            <p:ph type="body" idx="8"/>
-          </p:nvPr>
-        </p:nvSpPr>
-        <p:spPr>
-          <a:xfrm>
-            <a:off x="457200" y="4443983"/>
-            <a:ext cx="1650492" cy="54864"/>
-          </a:xfrm>
-          <a:prstGeom prst="rect">
-            <a:avLst/>
-          </a:prstGeom>
-          <a:solidFill>
-            <a:srgbClr val="0072CE"/>
-          </a:solidFill>
-          <a:ln>
-            <a:noFill/>
-          </a:ln>
-          <a:effectLst/>
-        </p:spPr>
-        <p:txBody>
-          <a:bodyPr rtlCol="0" anchor="ctr"/>
-          <a:lstStyle/>
-          <a:p>
-            <a:pPr algn="ctr"/>
-          </a:p>
-        </p:txBody>
-      </p:sp>
-      <p:sp>
-        <p:nvSpPr>
-          <p:cNvPr id="14" name="TextBox 13"/>
-          <p:cNvSpPr/>
-          <p:nvPr>
-            <p:ph type="body" idx="9"/>
-          </p:nvPr>
-        </p:nvSpPr>
-        <p:spPr>
-          <a:xfrm>
-            <a:off x="457200" y="4663439"/>
-            <a:ext cx="5501640" cy="1097281"/>
-          </a:xfrm>
-          <a:prstGeom prst="rect">
-            <a:avLst/>
-          </a:prstGeom>
-          <a:noFill/>
-        </p:spPr>
-        <p:txBody>
-          <a:bodyPr wrap="square" lIns="0" rIns="0">
-            <a:noAutofit/>
-          </a:bodyPr>
-          <a:lstStyle/>
-          <a:p>
-            <a:pPr algn="l"/>
-            <a:r>
-              <a:rPr sz="3400" b="0" i="0">
-                <a:solidFill>
-                  <a:srgbClr val="0A2240"/>
-                </a:solidFill>
-                <a:latin typeface="Arial"/>
-              </a:rPr>
-              <a:t>New markets through partnerships</a:t>
-            </a:r>
-          </a:p>
-        </p:txBody>
-      </p:sp>
-      <p:sp>
-        <p:nvSpPr>
-          <p:cNvPr id="15" name="TextBox 14"/>
-          <p:cNvSpPr/>
-          <p:nvPr>
-            <p:ph type="body" idx="13"/>
-          </p:nvPr>
-        </p:nvSpPr>
-        <p:spPr>
-          <a:xfrm>
-            <a:off x="6233160" y="3767328"/>
-            <a:ext cx="5501640" cy="621791"/>
-          </a:xfrm>
-          <a:prstGeom prst="rect">
-            <a:avLst/>
-          </a:prstGeom>
-          <a:noFill/>
-        </p:spPr>
-        <p:txBody>
-          <a:bodyPr wrap="none" lIns="0" rIns="0">
-            <a:noAutofit/>
-          </a:bodyPr>
-          <a:lstStyle/>
-          <a:p>
-            <a:pPr algn="l"/>
-            <a:r>
-              <a:rPr sz="3400" b="1" i="0">
-                <a:solidFill>
-                  <a:srgbClr val="5B6B82"/>
-                </a:solidFill>
-                <a:latin typeface="Arial"/>
-              </a:rPr>
-              <a:t>Threats</a:t>
-            </a:r>
-          </a:p>
-        </p:txBody>
-      </p:sp>
-      <p:sp>
-        <p:nvSpPr>
-          <p:cNvPr id="16" name="Rectangle 15"/>
-          <p:cNvSpPr/>
-          <p:nvPr>
-            <p:ph type="body" idx="14"/>
-          </p:nvPr>
-        </p:nvSpPr>
-        <p:spPr>
-          <a:xfrm>
-            <a:off x="6233160" y="4443983"/>
-            <a:ext cx="1650492" cy="54864"/>
-          </a:xfrm>
-          <a:prstGeom prst="rect">
-            <a:avLst/>
-          </a:prstGeom>
-          <a:solidFill>
-            <a:srgbClr val="5B6B82"/>
-          </a:solidFill>
-          <a:ln>
-            <a:noFill/>
-          </a:ln>
-          <a:effectLst/>
-        </p:spPr>
-        <p:txBody>
-          <a:bodyPr rtlCol="0" anchor="ctr"/>
-          <a:lstStyle/>
-          <a:p>
-            <a:pPr algn="ctr"/>
-          </a:p>
-        </p:txBody>
-      </p:sp>
-      <p:sp>
-        <p:nvSpPr>
-          <p:cNvPr id="17" name="TextBox 16"/>
-          <p:cNvSpPr/>
-          <p:nvPr>
-            <p:ph type="body" idx="15"/>
-          </p:nvPr>
-        </p:nvSpPr>
-        <p:spPr>
-          <a:xfrm>
-            <a:off x="6233160" y="4663439"/>
-            <a:ext cx="5501640" cy="1097281"/>
-          </a:xfrm>
-          <a:prstGeom prst="rect">
-            <a:avLst/>
-          </a:prstGeom>
-          <a:noFill/>
-        </p:spPr>
-        <p:txBody>
-          <a:bodyPr wrap="square" lIns="0" rIns="0">
-            <a:noAutofit/>
-          </a:bodyPr>
-          <a:lstStyle/>
-          <a:p>
-            <a:pPr algn="l"/>
-            <a:r>
-              <a:rPr sz="3400" b="0" i="0">
-                <a:solidFill>
-                  <a:srgbClr val="0A2240"/>
-                </a:solidFill>
-                <a:latin typeface="Arial"/>
-              </a:rPr>
-              <a:t>New entrants driving price pressure</a:t>
-            </a:r>
-          </a:p>
-        </p:txBody>
-      </p:sp>
-    </p:spTree>
-    <p:extLst>
-      <p:ext uri="{BB962C8B-B14F-4D97-AF65-F5344CB8AC3E}">
-        <p14:creationId xmlns:p14="http://schemas.microsoft.com/office/powerpoint/2010/main" val="1212999818"/>
-      </p:ext>
-    </p:extLst>
-  </p:cSld>
-  <p:clrMapOvr>
-    <a:masterClrMapping/>
-  </p:clrMapOvr>
-</p:sldLayout>
-</file>
-
-<file path=ppt/slideLayouts/slideLayout41.xml><?xml version="1.0" encoding="utf-8"?>
 <p:sldLayout xmlns:a="http://schemas.openxmlformats.org/drawingml/2006/main" xmlns:r="http://schemas.openxmlformats.org/officeDocument/2006/relationships" xmlns:p="http://schemas.openxmlformats.org/presentationml/2006/main" type="blank" preserve="1">
   <p:cSld name="slidekit · Comparison Matrix">
     <p:bg>
@@ -19355,7 +18626,6 @@
     <p:sldLayoutId id="2147483738" r:id="rId39"/>
     <p:sldLayoutId id="2147483739" r:id="rId40"/>
     <p:sldLayoutId id="2147483740" r:id="rId41"/>
-    <p:sldLayoutId id="2147483741" r:id="rId42"/>
   </p:sldLayoutIdLst>
   <p:txStyles>
     <p:titleStyle>
@@ -19802,8 +19072,8 @@
         </p:nvSpPr>
         <p:spPr>
           <a:xfrm>
-            <a:off x="548640" y="2176271"/>
-            <a:ext cx="1650492" cy="54864"/>
+            <a:off x="457200" y="2176271"/>
+            <a:ext cx="1727622" cy="54864"/>
           </a:xfrm>
           <a:prstGeom prst="rect">
             <a:avLst/>
@@ -19864,7 +19134,7 @@
             <a:r>
               <a:rPr sz="3400" b="1" i="0">
                 <a:solidFill>
-                  <a:srgbClr val="5B6B82"/>
+                  <a:srgbClr val="0A2240"/>
                 </a:solidFill>
                 <a:latin typeface="Arial"/>
               </a:rPr>
@@ -19881,14 +19151,14 @@
         </p:nvSpPr>
         <p:spPr>
           <a:xfrm>
-            <a:off x="6324600" y="2176271"/>
-            <a:ext cx="1650492" cy="54864"/>
+            <a:off x="6233160" y="2176271"/>
+            <a:ext cx="1726778" cy="54864"/>
           </a:xfrm>
           <a:prstGeom prst="rect">
             <a:avLst/>
           </a:prstGeom>
           <a:solidFill>
-            <a:srgbClr val="5B6B82"/>
+            <a:srgbClr val="0A2240"/>
           </a:solidFill>
           <a:ln>
             <a:noFill/>
@@ -20155,7 +19425,7 @@
             <a:fld id="{4B0E1F8A-6C1D-4E2A-9F3B-7A5C8D2E1F60}" type="slidenum">
               <a:rPr sz="1600" b="0" i="0">
                 <a:solidFill>
-                  <a:srgbClr val="5B6B82"/>
+                  <a:srgbClr val="0A2240"/>
                 </a:solidFill>
                 <a:latin typeface="Arial"/>
               </a:rPr>
@@ -20251,7 +19521,7 @@
             <a:r>
               <a:rPr sz="3400" b="1" i="0">
                 <a:solidFill>
-                  <a:srgbClr val="123A6B"/>
+                  <a:srgbClr val="0072CE"/>
                 </a:solidFill>
                 <a:latin typeface="Arial"/>
               </a:rPr>
@@ -20286,7 +19556,7 @@
             <a:r>
               <a:rPr sz="3400" b="1" i="0">
                 <a:solidFill>
-                  <a:srgbClr val="123A6B"/>
+                  <a:srgbClr val="0072CE"/>
                 </a:solidFill>
                 <a:latin typeface="Arial"/>
               </a:rPr>
@@ -20647,7 +19917,7 @@
             <a:fld id="{4B0E1F8A-6C1D-4E2A-9F3B-7A5C8D2E1F60}" type="slidenum">
               <a:rPr sz="1600" b="0" i="0">
                 <a:solidFill>
-                  <a:srgbClr val="5B6B82"/>
+                  <a:srgbClr val="0A2240"/>
                 </a:solidFill>
                 <a:latin typeface="Arial"/>
               </a:rPr>
@@ -20885,7 +20155,7 @@
             <a:fld id="{4B0E1F8A-6C1D-4E2A-9F3B-7A5C8D2E1F60}" type="slidenum">
               <a:rPr sz="1600" b="0" i="0">
                 <a:solidFill>
-                  <a:srgbClr val="5B6B82"/>
+                  <a:srgbClr val="0A2240"/>
                 </a:solidFill>
                 <a:latin typeface="Arial"/>
               </a:rPr>
@@ -21193,7 +20463,7 @@
             <a:fld id="{4B0E1F8A-6C1D-4E2A-9F3B-7A5C8D2E1F60}" type="slidenum">
               <a:rPr sz="1600" b="0" i="0">
                 <a:solidFill>
-                  <a:srgbClr val="5B6B82"/>
+                  <a:srgbClr val="0A2240"/>
                 </a:solidFill>
                 <a:latin typeface="Arial"/>
               </a:rPr>
@@ -21333,7 +20603,7 @@
             <a:r>
               <a:rPr sz="3400" b="0" i="0">
                 <a:solidFill>
-                  <a:srgbClr val="5B6B82"/>
+                  <a:srgbClr val="0A2240"/>
                 </a:solidFill>
                 <a:latin typeface="Arial"/>
               </a:rPr>
@@ -21370,7 +20640,7 @@
             <a:fld id="{4B0E1F8A-6C1D-4E2A-9F3B-7A5C8D2E1F60}" type="slidenum">
               <a:rPr sz="1600" b="0" i="0">
                 <a:solidFill>
-                  <a:srgbClr val="5B6B82"/>
+                  <a:srgbClr val="0A2240"/>
                 </a:solidFill>
                 <a:latin typeface="Arial"/>
               </a:rPr>
@@ -21547,7 +20817,7 @@
             <a:fld id="{4B0E1F8A-6C1D-4E2A-9F3B-7A5C8D2E1F60}" type="slidenum">
               <a:rPr sz="1600" b="0" i="0">
                 <a:solidFill>
-                  <a:srgbClr val="5B6B82"/>
+                  <a:srgbClr val="0A2240"/>
                 </a:solidFill>
                 <a:latin typeface="Arial"/>
               </a:rPr>
@@ -21785,7 +21055,7 @@
             <a:fld id="{4B0E1F8A-6C1D-4E2A-9F3B-7A5C8D2E1F60}" type="slidenum">
               <a:rPr sz="1600" b="0" i="0">
                 <a:solidFill>
-                  <a:srgbClr val="5B6B82"/>
+                  <a:srgbClr val="0A2240"/>
                 </a:solidFill>
                 <a:latin typeface="Arial"/>
               </a:rPr>
@@ -21835,7 +21105,7 @@
             <a:avLst/>
           </a:prstGeom>
           <a:solidFill>
-            <a:srgbClr val="FF5F56"/>
+            <a:srgbClr val="FFFFFF"/>
           </a:solidFill>
           <a:ln>
             <a:noFill/>
@@ -21879,7 +21149,7 @@
             <a:avLst/>
           </a:prstGeom>
           <a:solidFill>
-            <a:srgbClr val="FFBD2E"/>
+            <a:srgbClr val="FFFFFF"/>
           </a:solidFill>
           <a:ln>
             <a:noFill/>
@@ -21923,7 +21193,7 @@
             <a:avLst/>
           </a:prstGeom>
           <a:solidFill>
-            <a:srgbClr val="27C93F"/>
+            <a:srgbClr val="FFFFFF"/>
           </a:solidFill>
           <a:ln>
             <a:noFill/>
@@ -21978,7 +21248,7 @@
             <a:r>
               <a:rPr sz="4200" b="0" i="0">
                 <a:solidFill>
-                  <a:srgbClr val="D4D4D4"/>
+                  <a:srgbClr val="FFFFFF"/>
                 </a:solidFill>
                 <a:latin typeface="Arial"/>
               </a:rPr>
@@ -22013,7 +21283,7 @@
             <a:r>
               <a:rPr sz="3400" b="0" i="0">
                 <a:solidFill>
-                  <a:srgbClr val="D4D4D4"/>
+                  <a:srgbClr val="FFFFFF"/>
                 </a:solidFill>
                 <a:latin typeface="Arial"/>
               </a:rPr>
@@ -22031,7 +21301,7 @@
         <p:spPr>
           <a:xfrm>
             <a:off x="457200" y="2356103"/>
-            <a:ext cx="2985868" cy="518159"/>
+            <a:ext cx="10580827" cy="518159"/>
           </a:xfrm>
           <a:prstGeom prst="rect">
             <a:avLst/>
@@ -22048,11 +21318,11 @@
             <a:r>
               <a:rPr sz="3400" b="0" i="0">
                 <a:solidFill>
-                  <a:srgbClr val="D4D4D4"/>
-                </a:solidFill>
-                <a:latin typeface="Arial"/>
-              </a:rPr>
-              <a:t>My idea: </a:t>
+                  <a:srgbClr val="FFFFFF"/>
+                </a:solidFill>
+                <a:latin typeface="Arial"/>
+              </a:rPr>
+              <a:t>My idea: "an AI thing for resumes"</a:t>
             </a:r>
           </a:p>
         </p:txBody>
@@ -22065,8 +21335,8 @@
         </p:nvSpPr>
         <p:spPr>
           <a:xfrm>
-            <a:off x="2209068" y="2356103"/>
-            <a:ext cx="7777836" cy="518159"/>
+            <a:off x="457200" y="3392421"/>
+            <a:ext cx="2141160" cy="518159"/>
           </a:xfrm>
           <a:prstGeom prst="rect">
             <a:avLst/>
@@ -22083,11 +21353,11 @@
             <a:r>
               <a:rPr sz="3400" b="0" i="0">
                 <a:solidFill>
-                  <a:srgbClr val="CE9178"/>
-                </a:solidFill>
-                <a:latin typeface="Arial"/>
-              </a:rPr>
-              <a:t>"an AI thing for resumes"</a:t>
+                  <a:srgbClr val="FFFFFF"/>
+                </a:solidFill>
+                <a:latin typeface="Arial"/>
+              </a:rPr>
+              <a:t>Rules:</a:t>
             </a:r>
           </a:p>
         </p:txBody>
@@ -22100,8 +21370,8 @@
         </p:nvSpPr>
         <p:spPr>
           <a:xfrm>
-            <a:off x="457200" y="3392421"/>
-            <a:ext cx="2141160" cy="518159"/>
+            <a:off x="457200" y="3910580"/>
+            <a:ext cx="9628841" cy="518159"/>
           </a:xfrm>
           <a:prstGeom prst="rect">
             <a:avLst/>
@@ -22118,11 +21388,11 @@
             <a:r>
               <a:rPr sz="3400" b="0" i="0">
                 <a:solidFill>
-                  <a:srgbClr val="D4D4D4"/>
-                </a:solidFill>
-                <a:latin typeface="Arial"/>
-              </a:rPr>
-              <a:t>Rules:</a:t>
+                  <a:srgbClr val="FFFFFF"/>
+                </a:solidFill>
+                <a:latin typeface="Arial"/>
+              </a:rPr>
+              <a:t>  - Ask ONE question at a time.</a:t>
             </a:r>
           </a:p>
         </p:txBody>
@@ -22135,8 +21405,8 @@
         </p:nvSpPr>
         <p:spPr>
           <a:xfrm>
-            <a:off x="457200" y="3910580"/>
-            <a:ext cx="9628841" cy="518159"/>
+            <a:off x="457200" y="4428739"/>
+            <a:ext cx="8861723" cy="518159"/>
           </a:xfrm>
           <a:prstGeom prst="rect">
             <a:avLst/>
@@ -22153,11 +21423,11 @@
             <a:r>
               <a:rPr sz="3400" b="0" i="0">
                 <a:solidFill>
-                  <a:srgbClr val="D4D4D4"/>
-                </a:solidFill>
-                <a:latin typeface="Arial"/>
-              </a:rPr>
-              <a:t>  - Ask ONE question at a time.</a:t>
+                  <a:srgbClr val="FFFFFF"/>
+                </a:solidFill>
+                <a:latin typeface="Arial"/>
+              </a:rPr>
+              <a:t>  - Never propose a solution.</a:t>
             </a:r>
           </a:p>
         </p:txBody>
@@ -22170,8 +21440,8 @@
         </p:nvSpPr>
         <p:spPr>
           <a:xfrm>
-            <a:off x="457200" y="4428739"/>
-            <a:ext cx="8861723" cy="518159"/>
+            <a:off x="457200" y="4946898"/>
+            <a:ext cx="7977881" cy="518159"/>
           </a:xfrm>
           <a:prstGeom prst="rect">
             <a:avLst/>
@@ -22188,11 +21458,11 @@
             <a:r>
               <a:rPr sz="3400" b="0" i="0">
                 <a:solidFill>
-                  <a:srgbClr val="D4D4D4"/>
-                </a:solidFill>
-                <a:latin typeface="Arial"/>
-              </a:rPr>
-              <a:t>  - Never propose a solution.</a:t>
+                  <a:srgbClr val="FFFFFF"/>
+                </a:solidFill>
+                <a:latin typeface="Arial"/>
+              </a:rPr>
+              <a:t>  - Reject vague answers.</a:t>
             </a:r>
           </a:p>
         </p:txBody>
@@ -22205,8 +21475,8 @@
         </p:nvSpPr>
         <p:spPr>
           <a:xfrm>
-            <a:off x="457200" y="4946898"/>
-            <a:ext cx="7977881" cy="518159"/>
+            <a:off x="457200" y="5465057"/>
+            <a:ext cx="4982944" cy="518159"/>
           </a:xfrm>
           <a:prstGeom prst="rect">
             <a:avLst/>
@@ -22223,11 +21493,11 @@
             <a:r>
               <a:rPr sz="3400" b="0" i="0">
                 <a:solidFill>
-                  <a:srgbClr val="D4D4D4"/>
-                </a:solidFill>
-                <a:latin typeface="Arial"/>
-              </a:rPr>
-              <a:t>  - Reject vague answers.</a:t>
+                  <a:srgbClr val="FFFFFF"/>
+                </a:solidFill>
+                <a:latin typeface="Arial"/>
+              </a:rPr>
+              <a:t>  - Stop when it </a:t>
             </a:r>
           </a:p>
         </p:txBody>
@@ -22240,8 +21510,8 @@
         </p:nvSpPr>
         <p:spPr>
           <a:xfrm>
-            <a:off x="457200" y="5465057"/>
-            <a:ext cx="4982944" cy="518159"/>
+            <a:off x="3457240" y="5465057"/>
+            <a:ext cx="681811" cy="518159"/>
           </a:xfrm>
           <a:prstGeom prst="rect">
             <a:avLst/>
@@ -22258,11 +21528,11 @@
             <a:r>
               <a:rPr sz="3400" b="0" i="0">
                 <a:solidFill>
-                  <a:srgbClr val="D4D4D4"/>
-                </a:solidFill>
-                <a:latin typeface="Arial"/>
-              </a:rPr>
-              <a:t>  - Stop when it </a:t>
+                  <a:srgbClr val="569CD6"/>
+                </a:solidFill>
+                <a:latin typeface="Arial"/>
+              </a:rPr>
+              <a:t>is</a:t>
             </a:r>
           </a:p>
         </p:txBody>
@@ -22275,41 +21545,6 @@
         </p:nvSpPr>
         <p:spPr>
           <a:xfrm>
-            <a:off x="3457240" y="5465057"/>
-            <a:ext cx="681811" cy="518159"/>
-          </a:xfrm>
-          <a:prstGeom prst="rect">
-            <a:avLst/>
-          </a:prstGeom>
-          <a:noFill/>
-        </p:spPr>
-        <p:txBody>
-          <a:bodyPr wrap="none" lIns="0" rIns="0">
-            <a:noAutofit/>
-          </a:bodyPr>
-          <a:lstStyle/>
-          <a:p>
-            <a:pPr algn="l"/>
-            <a:r>
-              <a:rPr sz="3400" b="0" i="0">
-                <a:solidFill>
-                  <a:srgbClr val="569CD6"/>
-                </a:solidFill>
-                <a:latin typeface="Arial"/>
-              </a:rPr>
-              <a:t>is</a:t>
-            </a:r>
-          </a:p>
-        </p:txBody>
-      </p:sp>
-      <p:sp>
-        <p:nvSpPr>
-          <p:cNvPr id="15" name="TextBox 14"/>
-          <p:cNvSpPr txBox="1"/>
-          <p:nvPr/>
-        </p:nvSpPr>
-        <p:spPr>
-          <a:xfrm>
             <a:off x="3769072" y="5465057"/>
             <a:ext cx="2793920" cy="518159"/>
           </a:xfrm>
@@ -22328,7 +21563,7 @@
             <a:r>
               <a:rPr sz="3400" b="0" i="0">
                 <a:solidFill>
-                  <a:srgbClr val="D4D4D4"/>
+                  <a:srgbClr val="FFFFFF"/>
                 </a:solidFill>
                 <a:latin typeface="Arial"/>
               </a:rPr>
@@ -22339,7 +21574,7 @@
       </p:sp>
       <p:sp>
         <p:nvSpPr>
-          <p:cNvPr id="16" name="TextBox 15"/>
+          <p:cNvPr id="15" name="TextBox 14"/>
           <p:cNvSpPr/>
           <p:nvPr>
             <p:ph type="sldNum" idx="12"/>
@@ -22365,7 +21600,7 @@
             <a:fld id="{4B0E1F8A-6C1D-4E2A-9F3B-7A5C8D2E1F60}" type="slidenum">
               <a:rPr sz="1600" b="0" i="0">
                 <a:solidFill>
-                  <a:srgbClr val="5B6B82"/>
+                  <a:srgbClr val="0A2240"/>
                 </a:solidFill>
                 <a:latin typeface="Arial"/>
               </a:rPr>
@@ -22461,7 +21696,7 @@
             <a:r>
               <a:rPr sz="4200" b="1" i="0">
                 <a:solidFill>
-                  <a:srgbClr val="123A6B"/>
+                  <a:srgbClr val="0072CE"/>
                 </a:solidFill>
                 <a:latin typeface="Arial"/>
               </a:rPr>
@@ -22496,7 +21731,7 @@
             <a:r>
               <a:rPr sz="4200" b="1" i="0">
                 <a:solidFill>
-                  <a:srgbClr val="123A6B"/>
+                  <a:srgbClr val="0072CE"/>
                 </a:solidFill>
                 <a:latin typeface="Arial"/>
               </a:rPr>
@@ -22566,7 +21801,7 @@
             <a:r>
               <a:rPr sz="4200" b="1" i="0">
                 <a:solidFill>
-                  <a:srgbClr val="123A6B"/>
+                  <a:srgbClr val="0072CE"/>
                 </a:solidFill>
                 <a:latin typeface="Arial"/>
               </a:rPr>
@@ -22601,7 +21836,7 @@
             <a:r>
               <a:rPr sz="4200" b="1" i="0">
                 <a:solidFill>
-                  <a:srgbClr val="123A6B"/>
+                  <a:srgbClr val="0072CE"/>
                 </a:solidFill>
                 <a:latin typeface="Arial"/>
               </a:rPr>
@@ -22671,7 +21906,7 @@
             <a:r>
               <a:rPr sz="4200" b="1" i="0">
                 <a:solidFill>
-                  <a:srgbClr val="123A6B"/>
+                  <a:srgbClr val="0072CE"/>
                 </a:solidFill>
                 <a:latin typeface="Arial"/>
               </a:rPr>
@@ -22706,7 +21941,7 @@
             <a:r>
               <a:rPr sz="4200" b="1" i="0">
                 <a:solidFill>
-                  <a:srgbClr val="123A6B"/>
+                  <a:srgbClr val="0072CE"/>
                 </a:solidFill>
                 <a:latin typeface="Arial"/>
               </a:rPr>
@@ -22778,7 +22013,7 @@
             <a:fld id="{4B0E1F8A-6C1D-4E2A-9F3B-7A5C8D2E1F60}" type="slidenum">
               <a:rPr sz="1600" b="0" i="0">
                 <a:solidFill>
-                  <a:srgbClr val="5B6B82"/>
+                  <a:srgbClr val="0A2240"/>
                 </a:solidFill>
                 <a:latin typeface="Arial"/>
               </a:rPr>
@@ -22874,7 +22109,7 @@
             <a:r>
               <a:rPr sz="3400" b="1" i="0">
                 <a:solidFill>
-                  <a:srgbClr val="123A6B"/>
+                  <a:srgbClr val="0072CE"/>
                 </a:solidFill>
                 <a:latin typeface="Arial"/>
               </a:rPr>
@@ -22909,7 +22144,7 @@
             <a:r>
               <a:rPr sz="3400" b="1" i="0">
                 <a:solidFill>
-                  <a:srgbClr val="123A6B"/>
+                  <a:srgbClr val="0072CE"/>
                 </a:solidFill>
                 <a:latin typeface="Arial"/>
               </a:rPr>
@@ -23156,7 +22391,7 @@
             <a:fld id="{4B0E1F8A-6C1D-4E2A-9F3B-7A5C8D2E1F60}" type="slidenum">
               <a:rPr sz="1600" b="0" i="0">
                 <a:solidFill>
-                  <a:srgbClr val="5B6B82"/>
+                  <a:srgbClr val="0A2240"/>
                 </a:solidFill>
                 <a:latin typeface="Arial"/>
               </a:rPr>
@@ -23331,7 +22566,7 @@
             <a:r>
               <a:rPr sz="3400" b="0" i="0">
                 <a:solidFill>
-                  <a:srgbClr val="5B6B82"/>
+                  <a:srgbClr val="0A2240"/>
                 </a:solidFill>
                 <a:latin typeface="Arial"/>
               </a:rPr>
@@ -23368,7 +22603,7 @@
             <a:fld id="{4B0E1F8A-6C1D-4E2A-9F3B-7A5C8D2E1F60}" type="slidenum">
               <a:rPr sz="1600" b="0" i="0">
                 <a:solidFill>
-                  <a:srgbClr val="5B6B82"/>
+                  <a:srgbClr val="0A2240"/>
                 </a:solidFill>
                 <a:latin typeface="Arial"/>
               </a:rPr>
@@ -23606,7 +22841,7 @@
             <a:fld id="{4B0E1F8A-6C1D-4E2A-9F3B-7A5C8D2E1F60}" type="slidenum">
               <a:rPr sz="1600" b="0" i="0">
                 <a:solidFill>
-                  <a:srgbClr val="5B6B82"/>
+                  <a:srgbClr val="0A2240"/>
                 </a:solidFill>
                 <a:latin typeface="Arial"/>
               </a:rPr>
@@ -23783,7 +23018,7 @@
             <a:fld id="{4B0E1F8A-6C1D-4E2A-9F3B-7A5C8D2E1F60}" type="slidenum">
               <a:rPr sz="1600" b="0" i="0">
                 <a:solidFill>
-                  <a:srgbClr val="5B6B82"/>
+                  <a:srgbClr val="0A2240"/>
                 </a:solidFill>
                 <a:latin typeface="Arial"/>
               </a:rPr>
@@ -23960,7 +23195,7 @@
             <a:fld id="{4B0E1F8A-6C1D-4E2A-9F3B-7A5C8D2E1F60}" type="slidenum">
               <a:rPr sz="1600" b="0" i="0">
                 <a:solidFill>
-                  <a:srgbClr val="5B6B82"/>
+                  <a:srgbClr val="0A2240"/>
                 </a:solidFill>
                 <a:latin typeface="Arial"/>
               </a:rPr>
@@ -24268,7 +23503,7 @@
             <a:fld id="{4B0E1F8A-6C1D-4E2A-9F3B-7A5C8D2E1F60}" type="slidenum">
               <a:rPr sz="1600" b="0" i="0">
                 <a:solidFill>
-                  <a:srgbClr val="5B6B82"/>
+                  <a:srgbClr val="0A2240"/>
                 </a:solidFill>
                 <a:latin typeface="Arial"/>
               </a:rPr>
@@ -24445,7 +23680,7 @@
             <a:fld id="{4B0E1F8A-6C1D-4E2A-9F3B-7A5C8D2E1F60}" type="slidenum">
               <a:rPr sz="1600" b="0" i="0">
                 <a:solidFill>
-                  <a:srgbClr val="5B6B82"/>
+                  <a:srgbClr val="0A2240"/>
                 </a:solidFill>
                 <a:latin typeface="Arial"/>
               </a:rPr>
@@ -24541,7 +23776,7 @@
             <a:r>
               <a:rPr sz="3400" b="1" i="0">
                 <a:solidFill>
-                  <a:srgbClr val="123A6B"/>
+                  <a:srgbClr val="0072CE"/>
                 </a:solidFill>
                 <a:latin typeface="Arial"/>
               </a:rPr>
@@ -24576,7 +23811,7 @@
             <a:r>
               <a:rPr sz="3400" b="1" i="0">
                 <a:solidFill>
-                  <a:srgbClr val="123A6B"/>
+                  <a:srgbClr val="0072CE"/>
                 </a:solidFill>
                 <a:latin typeface="Arial"/>
               </a:rPr>
@@ -24937,7 +24172,7 @@
             <a:fld id="{4B0E1F8A-6C1D-4E2A-9F3B-7A5C8D2E1F60}" type="slidenum">
               <a:rPr sz="1600" b="0" i="0">
                 <a:solidFill>
-                  <a:srgbClr val="5B6B82"/>
+                  <a:srgbClr val="0A2240"/>
                 </a:solidFill>
                 <a:latin typeface="Arial"/>
               </a:rPr>
@@ -25114,7 +24349,7 @@
             <a:fld id="{4B0E1F8A-6C1D-4E2A-9F3B-7A5C8D2E1F60}" type="slidenum">
               <a:rPr sz="1600" b="0" i="0">
                 <a:solidFill>
-                  <a:srgbClr val="5B6B82"/>
+                  <a:srgbClr val="0A2240"/>
                 </a:solidFill>
                 <a:latin typeface="Arial"/>
               </a:rPr>
@@ -25422,7 +24657,7 @@
             <a:fld id="{4B0E1F8A-6C1D-4E2A-9F3B-7A5C8D2E1F60}" type="slidenum">
               <a:rPr sz="1600" b="0" i="0">
                 <a:solidFill>
-                  <a:srgbClr val="5B6B82"/>
+                  <a:srgbClr val="0A2240"/>
                 </a:solidFill>
                 <a:latin typeface="Arial"/>
               </a:rPr>
@@ -25599,7 +24834,7 @@
             <a:fld id="{4B0E1F8A-6C1D-4E2A-9F3B-7A5C8D2E1F60}" type="slidenum">
               <a:rPr sz="1600" b="0" i="0">
                 <a:solidFill>
-                  <a:srgbClr val="5B6B82"/>
+                  <a:srgbClr val="0A2240"/>
                 </a:solidFill>
                 <a:latin typeface="Arial"/>
               </a:rPr>
@@ -25835,7 +25070,7 @@
             <a:r>
               <a:rPr sz="4200" b="1" i="0">
                 <a:solidFill>
-                  <a:srgbClr val="5B6B82"/>
+                  <a:srgbClr val="0A2240"/>
                 </a:solidFill>
                 <a:latin typeface="Arial"/>
               </a:rPr>
@@ -25872,7 +25107,7 @@
             <a:fld id="{4B0E1F8A-6C1D-4E2A-9F3B-7A5C8D2E1F60}" type="slidenum">
               <a:rPr sz="1600" b="0" i="0">
                 <a:solidFill>
-                  <a:srgbClr val="5B6B82"/>
+                  <a:srgbClr val="0A2240"/>
                 </a:solidFill>
                 <a:latin typeface="Arial"/>
               </a:rPr>
@@ -26294,7 +25529,7 @@
             <a:fld id="{4B0E1F8A-6C1D-4E2A-9F3B-7A5C8D2E1F60}" type="slidenum">
               <a:rPr sz="1600" b="0" i="0">
                 <a:solidFill>
-                  <a:srgbClr val="5B6B82"/>
+                  <a:srgbClr val="0A2240"/>
                 </a:solidFill>
                 <a:latin typeface="Arial"/>
               </a:rPr>
@@ -27005,7 +26240,7 @@
             <a:fld id="{4B0E1F8A-6C1D-4E2A-9F3B-7A5C8D2E1F60}" type="slidenum">
               <a:rPr sz="1600" b="0" i="0">
                 <a:solidFill>
-                  <a:srgbClr val="5B6B82"/>
+                  <a:srgbClr val="0A2240"/>
                 </a:solidFill>
                 <a:latin typeface="Arial"/>
               </a:rPr>
@@ -27182,7 +26417,7 @@
             <a:fld id="{4B0E1F8A-6C1D-4E2A-9F3B-7A5C8D2E1F60}" type="slidenum">
               <a:rPr sz="1600" b="0" i="0">
                 <a:solidFill>
-                  <a:srgbClr val="5B6B82"/>
+                  <a:srgbClr val="0A2240"/>
                 </a:solidFill>
                 <a:latin typeface="Arial"/>
               </a:rPr>
@@ -27232,7 +26467,7 @@
             <a:avLst/>
           </a:prstGeom>
           <a:solidFill>
-            <a:srgbClr val="FF5F56"/>
+            <a:srgbClr val="FFFFFF"/>
           </a:solidFill>
           <a:ln>
             <a:noFill/>
@@ -27276,7 +26511,7 @@
             <a:avLst/>
           </a:prstGeom>
           <a:solidFill>
-            <a:srgbClr val="FFBD2E"/>
+            <a:srgbClr val="FFFFFF"/>
           </a:solidFill>
           <a:ln>
             <a:noFill/>
@@ -27320,7 +26555,7 @@
             <a:avLst/>
           </a:prstGeom>
           <a:solidFill>
-            <a:srgbClr val="27C93F"/>
+            <a:srgbClr val="FFFFFF"/>
           </a:solidFill>
           <a:ln>
             <a:noFill/>
@@ -27375,7 +26610,7 @@
             <a:r>
               <a:rPr sz="4200" b="0" i="0">
                 <a:solidFill>
-                  <a:srgbClr val="D4D4D4"/>
+                  <a:srgbClr val="FFFFFF"/>
                 </a:solidFill>
                 <a:latin typeface="Arial"/>
               </a:rPr>
@@ -27410,7 +26645,7 @@
             <a:r>
               <a:rPr sz="3400" b="0" i="0">
                 <a:solidFill>
-                  <a:srgbClr val="D4D4D4"/>
+                  <a:srgbClr val="FFFFFF"/>
                 </a:solidFill>
                 <a:latin typeface="Arial"/>
               </a:rPr>
@@ -27445,7 +26680,7 @@
             <a:r>
               <a:rPr sz="3400" b="0" i="0">
                 <a:solidFill>
-                  <a:srgbClr val="CE9178"/>
+                  <a:srgbClr val="FFFFFF"/>
                 </a:solidFill>
                 <a:latin typeface="Arial"/>
               </a:rPr>
@@ -27480,7 +26715,7 @@
             <a:r>
               <a:rPr sz="3400" b="0" i="0">
                 <a:solidFill>
-                  <a:srgbClr val="D4D4D4"/>
+                  <a:srgbClr val="FFFFFF"/>
                 </a:solidFill>
                 <a:latin typeface="Arial"/>
               </a:rPr>
@@ -27550,7 +26785,7 @@
             <a:r>
               <a:rPr sz="3400" b="0" i="0">
                 <a:solidFill>
-                  <a:srgbClr val="D4D4D4"/>
+                  <a:srgbClr val="FFFFFF"/>
                 </a:solidFill>
                 <a:latin typeface="Arial"/>
               </a:rPr>
@@ -27585,7 +26820,7 @@
             <a:r>
               <a:rPr sz="3400" b="0" i="0">
                 <a:solidFill>
-                  <a:srgbClr val="C586C0"/>
+                  <a:srgbClr val="569CD6"/>
                 </a:solidFill>
                 <a:latin typeface="Arial"/>
               </a:rPr>
@@ -27620,7 +26855,7 @@
             <a:r>
               <a:rPr sz="3400" b="0" i="0">
                 <a:solidFill>
-                  <a:srgbClr val="D4D4D4"/>
+                  <a:srgbClr val="FFFFFF"/>
                 </a:solidFill>
                 <a:latin typeface="Arial"/>
               </a:rPr>
@@ -27655,7 +26890,7 @@
             <a:r>
               <a:rPr sz="3400" b="0" i="0">
                 <a:solidFill>
-                  <a:srgbClr val="D4D4D4"/>
+                  <a:srgbClr val="FFFFFF"/>
                 </a:solidFill>
                 <a:latin typeface="Arial"/>
               </a:rPr>
@@ -27690,7 +26925,7 @@
             <a:r>
               <a:rPr sz="3400" b="0" i="0">
                 <a:solidFill>
-                  <a:srgbClr val="D4D4D4"/>
+                  <a:srgbClr val="FFFFFF"/>
                 </a:solidFill>
                 <a:latin typeface="Arial"/>
               </a:rPr>
@@ -27727,7 +26962,7 @@
             <a:fld id="{4B0E1F8A-6C1D-4E2A-9F3B-7A5C8D2E1F60}" type="slidenum">
               <a:rPr sz="1600" b="0" i="0">
                 <a:solidFill>
-                  <a:srgbClr val="5B6B82"/>
+                  <a:srgbClr val="0A2240"/>
                 </a:solidFill>
                 <a:latin typeface="Arial"/>
               </a:rPr>
@@ -27823,7 +27058,7 @@
             <a:r>
               <a:rPr sz="4200" b="1" i="0">
                 <a:solidFill>
-                  <a:srgbClr val="123A6B"/>
+                  <a:srgbClr val="0072CE"/>
                 </a:solidFill>
                 <a:latin typeface="Arial"/>
               </a:rPr>
@@ -27858,7 +27093,7 @@
             <a:r>
               <a:rPr sz="4200" b="1" i="0">
                 <a:solidFill>
-                  <a:srgbClr val="123A6B"/>
+                  <a:srgbClr val="0072CE"/>
                 </a:solidFill>
                 <a:latin typeface="Arial"/>
               </a:rPr>
@@ -27928,7 +27163,7 @@
             <a:r>
               <a:rPr sz="4200" b="1" i="0">
                 <a:solidFill>
-                  <a:srgbClr val="123A6B"/>
+                  <a:srgbClr val="0072CE"/>
                 </a:solidFill>
                 <a:latin typeface="Arial"/>
               </a:rPr>
@@ -27963,7 +27198,7 @@
             <a:r>
               <a:rPr sz="4200" b="1" i="0">
                 <a:solidFill>
-                  <a:srgbClr val="123A6B"/>
+                  <a:srgbClr val="0072CE"/>
                 </a:solidFill>
                 <a:latin typeface="Arial"/>
               </a:rPr>
@@ -28033,7 +27268,7 @@
             <a:r>
               <a:rPr sz="4200" b="1" i="0">
                 <a:solidFill>
-                  <a:srgbClr val="123A6B"/>
+                  <a:srgbClr val="0072CE"/>
                 </a:solidFill>
                 <a:latin typeface="Arial"/>
               </a:rPr>
@@ -28068,7 +27303,7 @@
             <a:r>
               <a:rPr sz="4200" b="1" i="0">
                 <a:solidFill>
-                  <a:srgbClr val="123A6B"/>
+                  <a:srgbClr val="0072CE"/>
                 </a:solidFill>
                 <a:latin typeface="Arial"/>
               </a:rPr>
@@ -28140,7 +27375,7 @@
             <a:fld id="{4B0E1F8A-6C1D-4E2A-9F3B-7A5C8D2E1F60}" type="slidenum">
               <a:rPr sz="1600" b="0" i="0">
                 <a:solidFill>
-                  <a:srgbClr val="5B6B82"/>
+                  <a:srgbClr val="0A2240"/>
                 </a:solidFill>
                 <a:latin typeface="Arial"/>
               </a:rPr>
@@ -28378,7 +27613,7 @@
             <a:fld id="{4B0E1F8A-6C1D-4E2A-9F3B-7A5C8D2E1F60}" type="slidenum">
               <a:rPr sz="1600" b="0" i="0">
                 <a:solidFill>
-                  <a:srgbClr val="5B6B82"/>
+                  <a:srgbClr val="0A2240"/>
                 </a:solidFill>
                 <a:latin typeface="Arial"/>
               </a:rPr>
@@ -28581,7 +27816,7 @@
             <a:fld id="{4B0E1F8A-6C1D-4E2A-9F3B-7A5C8D2E1F60}" type="slidenum">
               <a:rPr sz="1600" b="0" i="0">
                 <a:solidFill>
-                  <a:srgbClr val="5B6B82"/>
+                  <a:srgbClr val="0A2240"/>
                 </a:solidFill>
                 <a:latin typeface="Arial"/>
               </a:rPr>
@@ -28758,7 +27993,7 @@
             <a:fld id="{4B0E1F8A-6C1D-4E2A-9F3B-7A5C8D2E1F60}" type="slidenum">
               <a:rPr sz="1600" b="0" i="0">
                 <a:solidFill>
-                  <a:srgbClr val="5B6B82"/>
+                  <a:srgbClr val="0A2240"/>
                 </a:solidFill>
                 <a:latin typeface="Arial"/>
               </a:rPr>
@@ -28935,7 +28170,7 @@
             <a:fld id="{4B0E1F8A-6C1D-4E2A-9F3B-7A5C8D2E1F60}" type="slidenum">
               <a:rPr sz="1600" b="0" i="0">
                 <a:solidFill>
-                  <a:srgbClr val="5B6B82"/>
+                  <a:srgbClr val="0A2240"/>
                 </a:solidFill>
                 <a:latin typeface="Arial"/>
               </a:rPr>
@@ -29031,7 +28266,7 @@
             <a:r>
               <a:rPr sz="3400" b="1" i="0">
                 <a:solidFill>
-                  <a:srgbClr val="5B6B82"/>
+                  <a:srgbClr val="0A2240"/>
                 </a:solidFill>
                 <a:latin typeface="Arial"/>
               </a:rPr>
@@ -29048,14 +28283,14 @@
         </p:nvSpPr>
         <p:spPr>
           <a:xfrm>
-            <a:off x="548640" y="2176271"/>
-            <a:ext cx="1650492" cy="54864"/>
+            <a:off x="457200" y="2176271"/>
+            <a:ext cx="1303623" cy="54864"/>
           </a:xfrm>
           <a:prstGeom prst="rect">
             <a:avLst/>
           </a:prstGeom>
           <a:solidFill>
-            <a:srgbClr val="5B6B82"/>
+            <a:srgbClr val="0A2240"/>
           </a:solidFill>
           <a:ln>
             <a:noFill/>
@@ -29127,8 +28362,8 @@
         </p:nvSpPr>
         <p:spPr>
           <a:xfrm>
-            <a:off x="6324600" y="2176271"/>
-            <a:ext cx="1650492" cy="54864"/>
+            <a:off x="6233160" y="2176271"/>
+            <a:ext cx="1879637" cy="54864"/>
           </a:xfrm>
           <a:prstGeom prst="rect">
             <a:avLst/>
@@ -29401,7 +28636,7 @@
             <a:fld id="{4B0E1F8A-6C1D-4E2A-9F3B-7A5C8D2E1F60}" type="slidenum">
               <a:rPr sz="1600" b="0" i="0">
                 <a:solidFill>
-                  <a:srgbClr val="5B6B82"/>
+                  <a:srgbClr val="0A2240"/>
                 </a:solidFill>
                 <a:latin typeface="Arial"/>
               </a:rPr>
@@ -29709,7 +28944,7 @@
             <a:fld id="{4B0E1F8A-6C1D-4E2A-9F3B-7A5C8D2E1F60}" type="slidenum">
               <a:rPr sz="1600" b="0" i="0">
                 <a:solidFill>
-                  <a:srgbClr val="5B6B82"/>
+                  <a:srgbClr val="0A2240"/>
                 </a:solidFill>
                 <a:latin typeface="Arial"/>
               </a:rPr>
@@ -29851,7 +29086,7 @@
             <a:fld id="{4B0E1F8A-6C1D-4E2A-9F3B-7A5C8D2E1F60}" type="slidenum">
               <a:rPr sz="1600" b="0" i="0">
                 <a:solidFill>
-                  <a:srgbClr val="5B6B82"/>
+                  <a:srgbClr val="0A2240"/>
                 </a:solidFill>
                 <a:latin typeface="Arial"/>
               </a:rPr>
@@ -29947,7 +29182,7 @@
             <a:r>
               <a:rPr sz="4200" b="1" i="0">
                 <a:solidFill>
-                  <a:srgbClr val="123A6B"/>
+                  <a:srgbClr val="0072CE"/>
                 </a:solidFill>
                 <a:latin typeface="Arial"/>
               </a:rPr>
@@ -29982,7 +29217,7 @@
             <a:r>
               <a:rPr sz="4200" b="1" i="0">
                 <a:solidFill>
-                  <a:srgbClr val="123A6B"/>
+                  <a:srgbClr val="0072CE"/>
                 </a:solidFill>
                 <a:latin typeface="Arial"/>
               </a:rPr>
@@ -30052,7 +29287,7 @@
             <a:r>
               <a:rPr sz="4200" b="1" i="0">
                 <a:solidFill>
-                  <a:srgbClr val="123A6B"/>
+                  <a:srgbClr val="0072CE"/>
                 </a:solidFill>
                 <a:latin typeface="Arial"/>
               </a:rPr>
@@ -30087,7 +29322,7 @@
             <a:r>
               <a:rPr sz="4200" b="1" i="0">
                 <a:solidFill>
-                  <a:srgbClr val="123A6B"/>
+                  <a:srgbClr val="0072CE"/>
                 </a:solidFill>
                 <a:latin typeface="Arial"/>
               </a:rPr>
@@ -30157,7 +29392,7 @@
             <a:r>
               <a:rPr sz="4200" b="1" i="0">
                 <a:solidFill>
-                  <a:srgbClr val="123A6B"/>
+                  <a:srgbClr val="0072CE"/>
                 </a:solidFill>
                 <a:latin typeface="Arial"/>
               </a:rPr>
@@ -30192,7 +29427,7 @@
             <a:r>
               <a:rPr sz="4200" b="1" i="0">
                 <a:solidFill>
-                  <a:srgbClr val="123A6B"/>
+                  <a:srgbClr val="0072CE"/>
                 </a:solidFill>
                 <a:latin typeface="Arial"/>
               </a:rPr>
@@ -30264,7 +29499,7 @@
             <a:fld id="{4B0E1F8A-6C1D-4E2A-9F3B-7A5C8D2E1F60}" type="slidenum">
               <a:rPr sz="1600" b="0" i="0">
                 <a:solidFill>
-                  <a:srgbClr val="5B6B82"/>
+                  <a:srgbClr val="0A2240"/>
                 </a:solidFill>
                 <a:latin typeface="Arial"/>
               </a:rPr>
@@ -30325,7 +29560,7 @@
             <a:r>
               <a:rPr sz="4200" b="0" i="0">
                 <a:solidFill>
-                  <a:srgbClr val="D4D4D4"/>
+                  <a:srgbClr val="FFFFFF"/>
                 </a:solidFill>
                 <a:latin typeface="Arial"/>
               </a:rPr>
@@ -30360,7 +29595,7 @@
             <a:r>
               <a:rPr sz="3400" b="0" i="0">
                 <a:solidFill>
-                  <a:srgbClr val="6A9955"/>
+                  <a:srgbClr val="FFFFFF"/>
                 </a:solidFill>
                 <a:latin typeface="Arial"/>
               </a:rPr>
@@ -30395,7 +29630,7 @@
             <a:r>
               <a:rPr sz="3400" b="0" i="0">
                 <a:solidFill>
-                  <a:srgbClr val="D4D4D4"/>
+                  <a:srgbClr val="FFFFFF"/>
                 </a:solidFill>
                 <a:latin typeface="Arial"/>
               </a:rPr>
@@ -30430,7 +29665,7 @@
             <a:r>
               <a:rPr sz="3400" b="0" i="0">
                 <a:solidFill>
-                  <a:srgbClr val="6A9955"/>
+                  <a:srgbClr val="FFFFFF"/>
                 </a:solidFill>
                 <a:latin typeface="Arial"/>
               </a:rPr>
@@ -30465,7 +29700,7 @@
             <a:r>
               <a:rPr sz="3400" b="0" i="0">
                 <a:solidFill>
-                  <a:srgbClr val="D4D4D4"/>
+                  <a:srgbClr val="FFFFFF"/>
                 </a:solidFill>
                 <a:latin typeface="Arial"/>
               </a:rPr>
@@ -30500,7 +29735,7 @@
             <a:r>
               <a:rPr sz="3400" b="0" i="0">
                 <a:solidFill>
-                  <a:srgbClr val="6A9955"/>
+                  <a:srgbClr val="FFFFFF"/>
                 </a:solidFill>
                 <a:latin typeface="Arial"/>
               </a:rPr>
@@ -30535,7 +29770,7 @@
             <a:r>
               <a:rPr sz="3400" b="0" i="0">
                 <a:solidFill>
-                  <a:srgbClr val="D4D4D4"/>
+                  <a:srgbClr val="FFFFFF"/>
                 </a:solidFill>
                 <a:latin typeface="Arial"/>
               </a:rPr>
@@ -30605,7 +29840,7 @@
             <a:r>
               <a:rPr sz="3400" b="0" i="0">
                 <a:solidFill>
-                  <a:srgbClr val="D4D4D4"/>
+                  <a:srgbClr val="FFFFFF"/>
                 </a:solidFill>
                 <a:latin typeface="Arial"/>
               </a:rPr>
@@ -30642,7 +29877,7 @@
             <a:fld id="{4B0E1F8A-6C1D-4E2A-9F3B-7A5C8D2E1F60}" type="slidenum">
               <a:rPr sz="1600" b="0" i="0">
                 <a:solidFill>
-                  <a:srgbClr val="5B6B82"/>
+                  <a:srgbClr val="0A2240"/>
                 </a:solidFill>
                 <a:latin typeface="Arial"/>
               </a:rPr>
@@ -30845,7 +30080,7 @@
             <a:fld id="{4B0E1F8A-6C1D-4E2A-9F3B-7A5C8D2E1F60}" type="slidenum">
               <a:rPr sz="1600" b="0" i="0">
                 <a:solidFill>
-                  <a:srgbClr val="5B6B82"/>
+                  <a:srgbClr val="0A2240"/>
                 </a:solidFill>
                 <a:latin typeface="Arial"/>
               </a:rPr>
@@ -31048,7 +30283,7 @@
             <a:fld id="{4B0E1F8A-6C1D-4E2A-9F3B-7A5C8D2E1F60}" type="slidenum">
               <a:rPr sz="1600" b="0" i="0">
                 <a:solidFill>
-                  <a:srgbClr val="5B6B82"/>
+                  <a:srgbClr val="0A2240"/>
                 </a:solidFill>
                 <a:latin typeface="Arial"/>
               </a:rPr>
@@ -31127,7 +30362,7 @@
         <p:spPr>
           <a:xfrm>
             <a:off x="457200" y="1499616"/>
-            <a:ext cx="3984068" cy="518159"/>
+            <a:ext cx="3982382" cy="518159"/>
           </a:xfrm>
           <a:prstGeom prst="rect">
             <a:avLst/>
@@ -31144,11 +30379,11 @@
             <a:r>
               <a:rPr sz="3400" b="1" i="0">
                 <a:solidFill>
-                  <a:srgbClr val="0A2240"/>
-                </a:solidFill>
-                <a:latin typeface="Arial"/>
-              </a:rPr>
-              <a:t>One source</a:t>
+                  <a:srgbClr val="0072CE"/>
+                </a:solidFill>
+                <a:latin typeface="Arial"/>
+              </a:rPr>
+              <a:t>Convention</a:t>
             </a:r>
           </a:p>
         </p:txBody>
@@ -31161,65 +30396,74 @@
         </p:nvSpPr>
         <p:spPr>
           <a:xfrm>
-            <a:off x="457200" y="2154935"/>
-            <a:ext cx="2613660" cy="3605785"/>
-          </a:xfrm>
-          <a:prstGeom prst="rect">
-            <a:avLst/>
-          </a:prstGeom>
-          <a:noFill/>
-        </p:spPr>
-        <p:txBody>
-          <a:bodyPr wrap="square" lIns="0" rIns="0">
-            <a:noAutofit/>
-          </a:bodyPr>
-          <a:lstStyle/>
-          <a:p>
-            <a:pPr algn="l"/>
-            <a:r>
-              <a:rPr sz="3400" b="0" i="0">
-                <a:solidFill>
-                  <a:srgbClr val="0A2240"/>
-                </a:solidFill>
-                <a:latin typeface="Arial"/>
-              </a:rPr>
-              <a:t>Project over chat</a:t>
-            </a:r>
-          </a:p>
-        </p:txBody>
-      </p:sp>
-      <p:sp>
-        <p:nvSpPr>
-          <p:cNvPr id="5" name="TextBox 4"/>
-          <p:cNvSpPr txBox="1"/>
+            <a:off x="3746289" y="1499616"/>
+            <a:ext cx="5694948" cy="518159"/>
+          </a:xfrm>
+          <a:prstGeom prst="rect">
+            <a:avLst/>
+          </a:prstGeom>
+          <a:noFill/>
+        </p:spPr>
+        <p:txBody>
+          <a:bodyPr wrap="none" lIns="0" rIns="0">
+            <a:noAutofit/>
+          </a:bodyPr>
+          <a:lstStyle/>
+          <a:p>
+            <a:pPr algn="l"/>
+            <a:r>
+              <a:rPr sz="3400" b="1" i="0">
+                <a:solidFill>
+                  <a:srgbClr val="0072CE"/>
+                </a:solidFill>
+                <a:latin typeface="Arial"/>
+              </a:rPr>
+              <a:t>What it means</a:t>
+            </a:r>
+          </a:p>
+        </p:txBody>
+      </p:sp>
+      <p:sp>
+        <p:nvSpPr>
+          <p:cNvPr id="5" name="Rectangle 4"/>
+          <p:cNvSpPr/>
           <p:nvPr/>
         </p:nvSpPr>
         <p:spPr>
           <a:xfrm>
-            <a:off x="3345180" y="1499616"/>
-            <a:ext cx="2613660" cy="518159"/>
-          </a:xfrm>
-          <a:prstGeom prst="rect">
-            <a:avLst/>
-          </a:prstGeom>
-          <a:noFill/>
-        </p:spPr>
-        <p:txBody>
-          <a:bodyPr wrap="none" lIns="0" rIns="0">
-            <a:noAutofit/>
-          </a:bodyPr>
-          <a:lstStyle/>
-          <a:p>
-            <a:pPr algn="l"/>
-            <a:r>
-              <a:rPr sz="3400" b="1" i="0">
-                <a:solidFill>
-                  <a:srgbClr val="0A2240"/>
-                </a:solidFill>
-                <a:latin typeface="Arial"/>
-              </a:rPr>
-              <a:t>Log it</a:t>
-            </a:r>
+            <a:off x="457200" y="2072639"/>
+            <a:ext cx="8984037" cy="54864"/>
+          </a:xfrm>
+          <a:prstGeom prst="rect">
+            <a:avLst/>
+          </a:prstGeom>
+          <a:solidFill>
+            <a:srgbClr val="0072CE"/>
+          </a:solidFill>
+          <a:ln>
+            <a:noFill/>
+          </a:ln>
+          <a:effectLst/>
+        </p:spPr>
+        <p:style>
+          <a:lnRef idx="1">
+            <a:schemeClr val="accent1"/>
+          </a:lnRef>
+          <a:fillRef idx="3">
+            <a:schemeClr val="accent1"/>
+          </a:fillRef>
+          <a:effectRef idx="2">
+            <a:schemeClr val="accent1"/>
+          </a:effectRef>
+          <a:fontRef idx="minor">
+            <a:schemeClr val="lt1"/>
+          </a:fontRef>
+        </p:style>
+        <p:txBody>
+          <a:bodyPr rtlCol="0" anchor="ctr"/>
+          <a:lstStyle/>
+          <a:p>
+            <a:pPr algn="ctr"/>
           </a:p>
         </p:txBody>
       </p:sp>
@@ -31231,16 +30475,16 @@
         </p:nvSpPr>
         <p:spPr>
           <a:xfrm>
-            <a:off x="3345180" y="2154935"/>
-            <a:ext cx="2613660" cy="3605785"/>
-          </a:xfrm>
-          <a:prstGeom prst="rect">
-            <a:avLst/>
-          </a:prstGeom>
-          <a:noFill/>
-        </p:spPr>
-        <p:txBody>
-          <a:bodyPr wrap="square" lIns="0" rIns="0">
+            <a:off x="457200" y="2401823"/>
+            <a:ext cx="3754337" cy="633984"/>
+          </a:xfrm>
+          <a:prstGeom prst="rect">
+            <a:avLst/>
+          </a:prstGeom>
+          <a:noFill/>
+        </p:spPr>
+        <p:txBody>
+          <a:bodyPr wrap="none" lIns="0" rIns="0">
             <a:noAutofit/>
           </a:bodyPr>
           <a:lstStyle/>
@@ -31253,7 +30497,7 @@
                 </a:solidFill>
                 <a:latin typeface="Arial"/>
               </a:rPr>
-              <a:t>Decisions land in writing</a:t>
+              <a:t>One source</a:t>
             </a:r>
           </a:p>
         </p:txBody>
@@ -31266,29 +30510,29 @@
         </p:nvSpPr>
         <p:spPr>
           <a:xfrm>
-            <a:off x="6233160" y="1499616"/>
-            <a:ext cx="2613660" cy="518159"/>
-          </a:xfrm>
-          <a:prstGeom prst="rect">
-            <a:avLst/>
-          </a:prstGeom>
-          <a:noFill/>
-        </p:spPr>
-        <p:txBody>
-          <a:bodyPr wrap="none" lIns="0" rIns="0">
-            <a:noAutofit/>
-          </a:bodyPr>
-          <a:lstStyle/>
-          <a:p>
-            <a:pPr algn="l"/>
-            <a:r>
-              <a:rPr sz="3400" b="1" i="0">
+            <a:off x="3746289" y="2401823"/>
+            <a:ext cx="5694948" cy="633984"/>
+          </a:xfrm>
+          <a:prstGeom prst="rect">
+            <a:avLst/>
+          </a:prstGeom>
+          <a:noFill/>
+        </p:spPr>
+        <p:txBody>
+          <a:bodyPr wrap="none" lIns="0" rIns="0">
+            <a:noAutofit/>
+          </a:bodyPr>
+          <a:lstStyle/>
+          <a:p>
+            <a:pPr algn="l"/>
+            <a:r>
+              <a:rPr sz="3400" b="0" i="0">
                 <a:solidFill>
                   <a:srgbClr val="0A2240"/>
                 </a:solidFill>
                 <a:latin typeface="Arial"/>
               </a:rPr>
-              <a:t>Shared</a:t>
+              <a:t>Project over chat</a:t>
             </a:r>
           </a:p>
         </p:txBody>
@@ -31301,16 +30545,16 @@
         </p:nvSpPr>
         <p:spPr>
           <a:xfrm>
-            <a:off x="6233160" y="2154935"/>
-            <a:ext cx="2613660" cy="3605785"/>
-          </a:xfrm>
-          <a:prstGeom prst="rect">
-            <a:avLst/>
-          </a:prstGeom>
-          <a:noFill/>
-        </p:spPr>
-        <p:txBody>
-          <a:bodyPr wrap="square" lIns="0" rIns="0">
+            <a:off x="457200" y="3310127"/>
+            <a:ext cx="2740449" cy="633984"/>
+          </a:xfrm>
+          <a:prstGeom prst="rect">
+            <a:avLst/>
+          </a:prstGeom>
+          <a:noFill/>
+        </p:spPr>
+        <p:txBody>
+          <a:bodyPr wrap="none" lIns="0" rIns="0">
             <a:noAutofit/>
           </a:bodyPr>
           <a:lstStyle/>
@@ -31323,7 +30567,7 @@
                 </a:solidFill>
                 <a:latin typeface="Arial"/>
               </a:rPr>
-              <a:t>Everyone reads it first</a:t>
+              <a:t>Log it</a:t>
             </a:r>
           </a:p>
         </p:txBody>
@@ -31336,29 +30580,29 @@
         </p:nvSpPr>
         <p:spPr>
           <a:xfrm>
-            <a:off x="9121140" y="1499616"/>
-            <a:ext cx="2613660" cy="518159"/>
-          </a:xfrm>
-          <a:prstGeom prst="rect">
-            <a:avLst/>
-          </a:prstGeom>
-          <a:noFill/>
-        </p:spPr>
-        <p:txBody>
-          <a:bodyPr wrap="none" lIns="0" rIns="0">
-            <a:noAutofit/>
-          </a:bodyPr>
-          <a:lstStyle/>
-          <a:p>
-            <a:pPr algn="l"/>
-            <a:r>
-              <a:rPr sz="3400" b="1" i="0">
+            <a:off x="3746289" y="3310127"/>
+            <a:ext cx="7593985" cy="633984"/>
+          </a:xfrm>
+          <a:prstGeom prst="rect">
+            <a:avLst/>
+          </a:prstGeom>
+          <a:noFill/>
+        </p:spPr>
+        <p:txBody>
+          <a:bodyPr wrap="none" lIns="0" rIns="0">
+            <a:noAutofit/>
+          </a:bodyPr>
+          <a:lstStyle/>
+          <a:p>
+            <a:pPr algn="l"/>
+            <a:r>
+              <a:rPr sz="3400" b="0" i="0">
                 <a:solidFill>
                   <a:srgbClr val="0A2240"/>
                 </a:solidFill>
                 <a:latin typeface="Arial"/>
               </a:rPr>
-              <a:t>Update</a:t>
+              <a:t>Decisions land in writing</a:t>
             </a:r>
           </a:p>
         </p:txBody>
@@ -31371,16 +30615,16 @@
         </p:nvSpPr>
         <p:spPr>
           <a:xfrm>
-            <a:off x="9121140" y="2154935"/>
-            <a:ext cx="2613660" cy="3605785"/>
-          </a:xfrm>
-          <a:prstGeom prst="rect">
-            <a:avLst/>
-          </a:prstGeom>
-          <a:noFill/>
-        </p:spPr>
-        <p:txBody>
-          <a:bodyPr wrap="square" lIns="0" rIns="0">
+            <a:off x="457200" y="4218431"/>
+            <a:ext cx="2740449" cy="633984"/>
+          </a:xfrm>
+          <a:prstGeom prst="rect">
+            <a:avLst/>
+          </a:prstGeom>
+          <a:noFill/>
+        </p:spPr>
+        <p:txBody>
+          <a:bodyPr wrap="none" lIns="0" rIns="0">
             <a:noAutofit/>
           </a:bodyPr>
           <a:lstStyle/>
@@ -31393,6 +30637,111 @@
                 </a:solidFill>
                 <a:latin typeface="Arial"/>
               </a:rPr>
+              <a:t>Shared</a:t>
+            </a:r>
+          </a:p>
+        </p:txBody>
+      </p:sp>
+      <p:sp>
+        <p:nvSpPr>
+          <p:cNvPr id="11" name="TextBox 10"/>
+          <p:cNvSpPr txBox="1"/>
+          <p:nvPr/>
+        </p:nvSpPr>
+        <p:spPr>
+          <a:xfrm>
+            <a:off x="3746289" y="4218431"/>
+            <a:ext cx="6863972" cy="633984"/>
+          </a:xfrm>
+          <a:prstGeom prst="rect">
+            <a:avLst/>
+          </a:prstGeom>
+          <a:noFill/>
+        </p:spPr>
+        <p:txBody>
+          <a:bodyPr wrap="none" lIns="0" rIns="0">
+            <a:noAutofit/>
+          </a:bodyPr>
+          <a:lstStyle/>
+          <a:p>
+            <a:pPr algn="l"/>
+            <a:r>
+              <a:rPr sz="3400" b="0" i="0">
+                <a:solidFill>
+                  <a:srgbClr val="0A2240"/>
+                </a:solidFill>
+                <a:latin typeface="Arial"/>
+              </a:rPr>
+              <a:t>Everyone reads it first</a:t>
+            </a:r>
+          </a:p>
+        </p:txBody>
+      </p:sp>
+      <p:sp>
+        <p:nvSpPr>
+          <p:cNvPr id="12" name="TextBox 11"/>
+          <p:cNvSpPr txBox="1"/>
+          <p:nvPr/>
+        </p:nvSpPr>
+        <p:spPr>
+          <a:xfrm>
+            <a:off x="457200" y="5126735"/>
+            <a:ext cx="2740449" cy="633984"/>
+          </a:xfrm>
+          <a:prstGeom prst="rect">
+            <a:avLst/>
+          </a:prstGeom>
+          <a:noFill/>
+        </p:spPr>
+        <p:txBody>
+          <a:bodyPr wrap="none" lIns="0" rIns="0">
+            <a:noAutofit/>
+          </a:bodyPr>
+          <a:lstStyle/>
+          <a:p>
+            <a:pPr algn="l"/>
+            <a:r>
+              <a:rPr sz="3400" b="0" i="0">
+                <a:solidFill>
+                  <a:srgbClr val="0A2240"/>
+                </a:solidFill>
+                <a:latin typeface="Arial"/>
+              </a:rPr>
+              <a:t>Update</a:t>
+            </a:r>
+          </a:p>
+        </p:txBody>
+      </p:sp>
+      <p:sp>
+        <p:nvSpPr>
+          <p:cNvPr id="13" name="TextBox 12"/>
+          <p:cNvSpPr txBox="1"/>
+          <p:nvPr/>
+        </p:nvSpPr>
+        <p:spPr>
+          <a:xfrm>
+            <a:off x="3746289" y="5126735"/>
+            <a:ext cx="8445711" cy="633984"/>
+          </a:xfrm>
+          <a:prstGeom prst="rect">
+            <a:avLst/>
+          </a:prstGeom>
+          <a:noFill/>
+        </p:spPr>
+        <p:txBody>
+          <a:bodyPr wrap="none" lIns="0" rIns="0">
+            <a:noAutofit/>
+          </a:bodyPr>
+          <a:lstStyle/>
+          <a:p>
+            <a:pPr algn="l"/>
+            <a:r>
+              <a:rPr sz="3400" b="0" i="0">
+                <a:solidFill>
+                  <a:srgbClr val="0A2240"/>
+                </a:solidFill>
+                <a:latin typeface="Arial"/>
+              </a:rPr>
               <a:t>Change it when scope does</a:t>
             </a:r>
           </a:p>
@@ -31400,7 +30749,7 @@
       </p:sp>
       <p:sp>
         <p:nvSpPr>
-          <p:cNvPr id="11" name="TextBox 10"/>
+          <p:cNvPr id="14" name="TextBox 13"/>
           <p:cNvSpPr/>
           <p:nvPr>
             <p:ph type="sldNum" idx="12"/>
@@ -31426,7 +30775,7 @@
             <a:fld id="{4B0E1F8A-6C1D-4E2A-9F3B-7A5C8D2E1F60}" type="slidenum">
               <a:rPr sz="1600" b="0" i="0">
                 <a:solidFill>
-                  <a:srgbClr val="5B6B82"/>
+                  <a:srgbClr val="0A2240"/>
                 </a:solidFill>
                 <a:latin typeface="Arial"/>
               </a:rPr>
@@ -31629,7 +30978,7 @@
             <a:fld id="{4B0E1F8A-6C1D-4E2A-9F3B-7A5C8D2E1F60}" type="slidenum">
               <a:rPr sz="1600" b="0" i="0">
                 <a:solidFill>
-                  <a:srgbClr val="5B6B82"/>
+                  <a:srgbClr val="0A2240"/>
                 </a:solidFill>
                 <a:latin typeface="Arial"/>
               </a:rPr>
@@ -31832,7 +31181,7 @@
             <a:fld id="{4B0E1F8A-6C1D-4E2A-9F3B-7A5C8D2E1F60}" type="slidenum">
               <a:rPr sz="1600" b="0" i="0">
                 <a:solidFill>
-                  <a:srgbClr val="5B6B82"/>
+                  <a:srgbClr val="0A2240"/>
                 </a:solidFill>
                 <a:latin typeface="Arial"/>
               </a:rPr>
@@ -32140,7 +31489,7 @@
             <a:fld id="{4B0E1F8A-6C1D-4E2A-9F3B-7A5C8D2E1F60}" type="slidenum">
               <a:rPr sz="1600" b="0" i="0">
                 <a:solidFill>
-                  <a:srgbClr val="5B6B82"/>
+                  <a:srgbClr val="0A2240"/>
                 </a:solidFill>
                 <a:latin typeface="Arial"/>
               </a:rPr>
@@ -32343,153 +31692,11 @@
             <a:fld id="{4B0E1F8A-6C1D-4E2A-9F3B-7A5C8D2E1F60}" type="slidenum">
               <a:rPr sz="1600" b="0" i="0">
                 <a:solidFill>
-                  <a:srgbClr val="5B6B82"/>
+                  <a:srgbClr val="0A2240"/>
                 </a:solidFill>
                 <a:latin typeface="Arial"/>
               </a:rPr>
               <a:t>48</a:t>
-            </a:fld>
-          </a:p>
-        </p:txBody>
-      </p:sp>
-    </p:spTree>
-  </p:cSld>
-  <p:clrMapOvr>
-    <a:masterClrMapping/>
-  </p:clrMapOvr>
-</p:sld>
-</file>
-
-<file path=ppt/slides/slide49.xml><?xml version="1.0" encoding="utf-8"?>
-<p:sld xmlns:a="http://schemas.openxmlformats.org/drawingml/2006/main" xmlns:p="http://schemas.openxmlformats.org/presentationml/2006/main" xmlns:r="http://schemas.openxmlformats.org/officeDocument/2006/relationships" showMasterSp="0">
-  <p:cSld>
-    <p:bg>
-      <p:bgPr>
-        <a:solidFill>
-          <a:srgbClr val="FFFFFF"/>
-        </a:solidFill>
-        <a:effectLst/>
-      </p:bgPr>
-    </p:bg>
-    <p:spTree>
-      <p:nvGrpSpPr>
-        <p:cNvPr id="1" name=""/>
-        <p:cNvGrpSpPr/>
-        <p:nvPr/>
-      </p:nvGrpSpPr>
-      <p:grpSpPr/>
-      <p:sp>
-        <p:nvSpPr>
-          <p:cNvPr id="2" name="Rectangle 1"/>
-          <p:cNvSpPr/>
-          <p:nvPr/>
-        </p:nvSpPr>
-        <p:spPr>
-          <a:xfrm>
-            <a:off x="457200" y="2926080"/>
-            <a:ext cx="128016" cy="1005840"/>
-          </a:xfrm>
-          <a:prstGeom prst="rect">
-            <a:avLst/>
-          </a:prstGeom>
-          <a:solidFill>
-            <a:srgbClr val="0072CE"/>
-          </a:solidFill>
-          <a:ln>
-            <a:noFill/>
-          </a:ln>
-          <a:effectLst/>
-        </p:spPr>
-        <p:style>
-          <a:lnRef idx="1">
-            <a:schemeClr val="accent1"/>
-          </a:lnRef>
-          <a:fillRef idx="3">
-            <a:schemeClr val="accent1"/>
-          </a:fillRef>
-          <a:effectRef idx="2">
-            <a:schemeClr val="accent1"/>
-          </a:effectRef>
-          <a:fontRef idx="minor">
-            <a:schemeClr val="lt1"/>
-          </a:fontRef>
-        </p:style>
-        <p:txBody>
-          <a:bodyPr rtlCol="0" anchor="ctr"/>
-          <a:lstStyle/>
-          <a:p>
-            <a:pPr algn="ctr"/>
-          </a:p>
-        </p:txBody>
-      </p:sp>
-      <p:sp>
-        <p:nvSpPr>
-          <p:cNvPr id="3" name="TextBox 2"/>
-          <p:cNvSpPr txBox="1"/>
-          <p:nvPr/>
-        </p:nvSpPr>
-        <p:spPr>
-          <a:xfrm>
-            <a:off x="996696" y="2926080"/>
-            <a:ext cx="11195304" cy="1005840"/>
-          </a:xfrm>
-          <a:prstGeom prst="rect">
-            <a:avLst/>
-          </a:prstGeom>
-          <a:noFill/>
-        </p:spPr>
-        <p:txBody>
-          <a:bodyPr wrap="none" lIns="0" rIns="0">
-            <a:noAutofit/>
-          </a:bodyPr>
-          <a:lstStyle/>
-          <a:p>
-            <a:pPr algn="l"/>
-            <a:r>
-              <a:rPr sz="6000" b="1" i="0">
-                <a:solidFill>
-                  <a:srgbClr val="0A2240"/>
-                </a:solidFill>
-                <a:latin typeface="Arial"/>
-              </a:rPr>
-              <a:t>Can a stranger restate it?</a:t>
-            </a:r>
-          </a:p>
-        </p:txBody>
-      </p:sp>
-      <p:sp>
-        <p:nvSpPr>
-          <p:cNvPr id="4" name="TextBox 3"/>
-          <p:cNvSpPr/>
-          <p:nvPr>
-            <p:ph type="sldNum" idx="12"/>
-          </p:nvPr>
-        </p:nvSpPr>
-        <p:spPr>
-          <a:xfrm>
-            <a:off x="11186160" y="6035040"/>
-            <a:ext cx="548640" cy="365760"/>
-          </a:xfrm>
-          <a:prstGeom prst="rect">
-            <a:avLst/>
-          </a:prstGeom>
-          <a:noFill/>
-        </p:spPr>
-        <p:txBody>
-          <a:bodyPr wrap="none" lIns="0" rIns="0">
-            <a:noAutofit/>
-          </a:bodyPr>
-          <a:lstStyle/>
-          <a:p>
-            <a:pPr algn="r"/>
-            <a:fld id="{4B0E1F8A-6C1D-4E2A-9F3B-7A5C8D2E1F60}" type="slidenum">
-              <a:rPr sz="1600" b="0" i="0">
-                <a:solidFill>
-                  <a:srgbClr val="5B6B82"/>
-                </a:solidFill>
-                <a:latin typeface="Arial"/>
-              </a:rPr>
-              <a:t>49</a:t>
             </a:fld>
           </a:p>
         </p:txBody>
@@ -32721,7 +31928,7 @@
             <a:r>
               <a:rPr sz="4200" b="1" i="0">
                 <a:solidFill>
-                  <a:srgbClr val="5B6B82"/>
+                  <a:srgbClr val="0A2240"/>
                 </a:solidFill>
                 <a:latin typeface="Arial"/>
               </a:rPr>
@@ -32758,7 +31965,7 @@
             <a:fld id="{4B0E1F8A-6C1D-4E2A-9F3B-7A5C8D2E1F60}" type="slidenum">
               <a:rPr sz="1600" b="0" i="0">
                 <a:solidFill>
-                  <a:srgbClr val="5B6B82"/>
+                  <a:srgbClr val="0A2240"/>
                 </a:solidFill>
                 <a:latin typeface="Arial"/>
               </a:rPr>
@@ -32854,7 +32061,7 @@
             <a:r>
               <a:rPr sz="4200" b="1" i="0">
                 <a:solidFill>
-                  <a:srgbClr val="123A6B"/>
+                  <a:srgbClr val="0072CE"/>
                 </a:solidFill>
                 <a:latin typeface="Arial"/>
               </a:rPr>
@@ -32872,13 +32079,13 @@
         <p:spPr>
           <a:xfrm>
             <a:off x="457200" y="2194560"/>
-            <a:ext cx="784098" cy="54864"/>
+            <a:ext cx="593303" cy="54864"/>
           </a:xfrm>
           <a:prstGeom prst="rect">
             <a:avLst/>
           </a:prstGeom>
           <a:solidFill>
-            <a:srgbClr val="123A6B"/>
+            <a:srgbClr val="0072CE"/>
           </a:solidFill>
           <a:ln>
             <a:noFill/>
@@ -32933,7 +32140,7 @@
             <a:r>
               <a:rPr sz="3400" b="1" i="0">
                 <a:solidFill>
-                  <a:srgbClr val="123A6B"/>
+                  <a:srgbClr val="0072CE"/>
                 </a:solidFill>
                 <a:latin typeface="Arial"/>
               </a:rPr>
@@ -33003,7 +32210,7 @@
             <a:r>
               <a:rPr sz="4200" b="1" i="0">
                 <a:solidFill>
-                  <a:srgbClr val="123A6B"/>
+                  <a:srgbClr val="0072CE"/>
                 </a:solidFill>
                 <a:latin typeface="Arial"/>
               </a:rPr>
@@ -33021,13 +32228,13 @@
         <p:spPr>
           <a:xfrm>
             <a:off x="3345180" y="2194560"/>
-            <a:ext cx="784098" cy="54864"/>
+            <a:ext cx="593303" cy="54864"/>
           </a:xfrm>
           <a:prstGeom prst="rect">
             <a:avLst/>
           </a:prstGeom>
           <a:solidFill>
-            <a:srgbClr val="123A6B"/>
+            <a:srgbClr val="0072CE"/>
           </a:solidFill>
           <a:ln>
             <a:noFill/>
@@ -33082,7 +32289,7 @@
             <a:r>
               <a:rPr sz="3400" b="1" i="0">
                 <a:solidFill>
-                  <a:srgbClr val="123A6B"/>
+                  <a:srgbClr val="0072CE"/>
                 </a:solidFill>
                 <a:latin typeface="Arial"/>
               </a:rPr>
@@ -33152,7 +32359,7 @@
             <a:r>
               <a:rPr sz="4200" b="1" i="0">
                 <a:solidFill>
-                  <a:srgbClr val="123A6B"/>
+                  <a:srgbClr val="0072CE"/>
                 </a:solidFill>
                 <a:latin typeface="Arial"/>
               </a:rPr>
@@ -33170,13 +32377,13 @@
         <p:spPr>
           <a:xfrm>
             <a:off x="6233160" y="2194560"/>
-            <a:ext cx="784098" cy="54864"/>
+            <a:ext cx="593303" cy="54864"/>
           </a:xfrm>
           <a:prstGeom prst="rect">
             <a:avLst/>
           </a:prstGeom>
           <a:solidFill>
-            <a:srgbClr val="123A6B"/>
+            <a:srgbClr val="0072CE"/>
           </a:solidFill>
           <a:ln>
             <a:noFill/>
@@ -33231,7 +32438,7 @@
             <a:r>
               <a:rPr sz="3400" b="1" i="0">
                 <a:solidFill>
-                  <a:srgbClr val="123A6B"/>
+                  <a:srgbClr val="0072CE"/>
                 </a:solidFill>
                 <a:latin typeface="Arial"/>
               </a:rPr>
@@ -33301,7 +32508,7 @@
             <a:r>
               <a:rPr sz="4200" b="1" i="0">
                 <a:solidFill>
-                  <a:srgbClr val="123A6B"/>
+                  <a:srgbClr val="0072CE"/>
                 </a:solidFill>
                 <a:latin typeface="Arial"/>
               </a:rPr>
@@ -33319,13 +32526,13 @@
         <p:spPr>
           <a:xfrm>
             <a:off x="9121140" y="2194560"/>
-            <a:ext cx="784098" cy="54864"/>
+            <a:ext cx="593303" cy="54864"/>
           </a:xfrm>
           <a:prstGeom prst="rect">
             <a:avLst/>
           </a:prstGeom>
           <a:solidFill>
-            <a:srgbClr val="123A6B"/>
+            <a:srgbClr val="0072CE"/>
           </a:solidFill>
           <a:ln>
             <a:noFill/>
@@ -33380,7 +32587,7 @@
             <a:r>
               <a:rPr sz="3400" b="1" i="0">
                 <a:solidFill>
-                  <a:srgbClr val="123A6B"/>
+                  <a:srgbClr val="0072CE"/>
                 </a:solidFill>
                 <a:latin typeface="Arial"/>
               </a:rPr>
@@ -33452,7 +32659,7 @@
             <a:fld id="{4B0E1F8A-6C1D-4E2A-9F3B-7A5C8D2E1F60}" type="slidenum">
               <a:rPr sz="1600" b="0" i="0">
                 <a:solidFill>
-                  <a:srgbClr val="5B6B82"/>
+                  <a:srgbClr val="0A2240"/>
                 </a:solidFill>
                 <a:latin typeface="Arial"/>
               </a:rPr>
@@ -33629,7 +32836,7 @@
             <a:fld id="{4B0E1F8A-6C1D-4E2A-9F3B-7A5C8D2E1F60}" type="slidenum">
               <a:rPr sz="1600" b="0" i="0">
                 <a:solidFill>
-                  <a:srgbClr val="5B6B82"/>
+                  <a:srgbClr val="0A2240"/>
                 </a:solidFill>
                 <a:latin typeface="Arial"/>
               </a:rPr>
@@ -33806,7 +33013,7 @@
             <a:fld id="{4B0E1F8A-6C1D-4E2A-9F3B-7A5C8D2E1F60}" type="slidenum">
               <a:rPr sz="1600" b="0" i="0">
                 <a:solidFill>
-                  <a:srgbClr val="5B6B82"/>
+                  <a:srgbClr val="0A2240"/>
                 </a:solidFill>
                 <a:latin typeface="Arial"/>
               </a:rPr>
@@ -33983,7 +33190,7 @@
             <a:fld id="{4B0E1F8A-6C1D-4E2A-9F3B-7A5C8D2E1F60}" type="slidenum">
               <a:rPr sz="1600" b="0" i="0">
                 <a:solidFill>
-                  <a:srgbClr val="5B6B82"/>
+                  <a:srgbClr val="0A2240"/>
                 </a:solidFill>
                 <a:latin typeface="Arial"/>
               </a:rPr>
